--- a/Resumen_Ejecutivo_Riesgos.pptx
+++ b/Resumen_Ejecutivo_Riesgos.pptx
@@ -7,9 +7,12 @@
   <p:sldIdLst>
     <p:sldId id="256" r:id="rId2"/>
     <p:sldId id="257" r:id="rId3"/>
+    <p:sldId id="258" r:id="rId4"/>
+    <p:sldId id="259" r:id="rId5"/>
+    <p:sldId id="260" r:id="rId6"/>
   </p:sldIdLst>
   <p:notesMasterIdLst>
-    <p:notesMasterId r:id="rId4"/>
+    <p:notesMasterId r:id="rId7"/>
   </p:notesMasterIdLst>
   <p:sldSz cx="12192000" cy="6858000"/>
   <p:notesSz cx="6858000" cy="12192000"/>
@@ -108,14 +111,29 @@
   <p:extLst>
     <p:ext uri="{521415D9-36F7-43E2-AB2F-B90AF26B5E84}">
       <p14:sectionLst xmlns:p14="http://schemas.microsoft.com/office/powerpoint/2010/main">
-        <p14:section name="Resumen" id="{55c2b855-e4c2-4caa-71e6-7591c7fe953c}">
+        <p14:section name="Portada" id="{4bf66c11-3d0a-80f7-9adf-e739d72e7490}">
           <p14:sldIdLst>
             <p14:sldId id="256"/>
           </p14:sldIdLst>
         </p14:section>
-        <p14:section name="Calendario SSF" id="{6a5bba22-a3ef-4525-5b44-930bde5cd522}">
+        <p14:section name="Panorama" id="{bb567df1-6ee1-6f29-55d4-d727ff6a01fd}">
           <p14:sldIdLst>
             <p14:sldId id="257"/>
+          </p14:sldIdLst>
+        </p14:section>
+        <p14:section name="Resumen por frente" id="{1e2aec36-8910-9876-b6b9-2eff0ba65f0b}">
+          <p14:sldIdLst>
+            <p14:sldId id="258"/>
+          </p14:sldIdLst>
+        </p14:section>
+        <p14:section name="Calendario SSF" id="{1c1dc4b8-a400-e0d7-5155-0e271be34f20}">
+          <p14:sldIdLst>
+            <p14:sldId id="259"/>
+          </p14:sldIdLst>
+        </p14:section>
+        <p14:section name="Prioridades" id="{9e292462-f976-cadb-ded2-d6176989f2d9}">
+          <p14:sldIdLst>
+            <p14:sldId id="260"/>
           </p14:sldIdLst>
         </p14:section>
       </p14:sectionLst>
@@ -125,6 +143,363 @@
     </p:ext>
   </p:extLst>
 </p:presentation>
+</file>
+
+<file path=ppt/charts/chart1.xml><?xml version="1.0" encoding="utf-8"?>
+<c:chartSpace xmlns:c="http://schemas.openxmlformats.org/drawingml/2006/chart" xmlns:a="http://schemas.openxmlformats.org/drawingml/2006/main" xmlns:r="http://schemas.openxmlformats.org/officeDocument/2006/relationships">
+  <c:date1904 val="0"/>
+  <c:roundedCorners val="1"/>
+  <c:chart>
+    <c:autoTitleDeleted val="1"/>
+    <c:plotArea>
+      <c:layout/>
+      <c:barChart>
+        <c:barDir val="bar"/>
+        <c:grouping val="stacked"/>
+        <c:varyColors val="0"/>
+        <c:ser>
+          <c:idx val="0"/>
+          <c:order val="0"/>
+          <c:tx>
+            <c:strRef>
+              <c:f>Sheet1!$B$1</c:f>
+              <c:strCache>
+                <c:ptCount val="1"/>
+                <c:pt idx="0">
+                  <c:v>S1</c:v>
+                </c:pt>
+              </c:strCache>
+            </c:strRef>
+          </c:tx>
+          <c:spPr>
+            <a:solidFill>
+              <a:srgbClr val="0B2E59"/>
+            </a:solidFill>
+            <a:effectLst/>
+          </c:spPr>
+          <c:invertIfNegative val="0"/>
+          <c:dLbls>
+            <c:numFmt formatCode="0;;" sourceLinked="0"/>
+            <c:txPr>
+              <a:bodyPr/>
+              <a:lstStyle/>
+              <a:p>
+                <a:pPr>
+                  <a:defRPr b="1" i="0" strike="noStrike" sz="1100" u="none">
+                    <a:solidFill>
+                      <a:srgbClr val="FFFFFF"/>
+                    </a:solidFill>
+                    <a:latin typeface="+mn-lt"/>
+                  </a:defRPr>
+                </a:pPr>
+              </a:p>
+            </c:txPr>
+            <c:dLblPos val="ctr"/>
+            <c:showLegendKey val="0"/>
+            <c:showVal val="1"/>
+            <c:showCatName val="0"/>
+            <c:showSerName val="0"/>
+            <c:showPercent val="0"/>
+            <c:showBubbleSize val="0"/>
+            <c:showLeaderLines val="0"/>
+          </c:dLbls>
+          <c:cat>
+            <c:multiLvlStrRef>
+              <c:f>Sheet1!$A$2:$A$6</c:f>
+              <c:multiLvlStrCache>
+                <c:ptCount val="5"/>
+                <c:lvl>
+                  <c:pt idx="0">
+                    <c:v>Cumplimiento Regulatorio</c:v>
+                  </c:pt>
+                  <c:pt idx="1">
+                    <c:v>No Financieros</c:v>
+                  </c:pt>
+                  <c:pt idx="2">
+                    <c:v>Cumplimiento Normativo</c:v>
+                  </c:pt>
+                  <c:pt idx="3">
+                    <c:v>Financieros</c:v>
+                  </c:pt>
+                  <c:pt idx="4">
+                    <c:v>Avalúos</c:v>
+                  </c:pt>
+                </c:lvl>
+              </c:multiLvlStrCache>
+            </c:multiLvlStrRef>
+          </c:cat>
+          <c:val>
+            <c:numRef>
+              <c:f>Sheet1!$B$2:$B$6</c:f>
+              <c:numCache>
+                <c:formatCode>General</c:formatCode>
+                <c:ptCount val="5"/>
+                <c:pt idx="0">
+                  <c:v>3</c:v>
+                </c:pt>
+                <c:pt idx="1">
+                  <c:v>2</c:v>
+                </c:pt>
+                <c:pt idx="2">
+                  <c:v>1</c:v>
+                </c:pt>
+                <c:pt idx="3">
+                  <c:v>2</c:v>
+                </c:pt>
+                <c:pt idx="4">
+                  <c:v>3</c:v>
+                </c:pt>
+              </c:numCache>
+            </c:numRef>
+          </c:val>
+        </c:ser>
+        <c:ser>
+          <c:idx val="1"/>
+          <c:order val="1"/>
+          <c:tx>
+            <c:strRef>
+              <c:f>Sheet1!$C$1</c:f>
+              <c:strCache>
+                <c:ptCount val="1"/>
+                <c:pt idx="0">
+                  <c:v>S2</c:v>
+                </c:pt>
+              </c:strCache>
+            </c:strRef>
+          </c:tx>
+          <c:spPr>
+            <a:solidFill>
+              <a:srgbClr val="F2B233"/>
+            </a:solidFill>
+            <a:effectLst/>
+          </c:spPr>
+          <c:invertIfNegative val="0"/>
+          <c:dLbls>
+            <c:numFmt formatCode="0;;" sourceLinked="0"/>
+            <c:txPr>
+              <a:bodyPr/>
+              <a:lstStyle/>
+              <a:p>
+                <a:pPr>
+                  <a:defRPr b="1" i="0" strike="noStrike" sz="1100" u="none">
+                    <a:solidFill>
+                      <a:srgbClr val="FFFFFF"/>
+                    </a:solidFill>
+                    <a:latin typeface="+mn-lt"/>
+                  </a:defRPr>
+                </a:pPr>
+              </a:p>
+            </c:txPr>
+            <c:dLblPos val="ctr"/>
+            <c:showLegendKey val="0"/>
+            <c:showVal val="1"/>
+            <c:showCatName val="0"/>
+            <c:showSerName val="0"/>
+            <c:showPercent val="0"/>
+            <c:showBubbleSize val="0"/>
+            <c:showLeaderLines val="0"/>
+          </c:dLbls>
+          <c:cat>
+            <c:multiLvlStrRef>
+              <c:f>Sheet1!$A$2:$A$6</c:f>
+              <c:multiLvlStrCache>
+                <c:ptCount val="5"/>
+                <c:lvl>
+                  <c:pt idx="0">
+                    <c:v>Cumplimiento Regulatorio</c:v>
+                  </c:pt>
+                  <c:pt idx="1">
+                    <c:v>No Financieros</c:v>
+                  </c:pt>
+                  <c:pt idx="2">
+                    <c:v>Cumplimiento Normativo</c:v>
+                  </c:pt>
+                  <c:pt idx="3">
+                    <c:v>Financieros</c:v>
+                  </c:pt>
+                  <c:pt idx="4">
+                    <c:v>Avalúos</c:v>
+                  </c:pt>
+                </c:lvl>
+              </c:multiLvlStrCache>
+            </c:multiLvlStrRef>
+          </c:cat>
+          <c:val>
+            <c:numRef>
+              <c:f>Sheet1!$C$2:$C$6</c:f>
+              <c:numCache>
+                <c:formatCode>General</c:formatCode>
+                <c:ptCount val="5"/>
+                <c:pt idx="0">
+                  <c:v>1</c:v>
+                </c:pt>
+                <c:pt idx="1">
+                  <c:v>3</c:v>
+                </c:pt>
+                <c:pt idx="2">
+                  <c:v>2</c:v>
+                </c:pt>
+                <c:pt idx="3">
+                  <c:v>1</c:v>
+                </c:pt>
+                <c:pt idx="4">
+                  <c:v>0</c:v>
+                </c:pt>
+              </c:numCache>
+            </c:numRef>
+          </c:val>
+        </c:ser>
+        <c:dLbls>
+          <c:numFmt formatCode="0;;" sourceLinked="0"/>
+          <c:txPr>
+            <a:bodyPr/>
+            <a:lstStyle/>
+            <a:p>
+              <a:pPr>
+                <a:defRPr b="1" i="0" strike="noStrike" sz="1100" u="none">
+                  <a:solidFill>
+                    <a:srgbClr val="FFFFFF"/>
+                  </a:solidFill>
+                  <a:latin typeface="+mn-lt"/>
+                </a:defRPr>
+              </a:pPr>
+            </a:p>
+          </c:txPr>
+          <c:dLblPos val="ctr"/>
+          <c:showLegendKey val="0"/>
+          <c:showVal val="1"/>
+          <c:showCatName val="0"/>
+          <c:showSerName val="0"/>
+          <c:showPercent val="0"/>
+          <c:showBubbleSize val="0"/>
+          <c:showLeaderLines val="0"/>
+        </c:dLbls>
+        <c:gapWidth val="55"/>
+        <c:overlap val="100"/>
+        <c:axId val="2094734554"/>
+        <c:axId val="2094734552"/>
+        <c:axId val="2094734556"/>
+      </c:barChart>
+      <c:catAx>
+        <c:axId val="2094734554"/>
+        <c:scaling>
+          <c:orientation val="maxMin"/>
+        </c:scaling>
+        <c:delete val="0"/>
+        <c:axPos val="l"/>
+        <c:numFmt formatCode="General" sourceLinked="1"/>
+        <c:majorTickMark val="out"/>
+        <c:minorTickMark val="none"/>
+        <c:tickLblPos val="nextTo"/>
+        <c:spPr>
+          <a:ln w="12700" cap="flat">
+            <a:noFill/>
+            <a:prstDash val="solid"/>
+            <a:round/>
+          </a:ln>
+        </c:spPr>
+        <c:txPr>
+          <a:bodyPr/>
+          <a:lstStyle/>
+          <a:p>
+            <a:pPr>
+              <a:defRPr sz="1100" b="0" i="0" u="none" strike="noStrike">
+                <a:solidFill>
+                  <a:srgbClr val="1E2A3A"/>
+                </a:solidFill>
+                <a:latin typeface="+mn-lt"/>
+              </a:defRPr>
+            </a:pPr>
+            <a:endParaRPr lang="en-US"/>
+          </a:p>
+        </c:txPr>
+        <c:crossAx val="2094734552"/>
+        <c:crosses val="autoZero"/>
+        <c:auto val="1"/>
+        <c:lblAlgn val="ctr"/>
+        <c:noMultiLvlLbl val="1"/>
+      </c:catAx>
+      <c:valAx>
+        <c:axId val="2094734552"/>
+        <c:scaling>
+          <c:orientation val="minMax"/>
+        </c:scaling>
+        <c:delete val="1"/>
+        <c:axPos val="b"/>
+        <c:numFmt formatCode="General" sourceLinked="0"/>
+        <c:majorTickMark val="out"/>
+        <c:minorTickMark val="none"/>
+        <c:tickLblPos val="low"/>
+        <c:spPr>
+          <a:ln w="12700" cap="flat">
+            <a:solidFill>
+              <a:srgbClr val="888888"/>
+            </a:solidFill>
+            <a:prstDash val="solid"/>
+            <a:round/>
+          </a:ln>
+        </c:spPr>
+        <c:txPr>
+          <a:bodyPr/>
+          <a:lstStyle/>
+          <a:p>
+            <a:pPr>
+              <a:defRPr sz="1200" b="0" i="0" u="none" strike="noStrike">
+                <a:solidFill>
+                  <a:srgbClr val="000000"/>
+                </a:solidFill>
+                <a:latin typeface="Arial"/>
+              </a:defRPr>
+            </a:pPr>
+            <a:endParaRPr lang="en-US"/>
+          </a:p>
+        </c:txPr>
+        <c:crossAx val="2094734554"/>
+        <c:crosses val="autoZero"/>
+        <c:crossBetween val="between"/>
+      </c:valAx>
+      <c:spPr>
+        <a:noFill/>
+        <a:ln>
+          <a:noFill/>
+        </a:ln>
+        <a:effectLst/>
+      </c:spPr>
+    </c:plotArea>
+    <c:legend>
+      <c:legendPos val="t"/>
+      <c:overlay val="0"/>
+      <c:txPr>
+        <a:bodyPr/>
+        <a:lstStyle/>
+        <a:p>
+          <a:pPr>
+            <a:defRPr sz="1100">
+              <a:solidFill>
+                <a:srgbClr val="1E2A3A"/>
+              </a:solidFill>
+              <a:latin typeface="+mn-lt"/>
+              <a:cs typeface="+mn-lt"/>
+            </a:defRPr>
+          </a:pPr>
+          <a:endParaRPr lang="en-US"/>
+        </a:p>
+      </c:txPr>
+    </c:legend>
+    <c:plotVisOnly val="1"/>
+    <c:dispBlanksAs val="span"/>
+  </c:chart>
+  <c:spPr>
+    <a:noFill/>
+    <a:ln>
+      <a:noFill/>
+    </a:ln>
+    <a:effectLst/>
+  </c:spPr>
+  <c:externalData r:id="rId1">
+    <c:autoUpdate val="0"/>
+  </c:externalData>
+</c:chartSpace>
 </file>
 
 <file path=ppt/notesMasters/notesMaster1.xml><?xml version="1.0" encoding="utf-8"?>
@@ -522,7 +897,7 @@
           <a:p>
             <a:r>
               <a:rPr lang="en-US" dirty="0"/>
-              <a:t>Resumen de las iniciativas de riesgo por frente, distribuidas entre S1 y S2. Prioridad: requerimientos SSF con vencimientos el 16/10 (PLD/FT), 23/10 y 30/10 (Gobierno Corporativo) y 03/11 (Plan de Recuperación). Avance: Examen GIR 50%, Avalúos 60%.</a:t>
+              <a:t>Presentación del resumen ejecutivo de riesgos con corte al 10/10/2026.</a:t>
             </a:r>
             <a:endParaRPr lang="en-US" dirty="0"/>
           </a:p>
@@ -610,7 +985,7 @@
           <a:p>
             <a:r>
               <a:rPr lang="en-US" dirty="0"/>
-              <a:t>Línea de tiempo de los requerimientos SSF. El próximo vencimiento es el 16/10 (PLD/FT), en 6 días. Le siguen Gobierno Corporativo (23/10 y 30/10) y el envío del Plan de Recuperación (03/11).</a:t>
+              <a:t>Cifras clave: 4 requerimientos SSF activos, 18 iniciativas (11 en S1, 7 en S2). El próximo vencimiento es PLD/FT el 16/10. Avalúos al 60 % y Examen GIR al 50 %.</a:t>
             </a:r>
             <a:endParaRPr lang="en-US" dirty="0"/>
           </a:p>
@@ -634,6 +1009,270 @@
             <a:fld id="{F7021451-1387-4CA6-816F-3879F97B5CBC}" type="slidenum">
               <a:rPr lang="en-US"/>
               <a:t>2</a:t>
+            </a:fld>
+            <a:endParaRPr lang="en-US"/>
+          </a:p>
+        </p:txBody>
+      </p:sp>
+    </p:spTree>
+    <p:extLst>
+      <p:ext uri="{BB962C8B-B14F-4D97-AF65-F5344CB8AC3E}">
+        <p14:creationId xmlns:p14="http://schemas.microsoft.com/office/powerpoint/2010/main" val="1024086991"/>
+      </p:ext>
+    </p:extLst>
+  </p:cSld>
+  <p:clrMapOvr>
+    <a:masterClrMapping/>
+  </p:clrMapOvr>
+</p:notes>
+</file>
+
+<file path=ppt/notesSlides/notesSlide3.xml><?xml version="1.0" encoding="utf-8"?>
+<p:notes xmlns:a="http://schemas.openxmlformats.org/drawingml/2006/main" xmlns:r="http://schemas.openxmlformats.org/officeDocument/2006/relationships" xmlns:p="http://schemas.openxmlformats.org/presentationml/2006/main">
+  <p:cSld>
+    <p:spTree>
+      <p:nvGrpSpPr>
+        <p:cNvPr id="1" name=""/>
+        <p:cNvGrpSpPr/>
+        <p:nvPr/>
+      </p:nvGrpSpPr>
+      <p:grpSpPr>
+        <a:xfrm>
+          <a:off x="0" y="0"/>
+          <a:ext cx="0" cy="0"/>
+          <a:chOff x="0" y="0"/>
+          <a:chExt cx="0" cy="0"/>
+        </a:xfrm>
+      </p:grpSpPr>
+      <p:sp>
+        <p:nvSpPr>
+          <p:cNvPr id="2" name="Slide Image Placeholder 1"/>
+          <p:cNvSpPr>
+            <a:spLocks noGrp="1" noRot="1" noChangeAspect="1"/>
+          </p:cNvSpPr>
+          <p:nvPr>
+            <p:ph type="sldImg"/>
+          </p:nvPr>
+        </p:nvSpPr>
+        <p:spPr/>
+      </p:sp>
+      <p:sp>
+        <p:nvSpPr>
+          <p:cNvPr id="3" name="Notes Placeholder 2"/>
+          <p:cNvSpPr>
+            <a:spLocks noGrp="1"/>
+          </p:cNvSpPr>
+          <p:nvPr>
+            <p:ph type="body" idx="1"/>
+          </p:nvPr>
+        </p:nvSpPr>
+        <p:spPr/>
+        <p:txBody>
+          <a:bodyPr/>
+          <a:lstStyle/>
+          <a:p>
+            <a:r>
+              <a:rPr lang="en-US" dirty="0"/>
+              <a:t>Iniciativas por frente, distribuidas entre S1 y S2. Prioridad: requerimientos SSF con vencimientos el 16/10 (PLD/FT), 23/10 y 30/10 (Gobierno Corporativo) y 03/11 (Plan de Recuperación).</a:t>
+            </a:r>
+            <a:endParaRPr lang="en-US" dirty="0"/>
+          </a:p>
+        </p:txBody>
+      </p:sp>
+      <p:sp>
+        <p:nvSpPr>
+          <p:cNvPr id="4" name="Slide Number Placeholder 3"/>
+          <p:cNvSpPr>
+            <a:spLocks noGrp="1"/>
+          </p:cNvSpPr>
+          <p:nvPr>
+            <p:ph type="sldNum" sz="quarter" idx="10"/>
+          </p:nvPr>
+        </p:nvSpPr>
+        <p:spPr/>
+        <p:txBody>
+          <a:bodyPr/>
+          <a:lstStyle/>
+          <a:p>
+            <a:fld id="{F7021451-1387-4CA6-816F-3879F97B5CBC}" type="slidenum">
+              <a:rPr lang="en-US"/>
+              <a:t>3</a:t>
+            </a:fld>
+            <a:endParaRPr lang="en-US"/>
+          </a:p>
+        </p:txBody>
+      </p:sp>
+    </p:spTree>
+    <p:extLst>
+      <p:ext uri="{BB962C8B-B14F-4D97-AF65-F5344CB8AC3E}">
+        <p14:creationId xmlns:p14="http://schemas.microsoft.com/office/powerpoint/2010/main" val="1024086991"/>
+      </p:ext>
+    </p:extLst>
+  </p:cSld>
+  <p:clrMapOvr>
+    <a:masterClrMapping/>
+  </p:clrMapOvr>
+</p:notes>
+</file>
+
+<file path=ppt/notesSlides/notesSlide4.xml><?xml version="1.0" encoding="utf-8"?>
+<p:notes xmlns:a="http://schemas.openxmlformats.org/drawingml/2006/main" xmlns:r="http://schemas.openxmlformats.org/officeDocument/2006/relationships" xmlns:p="http://schemas.openxmlformats.org/presentationml/2006/main">
+  <p:cSld>
+    <p:spTree>
+      <p:nvGrpSpPr>
+        <p:cNvPr id="1" name=""/>
+        <p:cNvGrpSpPr/>
+        <p:nvPr/>
+      </p:nvGrpSpPr>
+      <p:grpSpPr>
+        <a:xfrm>
+          <a:off x="0" y="0"/>
+          <a:ext cx="0" cy="0"/>
+          <a:chOff x="0" y="0"/>
+          <a:chExt cx="0" cy="0"/>
+        </a:xfrm>
+      </p:grpSpPr>
+      <p:sp>
+        <p:nvSpPr>
+          <p:cNvPr id="2" name="Slide Image Placeholder 1"/>
+          <p:cNvSpPr>
+            <a:spLocks noGrp="1" noRot="1" noChangeAspect="1"/>
+          </p:cNvSpPr>
+          <p:nvPr>
+            <p:ph type="sldImg"/>
+          </p:nvPr>
+        </p:nvSpPr>
+        <p:spPr/>
+      </p:sp>
+      <p:sp>
+        <p:nvSpPr>
+          <p:cNvPr id="3" name="Notes Placeholder 2"/>
+          <p:cNvSpPr>
+            <a:spLocks noGrp="1"/>
+          </p:cNvSpPr>
+          <p:nvPr>
+            <p:ph type="body" idx="1"/>
+          </p:nvPr>
+        </p:nvSpPr>
+        <p:spPr/>
+        <p:txBody>
+          <a:bodyPr/>
+          <a:lstStyle/>
+          <a:p>
+            <a:r>
+              <a:rPr lang="en-US" dirty="0"/>
+              <a:t>Línea de tiempo de los requerimientos SSF. El próximo vencimiento es el 16/10 (PLD/FT), en 6 días.</a:t>
+            </a:r>
+            <a:endParaRPr lang="en-US" dirty="0"/>
+          </a:p>
+        </p:txBody>
+      </p:sp>
+      <p:sp>
+        <p:nvSpPr>
+          <p:cNvPr id="4" name="Slide Number Placeholder 3"/>
+          <p:cNvSpPr>
+            <a:spLocks noGrp="1"/>
+          </p:cNvSpPr>
+          <p:nvPr>
+            <p:ph type="sldNum" sz="quarter" idx="10"/>
+          </p:nvPr>
+        </p:nvSpPr>
+        <p:spPr/>
+        <p:txBody>
+          <a:bodyPr/>
+          <a:lstStyle/>
+          <a:p>
+            <a:fld id="{F7021451-1387-4CA6-816F-3879F97B5CBC}" type="slidenum">
+              <a:rPr lang="en-US"/>
+              <a:t>4</a:t>
+            </a:fld>
+            <a:endParaRPr lang="en-US"/>
+          </a:p>
+        </p:txBody>
+      </p:sp>
+    </p:spTree>
+    <p:extLst>
+      <p:ext uri="{BB962C8B-B14F-4D97-AF65-F5344CB8AC3E}">
+        <p14:creationId xmlns:p14="http://schemas.microsoft.com/office/powerpoint/2010/main" val="1024086991"/>
+      </p:ext>
+    </p:extLst>
+  </p:cSld>
+  <p:clrMapOvr>
+    <a:masterClrMapping/>
+  </p:clrMapOvr>
+</p:notes>
+</file>
+
+<file path=ppt/notesSlides/notesSlide5.xml><?xml version="1.0" encoding="utf-8"?>
+<p:notes xmlns:a="http://schemas.openxmlformats.org/drawingml/2006/main" xmlns:r="http://schemas.openxmlformats.org/officeDocument/2006/relationships" xmlns:p="http://schemas.openxmlformats.org/presentationml/2006/main">
+  <p:cSld>
+    <p:spTree>
+      <p:nvGrpSpPr>
+        <p:cNvPr id="1" name=""/>
+        <p:cNvGrpSpPr/>
+        <p:nvPr/>
+      </p:nvGrpSpPr>
+      <p:grpSpPr>
+        <a:xfrm>
+          <a:off x="0" y="0"/>
+          <a:ext cx="0" cy="0"/>
+          <a:chOff x="0" y="0"/>
+          <a:chExt cx="0" cy="0"/>
+        </a:xfrm>
+      </p:grpSpPr>
+      <p:sp>
+        <p:nvSpPr>
+          <p:cNvPr id="2" name="Slide Image Placeholder 1"/>
+          <p:cNvSpPr>
+            <a:spLocks noGrp="1" noRot="1" noChangeAspect="1"/>
+          </p:cNvSpPr>
+          <p:nvPr>
+            <p:ph type="sldImg"/>
+          </p:nvPr>
+        </p:nvSpPr>
+        <p:spPr/>
+      </p:sp>
+      <p:sp>
+        <p:nvSpPr>
+          <p:cNvPr id="3" name="Notes Placeholder 2"/>
+          <p:cNvSpPr>
+            <a:spLocks noGrp="1"/>
+          </p:cNvSpPr>
+          <p:nvPr>
+            <p:ph type="body" idx="1"/>
+          </p:nvPr>
+        </p:nvSpPr>
+        <p:spPr/>
+        <p:txBody>
+          <a:bodyPr/>
+          <a:lstStyle/>
+          <a:p>
+            <a:r>
+              <a:rPr lang="en-US" dirty="0"/>
+              <a:t>Cierre: cuatro compromisos SSF con fecha y dos frentes internos en ejecución (Avalúos 60 %, Examen GIR 50 %).</a:t>
+            </a:r>
+            <a:endParaRPr lang="en-US" dirty="0"/>
+          </a:p>
+        </p:txBody>
+      </p:sp>
+      <p:sp>
+        <p:nvSpPr>
+          <p:cNvPr id="4" name="Slide Number Placeholder 3"/>
+          <p:cNvSpPr>
+            <a:spLocks noGrp="1"/>
+          </p:cNvSpPr>
+          <p:nvPr>
+            <p:ph type="sldNum" sz="quarter" idx="10"/>
+          </p:nvPr>
+        </p:nvSpPr>
+        <p:spPr/>
+        <p:txBody>
+          <a:bodyPr/>
+          <a:lstStyle/>
+          <a:p>
+            <a:fld id="{F7021451-1387-4CA6-816F-3879F97B5CBC}" type="slidenum">
+              <a:rPr lang="en-US"/>
+              <a:t>5</a:t>
             </a:fld>
             <a:endParaRPr lang="en-US"/>
           </a:p>
@@ -684,6 +1323,116 @@
 
 <file path=ppt/slideLayouts/slideLayout2.xml><?xml version="1.0" encoding="utf-8"?>
 <p:sldLayout xmlns:a="http://schemas.openxmlformats.org/drawingml/2006/main" xmlns:r="http://schemas.openxmlformats.org/officeDocument/2006/relationships" xmlns:p="http://schemas.openxmlformats.org/presentationml/2006/main" preserve="1">
+  <p:cSld name="PORTADA">
+    <p:bg>
+      <p:bgPr>
+        <a:solidFill>
+          <a:schemeClr val="tx2"/>
+        </a:solidFill>
+      </p:bgPr>
+    </p:bg>
+    <p:spTree>
+      <p:nvGrpSpPr>
+        <p:cNvPr id="1" name=""/>
+        <p:cNvGrpSpPr/>
+        <p:nvPr/>
+      </p:nvGrpSpPr>
+      <p:grpSpPr>
+        <a:xfrm>
+          <a:off x="0" y="0"/>
+          <a:ext cx="0" cy="0"/>
+          <a:chOff x="0" y="0"/>
+          <a:chExt cx="0" cy="0"/>
+        </a:xfrm>
+      </p:grpSpPr>
+      <p:sp>
+        <p:nvSpPr>
+          <p:cNvPr id="2" name="Text 0"/>
+          <p:cNvSpPr/>
+          <p:nvPr>
+            <p:ph idx="100" type="title" hasCustomPrompt="1"/>
+          </p:nvPr>
+        </p:nvSpPr>
+        <p:spPr>
+          <a:xfrm>
+            <a:off x="640080" y="2148840"/>
+            <a:ext cx="6949440" cy="1554480"/>
+          </a:xfrm>
+          <a:prstGeom prst="rect">
+            <a:avLst/>
+          </a:prstGeom>
+          <a:noFill/>
+          <a:ln/>
+        </p:spPr>
+        <p:txBody>
+          <a:bodyPr wrap="square" rtlCol="0"/>
+          <a:lstStyle>
+            <a:lvl1pPr algn="l" indent="0" marL="0">
+              <a:buNone/>
+              <a:defRPr lang="en-US" sz="4800" b="1" dirty="0">
+                <a:solidFill>
+                  <a:schemeClr val="bg1"/>
+                </a:solidFill>
+              </a:defRPr>
+            </a:lvl1pPr>
+          </a:lstStyle>
+          <a:p>
+            <a:pPr algn="l" indent="0" marL="0">
+              <a:buNone/>
+            </a:pPr>
+            <a:endParaRPr lang="en-US" sz="4800" dirty="0"/>
+          </a:p>
+        </p:txBody>
+      </p:sp>
+      <p:sp>
+        <p:nvSpPr>
+          <p:cNvPr id="3" name="Text 0"/>
+          <p:cNvSpPr/>
+          <p:nvPr>
+            <p:ph idx="101" type="body" hasCustomPrompt="1"/>
+          </p:nvPr>
+        </p:nvSpPr>
+        <p:spPr>
+          <a:xfrm>
+            <a:off x="640080" y="3840480"/>
+            <a:ext cx="6949440" cy="457200"/>
+          </a:xfrm>
+          <a:prstGeom prst="rect">
+            <a:avLst/>
+          </a:prstGeom>
+          <a:noFill/>
+          <a:ln/>
+        </p:spPr>
+        <p:txBody>
+          <a:bodyPr wrap="square" rtlCol="0"/>
+          <a:lstStyle>
+            <a:lvl1pPr algn="l" indent="0" marL="0">
+              <a:buNone/>
+              <a:defRPr lang="en-US" sz="2000" dirty="0">
+                <a:solidFill>
+                  <a:schemeClr val="accent5"/>
+                </a:solidFill>
+              </a:defRPr>
+            </a:lvl1pPr>
+          </a:lstStyle>
+          <a:p>
+            <a:pPr algn="l" indent="0" marL="0">
+              <a:buNone/>
+            </a:pPr>
+            <a:endParaRPr lang="en-US" sz="2000" dirty="0"/>
+          </a:p>
+        </p:txBody>
+      </p:sp>
+    </p:spTree>
+  </p:cSld>
+  <p:clrMapOvr>
+    <a:masterClrMapping/>
+  </p:clrMapOvr>
+</p:sldLayout>
+</file>
+
+<file path=ppt/slideLayouts/slideLayout3.xml><?xml version="1.0" encoding="utf-8"?>
+<p:sldLayout xmlns:a="http://schemas.openxmlformats.org/drawingml/2006/main" xmlns:r="http://schemas.openxmlformats.org/officeDocument/2006/relationships" xmlns:p="http://schemas.openxmlformats.org/presentationml/2006/main" preserve="1">
   <p:cSld name="CONTENIDO">
     <p:bg>
       <p:bgPr>
@@ -767,7 +1516,7 @@
         <p:txBody>
           <a:bodyPr wrap="square" rtlCol="0"/>
           <a:lstStyle>
-            <a:lvl1pPr indent="0" marL="0">
+            <a:lvl1pPr algn="l" indent="0" marL="0">
               <a:buNone/>
               <a:defRPr lang="en-US" sz="1300" dirty="0">
                 <a:solidFill>
@@ -777,7 +1526,117 @@
             </a:lvl1pPr>
           </a:lstStyle>
           <a:p>
-            <a:pPr indent="0" marL="0">
+            <a:pPr algn="l" indent="0" marL="0">
+              <a:buNone/>
+            </a:pPr>
+            <a:endParaRPr lang="en-US" sz="1300" dirty="0"/>
+          </a:p>
+        </p:txBody>
+      </p:sp>
+    </p:spTree>
+  </p:cSld>
+  <p:clrMapOvr>
+    <a:masterClrMapping/>
+  </p:clrMapOvr>
+</p:sldLayout>
+</file>
+
+<file path=ppt/slideLayouts/slideLayout4.xml><?xml version="1.0" encoding="utf-8"?>
+<p:sldLayout xmlns:a="http://schemas.openxmlformats.org/drawingml/2006/main" xmlns:r="http://schemas.openxmlformats.org/officeDocument/2006/relationships" xmlns:p="http://schemas.openxmlformats.org/presentationml/2006/main" preserve="1">
+  <p:cSld name="CIERRE">
+    <p:bg>
+      <p:bgPr>
+        <a:solidFill>
+          <a:schemeClr val="tx2"/>
+        </a:solidFill>
+      </p:bgPr>
+    </p:bg>
+    <p:spTree>
+      <p:nvGrpSpPr>
+        <p:cNvPr id="1" name=""/>
+        <p:cNvGrpSpPr/>
+        <p:nvPr/>
+      </p:nvGrpSpPr>
+      <p:grpSpPr>
+        <a:xfrm>
+          <a:off x="0" y="0"/>
+          <a:ext cx="0" cy="0"/>
+          <a:chOff x="0" y="0"/>
+          <a:chExt cx="0" cy="0"/>
+        </a:xfrm>
+      </p:grpSpPr>
+      <p:sp>
+        <p:nvSpPr>
+          <p:cNvPr id="2" name="Text 0"/>
+          <p:cNvSpPr/>
+          <p:nvPr>
+            <p:ph idx="100" type="title" hasCustomPrompt="1"/>
+          </p:nvPr>
+        </p:nvSpPr>
+        <p:spPr>
+          <a:xfrm>
+            <a:off x="457200" y="274320"/>
+            <a:ext cx="8686800" cy="548640"/>
+          </a:xfrm>
+          <a:prstGeom prst="rect">
+            <a:avLst/>
+          </a:prstGeom>
+          <a:noFill/>
+          <a:ln/>
+        </p:spPr>
+        <p:txBody>
+          <a:bodyPr wrap="square" rtlCol="0"/>
+          <a:lstStyle>
+            <a:lvl1pPr algn="l" indent="0" marL="0">
+              <a:buNone/>
+              <a:defRPr lang="en-US" sz="3000" b="1" dirty="0">
+                <a:solidFill>
+                  <a:schemeClr val="bg1"/>
+                </a:solidFill>
+              </a:defRPr>
+            </a:lvl1pPr>
+          </a:lstStyle>
+          <a:p>
+            <a:pPr algn="l" indent="0" marL="0">
+              <a:buNone/>
+            </a:pPr>
+            <a:endParaRPr lang="en-US" sz="3000" dirty="0"/>
+          </a:p>
+        </p:txBody>
+      </p:sp>
+      <p:sp>
+        <p:nvSpPr>
+          <p:cNvPr id="3" name="Text 0"/>
+          <p:cNvSpPr/>
+          <p:nvPr>
+            <p:ph idx="101" type="body" hasCustomPrompt="1"/>
+          </p:nvPr>
+        </p:nvSpPr>
+        <p:spPr>
+          <a:xfrm>
+            <a:off x="457200" y="804672"/>
+            <a:ext cx="8686800" cy="292608"/>
+          </a:xfrm>
+          <a:prstGeom prst="rect">
+            <a:avLst/>
+          </a:prstGeom>
+          <a:noFill/>
+          <a:ln/>
+        </p:spPr>
+        <p:txBody>
+          <a:bodyPr wrap="square" rtlCol="0"/>
+          <a:lstStyle>
+            <a:lvl1pPr algn="l" indent="0" marL="0">
+              <a:buNone/>
+              <a:defRPr lang="en-US" sz="1300" dirty="0">
+                <a:solidFill>
+                  <a:schemeClr val="accent5"/>
+                </a:solidFill>
+              </a:defRPr>
+            </a:lvl1pPr>
+          </a:lstStyle>
+          <a:p>
+            <a:pPr algn="l" indent="0" marL="0">
               <a:buNone/>
             </a:pPr>
             <a:endParaRPr lang="en-US" sz="1300" dirty="0"/>
@@ -815,6 +1674,8 @@
   <p:sldLayoutIdLst>
     <p:sldLayoutId id="2147483649" r:id="rId1"/>
     <p:sldLayoutId id="2147483650" r:id="rId2"/>
+    <p:sldLayoutId id="2147483651" r:id="rId3"/>
+    <p:sldLayoutId id="2147483652" r:id="rId4"/>
   </p:sldLayoutIdLst>
   <p:hf sldNum="0" hdr="0" ftr="0" dt="0"/>
   <p:txStyles>
@@ -1089,352 +1950,74 @@
       </p:grpSpPr>
       <p:sp>
         <p:nvSpPr>
-          <p:cNvPr id="2" name="Text 0"/>
-          <p:cNvSpPr/>
-          <p:nvPr>
-            <p:ph idx="100" type="title" hasCustomPrompt="1"/>
-          </p:nvPr>
-        </p:nvSpPr>
-        <p:spPr>
-          <a:xfrm>
-            <a:off x="457200" y="274320"/>
-            <a:ext cx="8686800" cy="548640"/>
-          </a:xfrm>
-          <a:prstGeom prst="rect">
-            <a:avLst/>
-          </a:prstGeom>
-          <a:noFill/>
-          <a:ln/>
-        </p:spPr>
-        <p:txBody>
-          <a:bodyPr wrap="square" lIns="0" tIns="0" rIns="0" bIns="0" rtlCol="0" anchor="ctr"/>
-          <a:lstStyle/>
-          <a:p>
-            <a:pPr algn="l" indent="0" marL="0">
-              <a:buNone/>
-            </a:pPr>
-            <a:r>
-              <a:rPr lang="en-US" sz="3000" b="1" dirty="0">
-                <a:solidFill>
-                  <a:schemeClr val="tx2"/>
-                </a:solidFill>
-              </a:rPr>
-              <a:t>Resumen Ejecutivo de Riesgos</a:t>
-            </a:r>
-            <a:endParaRPr lang="en-US" sz="3000" dirty="0"/>
-          </a:p>
-        </p:txBody>
-      </p:sp>
-      <p:sp>
-        <p:nvSpPr>
-          <p:cNvPr id="3" name="Text 0"/>
-          <p:cNvSpPr/>
-          <p:nvPr>
-            <p:ph idx="101" type="body" hasCustomPrompt="1"/>
-          </p:nvPr>
-        </p:nvSpPr>
-        <p:spPr>
-          <a:xfrm>
-            <a:off x="457200" y="804672"/>
-            <a:ext cx="8686800" cy="292608"/>
-          </a:xfrm>
-          <a:prstGeom prst="rect">
-            <a:avLst/>
-          </a:prstGeom>
-          <a:noFill/>
-          <a:ln/>
-        </p:spPr>
-        <p:txBody>
-          <a:bodyPr wrap="square" lIns="0" tIns="0" rIns="0" bIns="0" rtlCol="0" anchor="ctr"/>
-          <a:lstStyle/>
-          <a:p>
-            <a:pPr indent="0" marL="0">
-              <a:buNone/>
-            </a:pPr>
-            <a:r>
-              <a:rPr lang="en-US" sz="1300" dirty="0">
-                <a:solidFill>
-                  <a:schemeClr val="accent4"/>
-                </a:solidFill>
-              </a:rPr>
-              <a:t>Avance de iniciativas por frente de riesgo · corte al 10/10/2026</a:t>
-            </a:r>
-            <a:endParaRPr lang="en-US" sz="1300" dirty="0"/>
-          </a:p>
-        </p:txBody>
-      </p:sp>
-      <p:sp>
-        <p:nvSpPr>
-          <p:cNvPr id="4" name="Etiqueta"/>
-          <p:cNvSpPr/>
-          <p:nvPr/>
-        </p:nvSpPr>
-        <p:spPr>
-          <a:xfrm>
-            <a:off x="9646920" y="384048"/>
-            <a:ext cx="2084832" cy="384048"/>
-          </a:xfrm>
-          <a:prstGeom prst="roundRect">
-            <a:avLst>
-              <a:gd name="adj" fmla="val 50000"/>
-            </a:avLst>
-          </a:prstGeom>
-          <a:solidFill>
-            <a:schemeClr val="bg2"/>
+          <p:cNvPr id="2" name="Anillo 1"/>
+          <p:cNvSpPr/>
+          <p:nvPr/>
+        </p:nvSpPr>
+        <p:spPr>
+          <a:xfrm>
+            <a:off x="7040880" y="1325880"/>
+            <a:ext cx="4206240" cy="4206240"/>
+          </a:xfrm>
+          <a:prstGeom prst="ellipse">
+            <a:avLst/>
+          </a:prstGeom>
+          <a:solidFill>
+            <a:srgbClr val="15396B"/>
           </a:solidFill>
           <a:ln w="12700">
             <a:solidFill>
-              <a:schemeClr val="bg2"/>
-            </a:solidFill>
-            <a:prstDash val="solid"/>
-          </a:ln>
-        </p:spPr>
-      </p:sp>
-      <p:sp>
-        <p:nvSpPr>
-          <p:cNvPr id="5" name="Text 3"/>
-          <p:cNvSpPr txBox="1"/>
-          <p:nvPr/>
-        </p:nvSpPr>
-        <p:spPr>
-          <a:xfrm>
-            <a:off x="9646920" y="384048"/>
-            <a:ext cx="2084832" cy="384048"/>
-          </a:xfrm>
-          <a:prstGeom prst="rect">
-            <a:avLst/>
-          </a:prstGeom>
-          <a:noFill/>
-          <a:ln/>
-        </p:spPr>
-        <p:txBody>
-          <a:bodyPr wrap="square" lIns="0" tIns="0" rIns="0" bIns="0" rtlCol="0" anchor="ctr"/>
-          <a:lstStyle/>
-          <a:p>
-            <a:pPr algn="ctr" indent="0" marL="0">
-              <a:buNone/>
-            </a:pPr>
-            <a:r>
-              <a:rPr lang="en-US" sz="1200" b="1" dirty="0">
-                <a:solidFill>
-                  <a:schemeClr val="tx2"/>
-                </a:solidFill>
-              </a:rPr>
-              <a:t>Comité de Riesgos</a:t>
-            </a:r>
-            <a:endParaRPr lang="en-US" sz="1200" dirty="0"/>
-          </a:p>
-        </p:txBody>
-      </p:sp>
-      <p:sp>
-        <p:nvSpPr>
-          <p:cNvPr id="6" name="Encabezado S1"/>
-          <p:cNvSpPr/>
-          <p:nvPr/>
-        </p:nvSpPr>
-        <p:spPr>
-          <a:xfrm>
-            <a:off x="3291840" y="1207008"/>
-            <a:ext cx="4160520" cy="292608"/>
-          </a:xfrm>
-          <a:prstGeom prst="roundRect">
-            <a:avLst>
-              <a:gd name="adj" fmla="val 50000"/>
-            </a:avLst>
-          </a:prstGeom>
-          <a:solidFill>
-            <a:schemeClr val="tx2"/>
+              <a:srgbClr val="15396B"/>
+            </a:solidFill>
+            <a:prstDash val="solid"/>
+          </a:ln>
+        </p:spPr>
+      </p:sp>
+      <p:sp>
+        <p:nvSpPr>
+          <p:cNvPr id="3" name="Anillo 2"/>
+          <p:cNvSpPr/>
+          <p:nvPr/>
+        </p:nvSpPr>
+        <p:spPr>
+          <a:xfrm>
+            <a:off x="7543800" y="1828800"/>
+            <a:ext cx="3200400" cy="3200400"/>
+          </a:xfrm>
+          <a:prstGeom prst="ellipse">
+            <a:avLst/>
+          </a:prstGeom>
+          <a:solidFill>
+            <a:srgbClr val="1A4378"/>
           </a:solidFill>
           <a:ln w="12700">
             <a:solidFill>
-              <a:schemeClr val="tx2"/>
-            </a:solidFill>
-            <a:prstDash val="solid"/>
-          </a:ln>
-        </p:spPr>
-      </p:sp>
-      <p:sp>
-        <p:nvSpPr>
-          <p:cNvPr id="7" name="Text 5"/>
-          <p:cNvSpPr txBox="1"/>
-          <p:nvPr/>
-        </p:nvSpPr>
-        <p:spPr>
-          <a:xfrm>
-            <a:off x="3291840" y="1207008"/>
-            <a:ext cx="4160520" cy="292608"/>
-          </a:xfrm>
-          <a:prstGeom prst="rect">
-            <a:avLst/>
-          </a:prstGeom>
-          <a:noFill/>
-          <a:ln/>
-        </p:spPr>
-        <p:txBody>
-          <a:bodyPr wrap="square" lIns="0" tIns="0" rIns="0" bIns="0" rtlCol="0" anchor="ctr"/>
-          <a:lstStyle/>
-          <a:p>
-            <a:pPr algn="ctr" indent="0" marL="0">
-              <a:buNone/>
-            </a:pPr>
-            <a:r>
-              <a:rPr lang="en-US" sz="1300" b="1" dirty="0">
-                <a:solidFill>
-                  <a:schemeClr val="bg1"/>
-                </a:solidFill>
-              </a:rPr>
-              <a:t>S1</a:t>
-            </a:r>
-            <a:endParaRPr lang="en-US" sz="1300" dirty="0"/>
-          </a:p>
-        </p:txBody>
-      </p:sp>
-      <p:sp>
-        <p:nvSpPr>
-          <p:cNvPr id="8" name="Encabezado S2"/>
-          <p:cNvSpPr/>
-          <p:nvPr/>
-        </p:nvSpPr>
-        <p:spPr>
-          <a:xfrm>
-            <a:off x="7589520" y="1207008"/>
-            <a:ext cx="4142232" cy="292608"/>
-          </a:xfrm>
-          <a:prstGeom prst="roundRect">
-            <a:avLst>
-              <a:gd name="adj" fmla="val 50000"/>
-            </a:avLst>
-          </a:prstGeom>
-          <a:solidFill>
-            <a:schemeClr val="tx2"/>
+              <a:srgbClr val="1A4378"/>
+            </a:solidFill>
+            <a:prstDash val="solid"/>
+          </a:ln>
+        </p:spPr>
+      </p:sp>
+      <p:sp>
+        <p:nvSpPr>
+          <p:cNvPr id="4" name="Anillo 3"/>
+          <p:cNvSpPr/>
+          <p:nvPr/>
+        </p:nvSpPr>
+        <p:spPr>
+          <a:xfrm>
+            <a:off x="8046720" y="2331720"/>
+            <a:ext cx="2194560" cy="2194560"/>
+          </a:xfrm>
+          <a:prstGeom prst="ellipse">
+            <a:avLst/>
+          </a:prstGeom>
+          <a:solidFill>
+            <a:srgbClr val="1F5FA8"/>
           </a:solidFill>
           <a:ln w="12700">
             <a:solidFill>
-              <a:schemeClr val="tx2"/>
-            </a:solidFill>
-            <a:prstDash val="solid"/>
-          </a:ln>
-        </p:spPr>
-      </p:sp>
-      <p:sp>
-        <p:nvSpPr>
-          <p:cNvPr id="9" name="Text 7"/>
-          <p:cNvSpPr txBox="1"/>
-          <p:nvPr/>
-        </p:nvSpPr>
-        <p:spPr>
-          <a:xfrm>
-            <a:off x="7589520" y="1207008"/>
-            <a:ext cx="4142232" cy="292608"/>
-          </a:xfrm>
-          <a:prstGeom prst="rect">
-            <a:avLst/>
-          </a:prstGeom>
-          <a:noFill/>
-          <a:ln/>
-        </p:spPr>
-        <p:txBody>
-          <a:bodyPr wrap="square" lIns="0" tIns="0" rIns="0" bIns="0" rtlCol="0" anchor="ctr"/>
-          <a:lstStyle/>
-          <a:p>
-            <a:pPr algn="ctr" indent="0" marL="0">
-              <a:buNone/>
-            </a:pPr>
-            <a:r>
-              <a:rPr lang="en-US" sz="1300" b="1" dirty="0">
-                <a:solidFill>
-                  <a:schemeClr val="bg1"/>
-                </a:solidFill>
-              </a:rPr>
-              <a:t>S2</a:t>
-            </a:r>
-            <a:endParaRPr lang="en-US" sz="1300" dirty="0"/>
-          </a:p>
-        </p:txBody>
-      </p:sp>
-      <p:sp>
-        <p:nvSpPr>
-          <p:cNvPr id="10" name="Text 8"/>
-          <p:cNvSpPr txBox="1"/>
-          <p:nvPr/>
-        </p:nvSpPr>
-        <p:spPr>
-          <a:xfrm>
-            <a:off x="457200" y="1207008"/>
-            <a:ext cx="2697480" cy="292608"/>
-          </a:xfrm>
-          <a:prstGeom prst="rect">
-            <a:avLst/>
-          </a:prstGeom>
-          <a:noFill/>
-          <a:ln/>
-        </p:spPr>
-        <p:txBody>
-          <a:bodyPr wrap="square" lIns="0" tIns="0" rIns="0" bIns="0" rtlCol="0" anchor="ctr"/>
-          <a:lstStyle/>
-          <a:p>
-            <a:pPr indent="0" marL="0">
-              <a:buNone/>
-            </a:pPr>
-            <a:r>
-              <a:rPr lang="en-US" sz="1100" b="1" spc="150" kern="0" dirty="0">
-                <a:solidFill>
-                  <a:schemeClr val="accent4"/>
-                </a:solidFill>
-              </a:rPr>
-              <a:t>FRENTE DE RIESGO</a:t>
-            </a:r>
-            <a:endParaRPr lang="en-US" sz="1100" dirty="0"/>
-          </a:p>
-        </p:txBody>
-      </p:sp>
-      <p:sp>
-        <p:nvSpPr>
-          <p:cNvPr id="11" name="Frente Cumplimiento Regulatorio"/>
-          <p:cNvSpPr/>
-          <p:nvPr/>
-        </p:nvSpPr>
-        <p:spPr>
-          <a:xfrm>
-            <a:off x="457200" y="1609344"/>
-            <a:ext cx="2697480" cy="1481328"/>
-          </a:xfrm>
-          <a:prstGeom prst="roundRect">
-            <a:avLst>
-              <a:gd name="adj" fmla="val 6173"/>
-            </a:avLst>
-          </a:prstGeom>
-          <a:solidFill>
-            <a:schemeClr val="tx2"/>
-          </a:solidFill>
-          <a:ln w="12700">
-            <a:solidFill>
-              <a:schemeClr val="tx2"/>
-            </a:solidFill>
-            <a:prstDash val="solid"/>
-          </a:ln>
-        </p:spPr>
-      </p:sp>
-      <p:sp>
-        <p:nvSpPr>
-          <p:cNvPr id="12" name="Icono fondo Cumplimiento Regulatorio"/>
-          <p:cNvSpPr/>
-          <p:nvPr/>
-        </p:nvSpPr>
-        <p:spPr>
-          <a:xfrm>
-            <a:off x="603504" y="2139696"/>
-            <a:ext cx="420624" cy="420624"/>
-          </a:xfrm>
-          <a:prstGeom prst="ellipse">
-            <a:avLst/>
-          </a:prstGeom>
-          <a:solidFill>
-            <a:schemeClr val="accent3"/>
-          </a:solidFill>
-          <a:ln w="12700">
-            <a:solidFill>
-              <a:schemeClr val="accent3"/>
+              <a:srgbClr val="1F5FA8"/>
             </a:solidFill>
             <a:prstDash val="solid"/>
           </a:ln>
@@ -1442,7 +2025,7 @@
       </p:sp>
       <p:pic>
         <p:nvPicPr>
-          <p:cNvPr id="13" name="Icono Cumplimiento Regulatorio" descr="preencoded.png">    </p:cNvPr>
+          <p:cNvPr id="5" name="Escudo" descr="preencoded.png">    </p:cNvPr>
           <p:cNvPicPr>
             <a:picLocks noChangeAspect="1"/>
           </p:cNvPicPr>
@@ -1456,8 +2039,8 @@
         </p:blipFill>
         <p:spPr>
           <a:xfrm>
-            <a:off x="713232" y="2249424"/>
-            <a:ext cx="201168" cy="201168"/>
+            <a:off x="8595360" y="2880360"/>
+            <a:ext cx="1097280" cy="1097280"/>
           </a:xfrm>
           <a:prstGeom prst="rect">
             <a:avLst/>
@@ -1466,555 +2049,24 @@
       </p:pic>
       <p:sp>
         <p:nvSpPr>
-          <p:cNvPr id="14" name="Text 11"/>
-          <p:cNvSpPr txBox="1"/>
-          <p:nvPr/>
-        </p:nvSpPr>
-        <p:spPr>
-          <a:xfrm>
-            <a:off x="1143000" y="1609344"/>
-            <a:ext cx="1920240" cy="1481328"/>
-          </a:xfrm>
-          <a:prstGeom prst="rect">
-            <a:avLst/>
-          </a:prstGeom>
-          <a:noFill/>
-          <a:ln/>
-        </p:spPr>
-        <p:txBody>
-          <a:bodyPr wrap="square" lIns="0" tIns="0" rIns="0" bIns="0" rtlCol="0" anchor="ctr"/>
-          <a:lstStyle/>
-          <a:p>
-            <a:pPr indent="0" marL="0">
-              <a:buNone/>
-            </a:pPr>
-            <a:r>
-              <a:rPr lang="en-US" sz="1400" b="1" dirty="0">
-                <a:solidFill>
-                  <a:schemeClr val="bg1"/>
-                </a:solidFill>
-              </a:rPr>
-              <a:t>Cumplimiento Regulatorio</a:t>
-            </a:r>
-            <a:endParaRPr lang="en-US" sz="1400" dirty="0"/>
-          </a:p>
-          <a:p>
-            <a:pPr indent="0" marL="0">
-              <a:buNone/>
-            </a:pPr>
-            <a:r>
-              <a:rPr lang="en-US" sz="1100" dirty="0">
-                <a:solidFill>
-                  <a:schemeClr val="accent5"/>
-                </a:solidFill>
-              </a:rPr>
-              <a:t>Requerimientos SSF</a:t>
-            </a:r>
-            <a:endParaRPr lang="en-US" sz="1400" dirty="0"/>
-          </a:p>
-        </p:txBody>
-      </p:sp>
-      <p:sp>
-        <p:nvSpPr>
-          <p:cNvPr id="15" name="S1 Cumplimiento Regulatorio"/>
-          <p:cNvSpPr/>
-          <p:nvPr/>
-        </p:nvSpPr>
-        <p:spPr>
-          <a:xfrm>
-            <a:off x="3291840" y="1609344"/>
-            <a:ext cx="4160520" cy="1481328"/>
-          </a:xfrm>
-          <a:prstGeom prst="roundRect">
-            <a:avLst>
-              <a:gd name="adj" fmla="val 6173"/>
-            </a:avLst>
-          </a:prstGeom>
-          <a:solidFill>
-            <a:schemeClr val="bg2"/>
+          <p:cNvPr id="6" name="Círculo satélite"/>
+          <p:cNvSpPr/>
+          <p:nvPr/>
+        </p:nvSpPr>
+        <p:spPr>
+          <a:xfrm>
+            <a:off x="7086600" y="1600200"/>
+            <a:ext cx="566928" cy="566928"/>
+          </a:xfrm>
+          <a:prstGeom prst="ellipse">
+            <a:avLst/>
+          </a:prstGeom>
+          <a:solidFill>
+            <a:schemeClr val="accent6"/>
           </a:solidFill>
           <a:ln w="12700">
             <a:solidFill>
-              <a:schemeClr val="bg2"/>
-            </a:solidFill>
-            <a:prstDash val="solid"/>
-          </a:ln>
-        </p:spPr>
-      </p:sp>
-      <p:sp>
-        <p:nvSpPr>
-          <p:cNvPr id="16" name="Text 13"/>
-          <p:cNvSpPr txBox="1"/>
-          <p:nvPr/>
-        </p:nvSpPr>
-        <p:spPr>
-          <a:xfrm>
-            <a:off x="3429000" y="1655064"/>
-            <a:ext cx="3886200" cy="1389888"/>
-          </a:xfrm>
-          <a:prstGeom prst="rect">
-            <a:avLst/>
-          </a:prstGeom>
-          <a:noFill/>
-          <a:ln/>
-        </p:spPr>
-        <p:txBody>
-          <a:bodyPr wrap="square" lIns="0" tIns="0" rIns="0" bIns="0" rtlCol="0" anchor="ctr"/>
-          <a:lstStyle/>
-          <a:p>
-            <a:pPr indent="0" marL="0">
-              <a:lnSpc>
-                <a:spcPct val="100000"/>
-              </a:lnSpc>
-              <a:buNone/>
-            </a:pPr>
-            <a:r>
-              <a:rPr lang="en-US" sz="1100" b="1" dirty="0">
-                <a:solidFill>
-                  <a:schemeClr val="tx2"/>
-                </a:solidFill>
-              </a:rPr>
-              <a:t>Plan de Recuperación</a:t>
-            </a:r>
-            <a:pPr indent="0" marL="0">
-              <a:lnSpc>
-                <a:spcPct val="100000"/>
-              </a:lnSpc>
-              <a:buNone/>
-            </a:pPr>
-            <a:r>
-              <a:rPr lang="en-US" sz="1100" dirty="0">
-                <a:solidFill>
-                  <a:schemeClr val="accent4"/>
-                </a:solidFill>
-              </a:rPr>
-              <a:t>  ·  Circ. 22737</a:t>
-            </a:r>
-            <a:endParaRPr lang="en-US" sz="1100" dirty="0"/>
-          </a:p>
-          <a:p>
-            <a:pPr indent="0" marL="0">
-              <a:lnSpc>
-                <a:spcPct val="100000"/>
-              </a:lnSpc>
-              <a:buNone/>
-            </a:pPr>
-            <a:r>
-              <a:rPr lang="en-US" sz="1100" b="1" dirty="0">
-                <a:solidFill>
-                  <a:schemeClr val="accent2"/>
-                </a:solidFill>
-              </a:rPr>
-              <a:t>Recepción 22/09/2026  →  Envío 03/11/2026</a:t>
-            </a:r>
-            <a:endParaRPr lang="en-US" sz="1100" dirty="0"/>
-          </a:p>
-          <a:p>
-            <a:pPr indent="0" marL="0">
-              <a:lnSpc>
-                <a:spcPct val="100000"/>
-              </a:lnSpc>
-              <a:buNone/>
-            </a:pPr>
-            <a:r>
-              <a:rPr lang="en-US" sz="400" dirty="0">
-                <a:solidFill>
-                  <a:srgbClr val="000000"/>
-                </a:solidFill>
-              </a:rPr>
-              <a:t> </a:t>
-            </a:r>
-            <a:endParaRPr lang="en-US" sz="1100" dirty="0"/>
-          </a:p>
-          <a:p>
-            <a:pPr indent="0" marL="0">
-              <a:lnSpc>
-                <a:spcPct val="100000"/>
-              </a:lnSpc>
-              <a:buNone/>
-            </a:pPr>
-            <a:r>
-              <a:rPr lang="en-US" sz="1100" b="1" dirty="0">
-                <a:solidFill>
-                  <a:schemeClr val="tx2"/>
-                </a:solidFill>
-              </a:rPr>
-              <a:t>Visita inicial – Riesgos Específicos</a:t>
-            </a:r>
-            <a:pPr indent="0" marL="0">
-              <a:lnSpc>
-                <a:spcPct val="100000"/>
-              </a:lnSpc>
-              <a:buNone/>
-            </a:pPr>
-            <a:r>
-              <a:rPr lang="en-US" sz="1100" dirty="0">
-                <a:solidFill>
-                  <a:schemeClr val="accent4"/>
-                </a:solidFill>
-              </a:rPr>
-              <a:t>  ·  Circ. 22742</a:t>
-            </a:r>
-            <a:endParaRPr lang="en-US" sz="1100" dirty="0"/>
-          </a:p>
-          <a:p>
-            <a:pPr indent="0" marL="0">
-              <a:lnSpc>
-                <a:spcPct val="100000"/>
-              </a:lnSpc>
-              <a:buNone/>
-            </a:pPr>
-            <a:r>
-              <a:rPr lang="en-US" sz="1100" dirty="0">
-                <a:solidFill>
-                  <a:schemeClr val="tx1"/>
-                </a:solidFill>
-              </a:rPr>
-              <a:t>Crédito, Liquidez y Mercado</a:t>
-            </a:r>
-            <a:endParaRPr lang="en-US" sz="1100" dirty="0"/>
-          </a:p>
-          <a:p>
-            <a:pPr indent="0" marL="0">
-              <a:lnSpc>
-                <a:spcPct val="100000"/>
-              </a:lnSpc>
-              <a:buNone/>
-            </a:pPr>
-            <a:r>
-              <a:rPr lang="en-US" sz="1100" b="1" dirty="0">
-                <a:solidFill>
-                  <a:schemeClr val="accent2"/>
-                </a:solidFill>
-              </a:rPr>
-              <a:t>Recepción 24/09/2026  →  Inicio 09/10/2026</a:t>
-            </a:r>
-            <a:endParaRPr lang="en-US" sz="1100" dirty="0"/>
-          </a:p>
-          <a:p>
-            <a:pPr indent="0" marL="0">
-              <a:lnSpc>
-                <a:spcPct val="100000"/>
-              </a:lnSpc>
-              <a:buNone/>
-            </a:pPr>
-            <a:r>
-              <a:rPr lang="en-US" sz="400" dirty="0">
-                <a:solidFill>
-                  <a:srgbClr val="000000"/>
-                </a:solidFill>
-              </a:rPr>
-              <a:t> </a:t>
-            </a:r>
-            <a:endParaRPr lang="en-US" sz="1100" dirty="0"/>
-          </a:p>
-          <a:p>
-            <a:pPr indent="0" marL="0">
-              <a:lnSpc>
-                <a:spcPct val="100000"/>
-              </a:lnSpc>
-              <a:buNone/>
-            </a:pPr>
-            <a:r>
-              <a:rPr lang="en-US" sz="1100" b="1" dirty="0">
-                <a:solidFill>
-                  <a:schemeClr val="tx2"/>
-                </a:solidFill>
-              </a:rPr>
-              <a:t>Resultados preliminares – PLD/FT</a:t>
-            </a:r>
-            <a:pPr indent="0" marL="0">
-              <a:lnSpc>
-                <a:spcPct val="100000"/>
-              </a:lnSpc>
-              <a:buNone/>
-            </a:pPr>
-            <a:r>
-              <a:rPr lang="en-US" sz="1100" dirty="0">
-                <a:solidFill>
-                  <a:schemeClr val="accent4"/>
-                </a:solidFill>
-              </a:rPr>
-              <a:t>  ·  Circ. 23486</a:t>
-            </a:r>
-            <a:endParaRPr lang="en-US" sz="1100" dirty="0"/>
-          </a:p>
-          <a:p>
-            <a:pPr indent="0" marL="0">
-              <a:lnSpc>
-                <a:spcPct val="100000"/>
-              </a:lnSpc>
-              <a:buNone/>
-            </a:pPr>
-            <a:r>
-              <a:rPr lang="en-US" sz="1100" b="1" dirty="0">
-                <a:solidFill>
-                  <a:schemeClr val="accent2"/>
-                </a:solidFill>
-              </a:rPr>
-              <a:t>Recepción 02/10/2026  →  Límite envío 16/10/2026</a:t>
-            </a:r>
-            <a:endParaRPr lang="en-US" sz="1100" dirty="0"/>
-          </a:p>
-        </p:txBody>
-      </p:sp>
-      <p:sp>
-        <p:nvSpPr>
-          <p:cNvPr id="17" name="S2 Cumplimiento Regulatorio"/>
-          <p:cNvSpPr/>
-          <p:nvPr/>
-        </p:nvSpPr>
-        <p:spPr>
-          <a:xfrm>
-            <a:off x="7589520" y="1609344"/>
-            <a:ext cx="4142232" cy="1481328"/>
-          </a:xfrm>
-          <a:prstGeom prst="roundRect">
-            <a:avLst>
-              <a:gd name="adj" fmla="val 6173"/>
-            </a:avLst>
-          </a:prstGeom>
-          <a:solidFill>
-            <a:schemeClr val="bg2"/>
-          </a:solidFill>
-          <a:ln w="12700">
-            <a:solidFill>
-              <a:schemeClr val="bg2"/>
-            </a:solidFill>
-            <a:prstDash val="solid"/>
-          </a:ln>
-        </p:spPr>
-      </p:sp>
-      <p:sp>
-        <p:nvSpPr>
-          <p:cNvPr id="18" name="Text 15"/>
-          <p:cNvSpPr txBox="1"/>
-          <p:nvPr/>
-        </p:nvSpPr>
-        <p:spPr>
-          <a:xfrm>
-            <a:off x="7726680" y="1655064"/>
-            <a:ext cx="3867912" cy="1389888"/>
-          </a:xfrm>
-          <a:prstGeom prst="rect">
-            <a:avLst/>
-          </a:prstGeom>
-          <a:noFill/>
-          <a:ln/>
-        </p:spPr>
-        <p:txBody>
-          <a:bodyPr wrap="square" lIns="0" tIns="0" rIns="0" bIns="0" rtlCol="0" anchor="ctr"/>
-          <a:lstStyle/>
-          <a:p>
-            <a:pPr indent="0" marL="0">
-              <a:lnSpc>
-                <a:spcPct val="100000"/>
-              </a:lnSpc>
-              <a:buNone/>
-            </a:pPr>
-            <a:r>
-              <a:rPr lang="en-US" sz="1100" b="1" dirty="0">
-                <a:solidFill>
-                  <a:schemeClr val="tx2"/>
-                </a:solidFill>
-              </a:rPr>
-              <a:t>Resultados preliminares – Gobierno Corporativo</a:t>
-            </a:r>
-            <a:pPr indent="0" marL="0">
-              <a:lnSpc>
-                <a:spcPct val="100000"/>
-              </a:lnSpc>
-              <a:buNone/>
-            </a:pPr>
-            <a:r>
-              <a:rPr lang="en-US" sz="1100" dirty="0">
-                <a:solidFill>
-                  <a:schemeClr val="accent4"/>
-                </a:solidFill>
-              </a:rPr>
-              <a:t>  ·  Circ. 22741</a:t>
-            </a:r>
-            <a:endParaRPr lang="en-US" sz="1100" dirty="0"/>
-          </a:p>
-          <a:p>
-            <a:pPr indent="0" marL="0">
-              <a:lnSpc>
-                <a:spcPct val="100000"/>
-              </a:lnSpc>
-              <a:buNone/>
-            </a:pPr>
-            <a:r>
-              <a:rPr lang="en-US" sz="1100" b="1" dirty="0">
-                <a:solidFill>
-                  <a:schemeClr val="accent2"/>
-                </a:solidFill>
-              </a:rPr>
-              <a:t>Recepción 09/10/2026</a:t>
-            </a:r>
-            <a:endParaRPr lang="en-US" sz="1100" dirty="0"/>
-          </a:p>
-          <a:p>
-            <a:pPr indent="0" marL="0">
-              <a:lnSpc>
-                <a:spcPct val="100000"/>
-              </a:lnSpc>
-              <a:buNone/>
-            </a:pPr>
-            <a:r>
-              <a:rPr lang="en-US" sz="400" dirty="0">
-                <a:solidFill>
-                  <a:srgbClr val="000000"/>
-                </a:solidFill>
-              </a:rPr>
-              <a:t> </a:t>
-            </a:r>
-            <a:endParaRPr lang="en-US" sz="1100" dirty="0"/>
-          </a:p>
-          <a:p>
-            <a:pPr indent="0" marL="0">
-              <a:lnSpc>
-                <a:spcPct val="100000"/>
-              </a:lnSpc>
-              <a:buNone/>
-            </a:pPr>
-            <a:r>
-              <a:rPr lang="en-US" sz="1100" b="1" dirty="0">
-                <a:solidFill>
-                  <a:schemeClr val="accent2"/>
-                </a:solidFill>
-              </a:rPr>
-              <a:t>Límite 23/10/2026  ·  </a:t>
-            </a:r>
-            <a:pPr indent="0" marL="0">
-              <a:lnSpc>
-                <a:spcPct val="100000"/>
-              </a:lnSpc>
-              <a:buNone/>
-            </a:pPr>
-            <a:r>
-              <a:rPr lang="en-US" sz="1100" dirty="0">
-                <a:solidFill>
-                  <a:schemeClr val="tx1"/>
-                </a:solidFill>
-              </a:rPr>
-              <a:t>Nuevas observaciones</a:t>
-            </a:r>
-            <a:endParaRPr lang="en-US" sz="1100" dirty="0"/>
-          </a:p>
-          <a:p>
-            <a:pPr indent="0" marL="0">
-              <a:lnSpc>
-                <a:spcPct val="100000"/>
-              </a:lnSpc>
-              <a:buNone/>
-            </a:pPr>
-            <a:r>
-              <a:rPr lang="en-US" sz="1100" b="1" dirty="0">
-                <a:solidFill>
-                  <a:schemeClr val="accent2"/>
-                </a:solidFill>
-              </a:rPr>
-              <a:t>Límite 30/10/2026  ·  </a:t>
-            </a:r>
-            <a:pPr indent="0" marL="0">
-              <a:lnSpc>
-                <a:spcPct val="100000"/>
-              </a:lnSpc>
-              <a:buNone/>
-            </a:pPr>
-            <a:r>
-              <a:rPr lang="en-US" sz="1100" dirty="0">
-                <a:solidFill>
-                  <a:schemeClr val="tx1"/>
-                </a:solidFill>
-              </a:rPr>
-              <a:t>Seguimiento de observaciones</a:t>
-            </a:r>
-            <a:endParaRPr lang="en-US" sz="1100" dirty="0"/>
-          </a:p>
-          <a:p>
-            <a:pPr indent="0" marL="0">
-              <a:lnSpc>
-                <a:spcPct val="100000"/>
-              </a:lnSpc>
-              <a:buNone/>
-            </a:pPr>
-            <a:r>
-              <a:rPr lang="en-US" sz="400" dirty="0">
-                <a:solidFill>
-                  <a:srgbClr val="000000"/>
-                </a:solidFill>
-              </a:rPr>
-              <a:t> </a:t>
-            </a:r>
-            <a:endParaRPr lang="en-US" sz="1100" dirty="0"/>
-          </a:p>
-          <a:p>
-            <a:pPr indent="0" marL="0">
-              <a:lnSpc>
-                <a:spcPct val="100000"/>
-              </a:lnSpc>
-              <a:buNone/>
-            </a:pPr>
-            <a:r>
-              <a:rPr lang="en-US" sz="1100" dirty="0">
-                <a:solidFill>
-                  <a:schemeClr val="accent4"/>
-                </a:solidFill>
-              </a:rPr>
-              <a:t>Incluye pruebas de descargo a observaciones de visitas anteriores</a:t>
-            </a:r>
-            <a:endParaRPr lang="en-US" sz="1100" dirty="0"/>
-          </a:p>
-        </p:txBody>
-      </p:sp>
-      <p:sp>
-        <p:nvSpPr>
-          <p:cNvPr id="19" name="Frente Riesgos No Financieros"/>
-          <p:cNvSpPr/>
-          <p:nvPr/>
-        </p:nvSpPr>
-        <p:spPr>
-          <a:xfrm>
-            <a:off x="457200" y="3182112"/>
-            <a:ext cx="2697480" cy="914400"/>
-          </a:xfrm>
-          <a:prstGeom prst="roundRect">
-            <a:avLst>
-              <a:gd name="adj" fmla="val 10000"/>
-            </a:avLst>
-          </a:prstGeom>
-          <a:solidFill>
-            <a:schemeClr val="tx2"/>
-          </a:solidFill>
-          <a:ln w="12700">
-            <a:solidFill>
-              <a:schemeClr val="tx2"/>
-            </a:solidFill>
-            <a:prstDash val="solid"/>
-          </a:ln>
-        </p:spPr>
-      </p:sp>
-      <p:sp>
-        <p:nvSpPr>
-          <p:cNvPr id="20" name="Icono fondo Riesgos No Financieros"/>
-          <p:cNvSpPr/>
-          <p:nvPr/>
-        </p:nvSpPr>
-        <p:spPr>
-          <a:xfrm>
-            <a:off x="603504" y="3429000"/>
-            <a:ext cx="420624" cy="420624"/>
-          </a:xfrm>
-          <a:prstGeom prst="ellipse">
-            <a:avLst/>
-          </a:prstGeom>
-          <a:solidFill>
-            <a:schemeClr val="accent3"/>
-          </a:solidFill>
-          <a:ln w="12700">
-            <a:solidFill>
-              <a:schemeClr val="accent3"/>
+              <a:schemeClr val="accent6"/>
             </a:solidFill>
             <a:prstDash val="solid"/>
           </a:ln>
@@ -2022,7 +2074,7 @@
       </p:sp>
       <p:pic>
         <p:nvPicPr>
-          <p:cNvPr id="21" name="Icono Riesgos No Financieros" descr="preencoded.png">    </p:cNvPr>
+          <p:cNvPr id="7" name="Icono satélite" descr="preencoded.png">    </p:cNvPr>
           <p:cNvPicPr>
             <a:picLocks noChangeAspect="1"/>
           </p:cNvPicPr>
@@ -2036,8 +2088,8 @@
         </p:blipFill>
         <p:spPr>
           <a:xfrm>
-            <a:off x="713232" y="3538728"/>
-            <a:ext cx="201168" cy="201168"/>
+            <a:off x="7239671" y="1753271"/>
+            <a:ext cx="260787" cy="260787"/>
           </a:xfrm>
           <a:prstGeom prst="rect">
             <a:avLst/>
@@ -2046,394 +2098,24 @@
       </p:pic>
       <p:sp>
         <p:nvSpPr>
-          <p:cNvPr id="22" name="Text 18"/>
-          <p:cNvSpPr txBox="1"/>
-          <p:nvPr/>
-        </p:nvSpPr>
-        <p:spPr>
-          <a:xfrm>
-            <a:off x="1143000" y="3182112"/>
-            <a:ext cx="1920240" cy="914400"/>
-          </a:xfrm>
-          <a:prstGeom prst="rect">
-            <a:avLst/>
-          </a:prstGeom>
-          <a:noFill/>
-          <a:ln/>
-        </p:spPr>
-        <p:txBody>
-          <a:bodyPr wrap="square" lIns="0" tIns="0" rIns="0" bIns="0" rtlCol="0" anchor="ctr"/>
-          <a:lstStyle/>
-          <a:p>
-            <a:pPr indent="0" marL="0">
-              <a:buNone/>
-            </a:pPr>
-            <a:r>
-              <a:rPr lang="en-US" sz="1400" b="1" dirty="0">
-                <a:solidFill>
-                  <a:schemeClr val="bg1"/>
-                </a:solidFill>
-              </a:rPr>
-              <a:t>Riesgos No Financieros</a:t>
-            </a:r>
-            <a:endParaRPr lang="en-US" sz="1400" dirty="0"/>
-          </a:p>
-          <a:p>
-            <a:pPr indent="0" marL="0">
-              <a:buNone/>
-            </a:pPr>
-            <a:r>
-              <a:rPr lang="en-US" sz="1100" dirty="0">
-                <a:solidFill>
-                  <a:schemeClr val="accent5"/>
-                </a:solidFill>
-              </a:rPr>
-              <a:t>Riesgo Operacional</a:t>
-            </a:r>
-            <a:endParaRPr lang="en-US" sz="1400" dirty="0"/>
-          </a:p>
-        </p:txBody>
-      </p:sp>
-      <p:sp>
-        <p:nvSpPr>
-          <p:cNvPr id="23" name="S1 Riesgos No Financieros"/>
-          <p:cNvSpPr/>
-          <p:nvPr/>
-        </p:nvSpPr>
-        <p:spPr>
-          <a:xfrm>
-            <a:off x="3291840" y="3182112"/>
-            <a:ext cx="4160520" cy="914400"/>
-          </a:xfrm>
-          <a:prstGeom prst="roundRect">
-            <a:avLst>
-              <a:gd name="adj" fmla="val 10000"/>
-            </a:avLst>
-          </a:prstGeom>
-          <a:solidFill>
-            <a:schemeClr val="bg2"/>
+          <p:cNvPr id="8" name="Círculo satélite"/>
+          <p:cNvSpPr/>
+          <p:nvPr/>
+        </p:nvSpPr>
+        <p:spPr>
+          <a:xfrm>
+            <a:off x="10927080" y="1783080"/>
+            <a:ext cx="566928" cy="566928"/>
+          </a:xfrm>
+          <a:prstGeom prst="ellipse">
+            <a:avLst/>
+          </a:prstGeom>
+          <a:solidFill>
+            <a:schemeClr val="accent6"/>
           </a:solidFill>
           <a:ln w="12700">
             <a:solidFill>
-              <a:schemeClr val="bg2"/>
-            </a:solidFill>
-            <a:prstDash val="solid"/>
-          </a:ln>
-        </p:spPr>
-      </p:sp>
-      <p:sp>
-        <p:nvSpPr>
-          <p:cNvPr id="24" name="Text 20"/>
-          <p:cNvSpPr txBox="1"/>
-          <p:nvPr/>
-        </p:nvSpPr>
-        <p:spPr>
-          <a:xfrm>
-            <a:off x="3429000" y="3227832"/>
-            <a:ext cx="3886200" cy="822960"/>
-          </a:xfrm>
-          <a:prstGeom prst="rect">
-            <a:avLst/>
-          </a:prstGeom>
-          <a:noFill/>
-          <a:ln/>
-        </p:spPr>
-        <p:txBody>
-          <a:bodyPr wrap="square" lIns="0" tIns="0" rIns="0" bIns="0" rtlCol="0" anchor="ctr"/>
-          <a:lstStyle/>
-          <a:p>
-            <a:pPr marL="152400" indent="-152400">
-              <a:lnSpc>
-                <a:spcPct val="100000"/>
-              </a:lnSpc>
-              <a:spcAft>
-                <a:spcPts val="200"/>
-              </a:spcAft>
-              <a:buSzPct val="100000"/>
-              <a:buChar char="•"/>
-            </a:pPr>
-            <a:r>
-              <a:rPr lang="en-US" sz="1100" dirty="0">
-                <a:solidFill>
-                  <a:schemeClr val="tx1"/>
-                </a:solidFill>
-              </a:rPr>
-              <a:t>Capacitación y Examen GIR 2026</a:t>
-            </a:r>
-            <a:endParaRPr lang="en-US" sz="1100" dirty="0"/>
-          </a:p>
-          <a:p>
-            <a:pPr marL="152400" indent="-152400">
-              <a:lnSpc>
-                <a:spcPct val="100000"/>
-              </a:lnSpc>
-              <a:spcAft>
-                <a:spcPts val="200"/>
-              </a:spcAft>
-              <a:buSzPct val="100000"/>
-              <a:buChar char="•"/>
-            </a:pPr>
-            <a:r>
-              <a:rPr lang="en-US" sz="1100" dirty="0">
-                <a:solidFill>
-                  <a:schemeClr val="tx1"/>
-                </a:solidFill>
-              </a:rPr>
-              <a:t>Opinión Fábrica de Créditos</a:t>
-            </a:r>
-            <a:endParaRPr lang="en-US" sz="1100" dirty="0"/>
-          </a:p>
-        </p:txBody>
-      </p:sp>
-      <p:sp>
-        <p:nvSpPr>
-          <p:cNvPr id="25" name="GIR fondo"/>
-          <p:cNvSpPr/>
-          <p:nvPr/>
-        </p:nvSpPr>
-        <p:spPr>
-          <a:xfrm>
-            <a:off x="6035040" y="3520440"/>
-            <a:ext cx="868680" cy="91440"/>
-          </a:xfrm>
-          <a:prstGeom prst="roundRect">
-            <a:avLst>
-              <a:gd name="adj" fmla="val 50000"/>
-            </a:avLst>
-          </a:prstGeom>
-          <a:solidFill>
-            <a:schemeClr val="accent5"/>
-          </a:solidFill>
-          <a:ln w="12700">
-            <a:solidFill>
-              <a:schemeClr val="accent5"/>
-            </a:solidFill>
-            <a:prstDash val="solid"/>
-          </a:ln>
-        </p:spPr>
-      </p:sp>
-      <p:sp>
-        <p:nvSpPr>
-          <p:cNvPr id="26" name="GIR avance"/>
-          <p:cNvSpPr/>
-          <p:nvPr/>
-        </p:nvSpPr>
-        <p:spPr>
-          <a:xfrm>
-            <a:off x="6035040" y="3520440"/>
-            <a:ext cx="434340" cy="91440"/>
-          </a:xfrm>
-          <a:prstGeom prst="roundRect">
-            <a:avLst>
-              <a:gd name="adj" fmla="val 50000"/>
-            </a:avLst>
-          </a:prstGeom>
-          <a:solidFill>
-            <a:schemeClr val="accent2"/>
-          </a:solidFill>
-          <a:ln w="12700">
-            <a:solidFill>
-              <a:schemeClr val="accent2"/>
-            </a:solidFill>
-            <a:prstDash val="solid"/>
-          </a:ln>
-        </p:spPr>
-      </p:sp>
-      <p:sp>
-        <p:nvSpPr>
-          <p:cNvPr id="27" name="Text 23"/>
-          <p:cNvSpPr txBox="1"/>
-          <p:nvPr/>
-        </p:nvSpPr>
-        <p:spPr>
-          <a:xfrm>
-            <a:off x="6949440" y="3429000"/>
-            <a:ext cx="411480" cy="274320"/>
-          </a:xfrm>
-          <a:prstGeom prst="rect">
-            <a:avLst/>
-          </a:prstGeom>
-          <a:noFill/>
-          <a:ln/>
-        </p:spPr>
-        <p:txBody>
-          <a:bodyPr wrap="square" lIns="0" tIns="0" rIns="0" bIns="0" rtlCol="0" anchor="ctr"/>
-          <a:lstStyle/>
-          <a:p>
-            <a:pPr indent="0" marL="0">
-              <a:buNone/>
-            </a:pPr>
-            <a:r>
-              <a:rPr lang="en-US" sz="1100" b="1" dirty="0">
-                <a:solidFill>
-                  <a:schemeClr val="accent2"/>
-                </a:solidFill>
-              </a:rPr>
-              <a:t>50%</a:t>
-            </a:r>
-            <a:endParaRPr lang="en-US" sz="1100" dirty="0"/>
-          </a:p>
-        </p:txBody>
-      </p:sp>
-      <p:sp>
-        <p:nvSpPr>
-          <p:cNvPr id="28" name="S2 Riesgos No Financieros"/>
-          <p:cNvSpPr/>
-          <p:nvPr/>
-        </p:nvSpPr>
-        <p:spPr>
-          <a:xfrm>
-            <a:off x="7589520" y="3182112"/>
-            <a:ext cx="4142232" cy="914400"/>
-          </a:xfrm>
-          <a:prstGeom prst="roundRect">
-            <a:avLst>
-              <a:gd name="adj" fmla="val 10000"/>
-            </a:avLst>
-          </a:prstGeom>
-          <a:solidFill>
-            <a:schemeClr val="bg2"/>
-          </a:solidFill>
-          <a:ln w="12700">
-            <a:solidFill>
-              <a:schemeClr val="bg2"/>
-            </a:solidFill>
-            <a:prstDash val="solid"/>
-          </a:ln>
-        </p:spPr>
-      </p:sp>
-      <p:sp>
-        <p:nvSpPr>
-          <p:cNvPr id="29" name="Text 25"/>
-          <p:cNvSpPr txBox="1"/>
-          <p:nvPr/>
-        </p:nvSpPr>
-        <p:spPr>
-          <a:xfrm>
-            <a:off x="7726680" y="3227832"/>
-            <a:ext cx="3867912" cy="822960"/>
-          </a:xfrm>
-          <a:prstGeom prst="rect">
-            <a:avLst/>
-          </a:prstGeom>
-          <a:noFill/>
-          <a:ln/>
-        </p:spPr>
-        <p:txBody>
-          <a:bodyPr wrap="square" lIns="0" tIns="0" rIns="0" bIns="0" rtlCol="0" anchor="ctr"/>
-          <a:lstStyle/>
-          <a:p>
-            <a:pPr marL="152400" indent="-152400">
-              <a:lnSpc>
-                <a:spcPct val="100000"/>
-              </a:lnSpc>
-              <a:spcAft>
-                <a:spcPts val="200"/>
-              </a:spcAft>
-              <a:buSzPct val="100000"/>
-              <a:buChar char="•"/>
-            </a:pPr>
-            <a:r>
-              <a:rPr lang="en-US" sz="1100" dirty="0">
-                <a:solidFill>
-                  <a:schemeClr val="tx1"/>
-                </a:solidFill>
-              </a:rPr>
-              <a:t>Actualización Matriz BIA</a:t>
-            </a:r>
-            <a:endParaRPr lang="en-US" sz="1100" dirty="0"/>
-          </a:p>
-          <a:p>
-            <a:pPr marL="152400" indent="-152400">
-              <a:lnSpc>
-                <a:spcPct val="100000"/>
-              </a:lnSpc>
-              <a:spcAft>
-                <a:spcPts val="200"/>
-              </a:spcAft>
-              <a:buSzPct val="100000"/>
-              <a:buChar char="•"/>
-            </a:pPr>
-            <a:r>
-              <a:rPr lang="en-US" sz="1100" dirty="0">
-                <a:solidFill>
-                  <a:schemeClr val="tx1"/>
-                </a:solidFill>
-              </a:rPr>
-              <a:t>Segunda prueba de continuidad</a:t>
-            </a:r>
-            <a:endParaRPr lang="en-US" sz="1100" dirty="0"/>
-          </a:p>
-          <a:p>
-            <a:pPr marL="152400" indent="-152400">
-              <a:lnSpc>
-                <a:spcPct val="100000"/>
-              </a:lnSpc>
-              <a:spcAft>
-                <a:spcPts val="200"/>
-              </a:spcAft>
-              <a:buSzPct val="100000"/>
-              <a:buChar char="•"/>
-            </a:pPr>
-            <a:r>
-              <a:rPr lang="en-US" sz="1100" dirty="0">
-                <a:solidFill>
-                  <a:schemeClr val="tx1"/>
-                </a:solidFill>
-              </a:rPr>
-              <a:t>Indicadores de Gobierno Corporativo y Reputacional (Plan de Recuperación)</a:t>
-            </a:r>
-            <a:endParaRPr lang="en-US" sz="1100" dirty="0"/>
-          </a:p>
-        </p:txBody>
-      </p:sp>
-      <p:sp>
-        <p:nvSpPr>
-          <p:cNvPr id="30" name="Frente Cumplimiento Normativo"/>
-          <p:cNvSpPr/>
-          <p:nvPr/>
-        </p:nvSpPr>
-        <p:spPr>
-          <a:xfrm>
-            <a:off x="457200" y="4187952"/>
-            <a:ext cx="2697480" cy="658368"/>
-          </a:xfrm>
-          <a:prstGeom prst="roundRect">
-            <a:avLst>
-              <a:gd name="adj" fmla="val 13889"/>
-            </a:avLst>
-          </a:prstGeom>
-          <a:solidFill>
-            <a:schemeClr val="tx2"/>
-          </a:solidFill>
-          <a:ln w="12700">
-            <a:solidFill>
-              <a:schemeClr val="tx2"/>
-            </a:solidFill>
-            <a:prstDash val="solid"/>
-          </a:ln>
-        </p:spPr>
-      </p:sp>
-      <p:sp>
-        <p:nvSpPr>
-          <p:cNvPr id="31" name="Icono fondo Cumplimiento Normativo"/>
-          <p:cNvSpPr/>
-          <p:nvPr/>
-        </p:nvSpPr>
-        <p:spPr>
-          <a:xfrm>
-            <a:off x="603504" y="4306824"/>
-            <a:ext cx="420624" cy="420624"/>
-          </a:xfrm>
-          <a:prstGeom prst="ellipse">
-            <a:avLst/>
-          </a:prstGeom>
-          <a:solidFill>
-            <a:schemeClr val="accent3"/>
-          </a:solidFill>
-          <a:ln w="12700">
-            <a:solidFill>
-              <a:schemeClr val="accent3"/>
+              <a:schemeClr val="accent6"/>
             </a:solidFill>
             <a:prstDash val="solid"/>
           </a:ln>
@@ -2441,7 +2123,7 @@
       </p:sp>
       <p:pic>
         <p:nvPicPr>
-          <p:cNvPr id="32" name="Icono Cumplimiento Normativo" descr="preencoded.png">    </p:cNvPr>
+          <p:cNvPr id="9" name="Icono satélite" descr="preencoded.png">    </p:cNvPr>
           <p:cNvPicPr>
             <a:picLocks noChangeAspect="1"/>
           </p:cNvPicPr>
@@ -2455,8 +2137,8 @@
         </p:blipFill>
         <p:spPr>
           <a:xfrm>
-            <a:off x="713232" y="4416552"/>
-            <a:ext cx="201168" cy="201168"/>
+            <a:off x="11080151" y="1936151"/>
+            <a:ext cx="260787" cy="260787"/>
           </a:xfrm>
           <a:prstGeom prst="rect">
             <a:avLst/>
@@ -2465,262 +2147,24 @@
       </p:pic>
       <p:sp>
         <p:nvSpPr>
-          <p:cNvPr id="33" name="Text 28"/>
-          <p:cNvSpPr txBox="1"/>
-          <p:nvPr/>
-        </p:nvSpPr>
-        <p:spPr>
-          <a:xfrm>
-            <a:off x="1143000" y="4187952"/>
-            <a:ext cx="1920240" cy="658368"/>
-          </a:xfrm>
-          <a:prstGeom prst="rect">
-            <a:avLst/>
-          </a:prstGeom>
-          <a:noFill/>
-          <a:ln/>
-        </p:spPr>
-        <p:txBody>
-          <a:bodyPr wrap="square" lIns="0" tIns="0" rIns="0" bIns="0" rtlCol="0" anchor="ctr"/>
-          <a:lstStyle/>
-          <a:p>
-            <a:pPr indent="0" marL="0">
-              <a:buNone/>
-            </a:pPr>
-            <a:r>
-              <a:rPr lang="en-US" sz="1400" b="1" dirty="0">
-                <a:solidFill>
-                  <a:schemeClr val="bg1"/>
-                </a:solidFill>
-              </a:rPr>
-              <a:t>Cumplimiento Normativo</a:t>
-            </a:r>
-            <a:endParaRPr lang="en-US" sz="1400" dirty="0"/>
-          </a:p>
-          <a:p>
-            <a:pPr indent="0" marL="0">
-              <a:buNone/>
-            </a:pPr>
-            <a:r>
-              <a:rPr lang="en-US" sz="1100" dirty="0">
-                <a:solidFill>
-                  <a:schemeClr val="accent5"/>
-                </a:solidFill>
-              </a:rPr>
-              <a:t>Envíos y auditorías</a:t>
-            </a:r>
-            <a:endParaRPr lang="en-US" sz="1400" dirty="0"/>
-          </a:p>
-        </p:txBody>
-      </p:sp>
-      <p:sp>
-        <p:nvSpPr>
-          <p:cNvPr id="34" name="S1 Cumplimiento Normativo"/>
-          <p:cNvSpPr/>
-          <p:nvPr/>
-        </p:nvSpPr>
-        <p:spPr>
-          <a:xfrm>
-            <a:off x="3291840" y="4187952"/>
-            <a:ext cx="4160520" cy="658368"/>
-          </a:xfrm>
-          <a:prstGeom prst="roundRect">
-            <a:avLst>
-              <a:gd name="adj" fmla="val 13889"/>
-            </a:avLst>
-          </a:prstGeom>
-          <a:solidFill>
-            <a:schemeClr val="bg2"/>
+          <p:cNvPr id="10" name="Círculo satélite"/>
+          <p:cNvSpPr/>
+          <p:nvPr/>
+        </p:nvSpPr>
+        <p:spPr>
+          <a:xfrm>
+            <a:off x="11109960" y="4846320"/>
+            <a:ext cx="566928" cy="566928"/>
+          </a:xfrm>
+          <a:prstGeom prst="ellipse">
+            <a:avLst/>
+          </a:prstGeom>
+          <a:solidFill>
+            <a:schemeClr val="accent6"/>
           </a:solidFill>
           <a:ln w="12700">
             <a:solidFill>
-              <a:schemeClr val="bg2"/>
-            </a:solidFill>
-            <a:prstDash val="solid"/>
-          </a:ln>
-        </p:spPr>
-      </p:sp>
-      <p:sp>
-        <p:nvSpPr>
-          <p:cNvPr id="35" name="Text 30"/>
-          <p:cNvSpPr txBox="1"/>
-          <p:nvPr/>
-        </p:nvSpPr>
-        <p:spPr>
-          <a:xfrm>
-            <a:off x="3429000" y="4233672"/>
-            <a:ext cx="3886200" cy="566928"/>
-          </a:xfrm>
-          <a:prstGeom prst="rect">
-            <a:avLst/>
-          </a:prstGeom>
-          <a:noFill/>
-          <a:ln/>
-        </p:spPr>
-        <p:txBody>
-          <a:bodyPr wrap="square" lIns="0" tIns="0" rIns="0" bIns="0" rtlCol="0" anchor="ctr"/>
-          <a:lstStyle/>
-          <a:p>
-            <a:pPr marL="152400" indent="-152400">
-              <a:lnSpc>
-                <a:spcPct val="100000"/>
-              </a:lnSpc>
-              <a:spcAft>
-                <a:spcPts val="200"/>
-              </a:spcAft>
-              <a:buSzPct val="100000"/>
-              <a:buChar char="•"/>
-            </a:pPr>
-            <a:r>
-              <a:rPr lang="en-US" sz="1100" dirty="0">
-                <a:solidFill>
-                  <a:schemeClr val="tx1"/>
-                </a:solidFill>
-              </a:rPr>
-              <a:t>Envíos regulatorios (DAR)</a:t>
-            </a:r>
-            <a:endParaRPr lang="en-US" sz="1100" dirty="0"/>
-          </a:p>
-        </p:txBody>
-      </p:sp>
-      <p:sp>
-        <p:nvSpPr>
-          <p:cNvPr id="36" name="S2 Cumplimiento Normativo"/>
-          <p:cNvSpPr/>
-          <p:nvPr/>
-        </p:nvSpPr>
-        <p:spPr>
-          <a:xfrm>
-            <a:off x="7589520" y="4187952"/>
-            <a:ext cx="4142232" cy="658368"/>
-          </a:xfrm>
-          <a:prstGeom prst="roundRect">
-            <a:avLst>
-              <a:gd name="adj" fmla="val 13889"/>
-            </a:avLst>
-          </a:prstGeom>
-          <a:solidFill>
-            <a:schemeClr val="bg2"/>
-          </a:solidFill>
-          <a:ln w="12700">
-            <a:solidFill>
-              <a:schemeClr val="bg2"/>
-            </a:solidFill>
-            <a:prstDash val="solid"/>
-          </a:ln>
-        </p:spPr>
-      </p:sp>
-      <p:sp>
-        <p:nvSpPr>
-          <p:cNvPr id="37" name="Text 32"/>
-          <p:cNvSpPr txBox="1"/>
-          <p:nvPr/>
-        </p:nvSpPr>
-        <p:spPr>
-          <a:xfrm>
-            <a:off x="7726680" y="4233672"/>
-            <a:ext cx="3867912" cy="566928"/>
-          </a:xfrm>
-          <a:prstGeom prst="rect">
-            <a:avLst/>
-          </a:prstGeom>
-          <a:noFill/>
-          <a:ln/>
-        </p:spPr>
-        <p:txBody>
-          <a:bodyPr wrap="square" lIns="0" tIns="0" rIns="0" bIns="0" rtlCol="0" anchor="ctr"/>
-          <a:lstStyle/>
-          <a:p>
-            <a:pPr marL="152400" indent="-152400">
-              <a:lnSpc>
-                <a:spcPct val="100000"/>
-              </a:lnSpc>
-              <a:spcAft>
-                <a:spcPts val="200"/>
-              </a:spcAft>
-              <a:buSzPct val="100000"/>
-              <a:buChar char="•"/>
-            </a:pPr>
-            <a:r>
-              <a:rPr lang="en-US" sz="1100" dirty="0">
-                <a:solidFill>
-                  <a:schemeClr val="tx1"/>
-                </a:solidFill>
-              </a:rPr>
-              <a:t>Auditoría Interna – Evaluación NRP-24</a:t>
-            </a:r>
-            <a:endParaRPr lang="en-US" sz="1100" dirty="0"/>
-          </a:p>
-          <a:p>
-            <a:pPr marL="152400" indent="-152400">
-              <a:lnSpc>
-                <a:spcPct val="100000"/>
-              </a:lnSpc>
-              <a:spcAft>
-                <a:spcPts val="200"/>
-              </a:spcAft>
-              <a:buSzPct val="100000"/>
-              <a:buChar char="•"/>
-            </a:pPr>
-            <a:r>
-              <a:rPr lang="en-US" sz="1100" dirty="0">
-                <a:solidFill>
-                  <a:schemeClr val="tx1"/>
-                </a:solidFill>
-              </a:rPr>
-              <a:t>Auditoría Externa</a:t>
-            </a:r>
-            <a:endParaRPr lang="en-US" sz="1100" dirty="0"/>
-          </a:p>
-        </p:txBody>
-      </p:sp>
-      <p:sp>
-        <p:nvSpPr>
-          <p:cNvPr id="38" name="Frente Riesgos Financieros"/>
-          <p:cNvSpPr/>
-          <p:nvPr/>
-        </p:nvSpPr>
-        <p:spPr>
-          <a:xfrm>
-            <a:off x="457200" y="4937760"/>
-            <a:ext cx="2697480" cy="658368"/>
-          </a:xfrm>
-          <a:prstGeom prst="roundRect">
-            <a:avLst>
-              <a:gd name="adj" fmla="val 13889"/>
-            </a:avLst>
-          </a:prstGeom>
-          <a:solidFill>
-            <a:schemeClr val="tx2"/>
-          </a:solidFill>
-          <a:ln w="12700">
-            <a:solidFill>
-              <a:schemeClr val="tx2"/>
-            </a:solidFill>
-            <a:prstDash val="solid"/>
-          </a:ln>
-        </p:spPr>
-      </p:sp>
-      <p:sp>
-        <p:nvSpPr>
-          <p:cNvPr id="39" name="Icono fondo Riesgos Financieros"/>
-          <p:cNvSpPr/>
-          <p:nvPr/>
-        </p:nvSpPr>
-        <p:spPr>
-          <a:xfrm>
-            <a:off x="603504" y="5056632"/>
-            <a:ext cx="420624" cy="420624"/>
-          </a:xfrm>
-          <a:prstGeom prst="ellipse">
-            <a:avLst/>
-          </a:prstGeom>
-          <a:solidFill>
-            <a:schemeClr val="accent3"/>
-          </a:solidFill>
-          <a:ln w="12700">
-            <a:solidFill>
-              <a:schemeClr val="accent3"/>
+              <a:schemeClr val="accent6"/>
             </a:solidFill>
             <a:prstDash val="solid"/>
           </a:ln>
@@ -2728,7 +2172,7 @@
       </p:sp>
       <p:pic>
         <p:nvPicPr>
-          <p:cNvPr id="40" name="Icono Riesgos Financieros" descr="preencoded.png">    </p:cNvPr>
+          <p:cNvPr id="11" name="Icono satélite" descr="preencoded.png">    </p:cNvPr>
           <p:cNvPicPr>
             <a:picLocks noChangeAspect="1"/>
           </p:cNvPicPr>
@@ -2742,8 +2186,8 @@
         </p:blipFill>
         <p:spPr>
           <a:xfrm>
-            <a:off x="713232" y="5166360"/>
-            <a:ext cx="201168" cy="201168"/>
+            <a:off x="11263031" y="4999391"/>
+            <a:ext cx="260787" cy="260787"/>
           </a:xfrm>
           <a:prstGeom prst="rect">
             <a:avLst/>
@@ -2752,262 +2196,24 @@
       </p:pic>
       <p:sp>
         <p:nvSpPr>
-          <p:cNvPr id="41" name="Text 35"/>
-          <p:cNvSpPr txBox="1"/>
-          <p:nvPr/>
-        </p:nvSpPr>
-        <p:spPr>
-          <a:xfrm>
-            <a:off x="1143000" y="4937760"/>
-            <a:ext cx="1920240" cy="658368"/>
-          </a:xfrm>
-          <a:prstGeom prst="rect">
-            <a:avLst/>
-          </a:prstGeom>
-          <a:noFill/>
-          <a:ln/>
-        </p:spPr>
-        <p:txBody>
-          <a:bodyPr wrap="square" lIns="0" tIns="0" rIns="0" bIns="0" rtlCol="0" anchor="ctr"/>
-          <a:lstStyle/>
-          <a:p>
-            <a:pPr indent="0" marL="0">
-              <a:buNone/>
-            </a:pPr>
-            <a:r>
-              <a:rPr lang="en-US" sz="1400" b="1" dirty="0">
-                <a:solidFill>
-                  <a:schemeClr val="bg1"/>
-                </a:solidFill>
-              </a:rPr>
-              <a:t>Riesgos Financieros</a:t>
-            </a:r>
-            <a:endParaRPr lang="en-US" sz="1400" dirty="0"/>
-          </a:p>
-          <a:p>
-            <a:pPr indent="0" marL="0">
-              <a:buNone/>
-            </a:pPr>
-            <a:r>
-              <a:rPr lang="en-US" sz="1100" dirty="0">
-                <a:solidFill>
-                  <a:schemeClr val="accent5"/>
-                </a:solidFill>
-              </a:rPr>
-              <a:t>Tarjeta de crédito</a:t>
-            </a:r>
-            <a:endParaRPr lang="en-US" sz="1400" dirty="0"/>
-          </a:p>
-        </p:txBody>
-      </p:sp>
-      <p:sp>
-        <p:nvSpPr>
-          <p:cNvPr id="42" name="S1 Riesgos Financieros"/>
-          <p:cNvSpPr/>
-          <p:nvPr/>
-        </p:nvSpPr>
-        <p:spPr>
-          <a:xfrm>
-            <a:off x="3291840" y="4937760"/>
-            <a:ext cx="4160520" cy="658368"/>
-          </a:xfrm>
-          <a:prstGeom prst="roundRect">
-            <a:avLst>
-              <a:gd name="adj" fmla="val 13889"/>
-            </a:avLst>
-          </a:prstGeom>
-          <a:solidFill>
-            <a:schemeClr val="bg2"/>
+          <p:cNvPr id="12" name="Círculo satélite"/>
+          <p:cNvSpPr/>
+          <p:nvPr/>
+        </p:nvSpPr>
+        <p:spPr>
+          <a:xfrm>
+            <a:off x="7223760" y="5074920"/>
+            <a:ext cx="566928" cy="566928"/>
+          </a:xfrm>
+          <a:prstGeom prst="ellipse">
+            <a:avLst/>
+          </a:prstGeom>
+          <a:solidFill>
+            <a:schemeClr val="accent6"/>
           </a:solidFill>
           <a:ln w="12700">
             <a:solidFill>
-              <a:schemeClr val="bg2"/>
-            </a:solidFill>
-            <a:prstDash val="solid"/>
-          </a:ln>
-        </p:spPr>
-      </p:sp>
-      <p:sp>
-        <p:nvSpPr>
-          <p:cNvPr id="43" name="Text 37"/>
-          <p:cNvSpPr txBox="1"/>
-          <p:nvPr/>
-        </p:nvSpPr>
-        <p:spPr>
-          <a:xfrm>
-            <a:off x="3429000" y="4983480"/>
-            <a:ext cx="3886200" cy="566928"/>
-          </a:xfrm>
-          <a:prstGeom prst="rect">
-            <a:avLst/>
-          </a:prstGeom>
-          <a:noFill/>
-          <a:ln/>
-        </p:spPr>
-        <p:txBody>
-          <a:bodyPr wrap="square" lIns="0" tIns="0" rIns="0" bIns="0" rtlCol="0" anchor="ctr"/>
-          <a:lstStyle/>
-          <a:p>
-            <a:pPr marL="152400" indent="-152400">
-              <a:lnSpc>
-                <a:spcPct val="100000"/>
-              </a:lnSpc>
-              <a:spcAft>
-                <a:spcPts val="200"/>
-              </a:spcAft>
-              <a:buSzPct val="100000"/>
-              <a:buChar char="•"/>
-            </a:pPr>
-            <a:r>
-              <a:rPr lang="en-US" sz="1100" dirty="0">
-                <a:solidFill>
-                  <a:schemeClr val="tx1"/>
-                </a:solidFill>
-              </a:rPr>
-              <a:t>Informe de Análisis de Cartera de TC</a:t>
-            </a:r>
-            <a:endParaRPr lang="en-US" sz="1100" dirty="0"/>
-          </a:p>
-          <a:p>
-            <a:pPr marL="152400" indent="-152400">
-              <a:lnSpc>
-                <a:spcPct val="100000"/>
-              </a:lnSpc>
-              <a:spcAft>
-                <a:spcPts val="200"/>
-              </a:spcAft>
-              <a:buSzPct val="100000"/>
-              <a:buChar char="•"/>
-            </a:pPr>
-            <a:r>
-              <a:rPr lang="en-US" sz="1100" dirty="0">
-                <a:solidFill>
-                  <a:schemeClr val="tx1"/>
-                </a:solidFill>
-              </a:rPr>
-              <a:t>Simulación de cartera vencida</a:t>
-            </a:r>
-            <a:endParaRPr lang="en-US" sz="1100" dirty="0"/>
-          </a:p>
-        </p:txBody>
-      </p:sp>
-      <p:sp>
-        <p:nvSpPr>
-          <p:cNvPr id="44" name="S2 Riesgos Financieros"/>
-          <p:cNvSpPr/>
-          <p:nvPr/>
-        </p:nvSpPr>
-        <p:spPr>
-          <a:xfrm>
-            <a:off x="7589520" y="4937760"/>
-            <a:ext cx="4142232" cy="658368"/>
-          </a:xfrm>
-          <a:prstGeom prst="roundRect">
-            <a:avLst>
-              <a:gd name="adj" fmla="val 13889"/>
-            </a:avLst>
-          </a:prstGeom>
-          <a:solidFill>
-            <a:schemeClr val="bg2"/>
-          </a:solidFill>
-          <a:ln w="12700">
-            <a:solidFill>
-              <a:schemeClr val="bg2"/>
-            </a:solidFill>
-            <a:prstDash val="solid"/>
-          </a:ln>
-        </p:spPr>
-      </p:sp>
-      <p:sp>
-        <p:nvSpPr>
-          <p:cNvPr id="45" name="Text 39"/>
-          <p:cNvSpPr txBox="1"/>
-          <p:nvPr/>
-        </p:nvSpPr>
-        <p:spPr>
-          <a:xfrm>
-            <a:off x="7726680" y="4983480"/>
-            <a:ext cx="3867912" cy="566928"/>
-          </a:xfrm>
-          <a:prstGeom prst="rect">
-            <a:avLst/>
-          </a:prstGeom>
-          <a:noFill/>
-          <a:ln/>
-        </p:spPr>
-        <p:txBody>
-          <a:bodyPr wrap="square" lIns="0" tIns="0" rIns="0" bIns="0" rtlCol="0" anchor="ctr"/>
-          <a:lstStyle/>
-          <a:p>
-            <a:pPr marL="152400" indent="-152400">
-              <a:lnSpc>
-                <a:spcPct val="100000"/>
-              </a:lnSpc>
-              <a:spcAft>
-                <a:spcPts val="200"/>
-              </a:spcAft>
-              <a:buSzPct val="100000"/>
-              <a:buChar char="•"/>
-            </a:pPr>
-            <a:r>
-              <a:rPr lang="en-US" sz="1100" dirty="0">
-                <a:solidFill>
-                  <a:schemeClr val="tx1"/>
-                </a:solidFill>
-              </a:rPr>
-              <a:t>Actualización de Política de TC</a:t>
-            </a:r>
-            <a:endParaRPr lang="en-US" sz="1100" dirty="0"/>
-          </a:p>
-        </p:txBody>
-      </p:sp>
-      <p:sp>
-        <p:nvSpPr>
-          <p:cNvPr id="46" name="Frente Avalúos"/>
-          <p:cNvSpPr/>
-          <p:nvPr/>
-        </p:nvSpPr>
-        <p:spPr>
-          <a:xfrm>
-            <a:off x="457200" y="5687568"/>
-            <a:ext cx="2697480" cy="841248"/>
-          </a:xfrm>
-          <a:prstGeom prst="roundRect">
-            <a:avLst>
-              <a:gd name="adj" fmla="val 10870"/>
-            </a:avLst>
-          </a:prstGeom>
-          <a:solidFill>
-            <a:schemeClr val="tx2"/>
-          </a:solidFill>
-          <a:ln w="12700">
-            <a:solidFill>
-              <a:schemeClr val="tx2"/>
-            </a:solidFill>
-            <a:prstDash val="solid"/>
-          </a:ln>
-        </p:spPr>
-      </p:sp>
-      <p:sp>
-        <p:nvSpPr>
-          <p:cNvPr id="47" name="Icono fondo Avalúos"/>
-          <p:cNvSpPr/>
-          <p:nvPr/>
-        </p:nvSpPr>
-        <p:spPr>
-          <a:xfrm>
-            <a:off x="603504" y="5815584"/>
-            <a:ext cx="420624" cy="420624"/>
-          </a:xfrm>
-          <a:prstGeom prst="ellipse">
-            <a:avLst/>
-          </a:prstGeom>
-          <a:solidFill>
-            <a:schemeClr val="accent3"/>
-          </a:solidFill>
-          <a:ln w="12700">
-            <a:solidFill>
-              <a:schemeClr val="accent3"/>
+              <a:schemeClr val="accent6"/>
             </a:solidFill>
             <a:prstDash val="solid"/>
           </a:ln>
@@ -3015,7 +2221,7 @@
       </p:sp>
       <p:pic>
         <p:nvPicPr>
-          <p:cNvPr id="48" name="Icono Avalúos" descr="preencoded.png">    </p:cNvPr>
+          <p:cNvPr id="13" name="Icono satélite" descr="preencoded.png">    </p:cNvPr>
           <p:cNvPicPr>
             <a:picLocks noChangeAspect="1"/>
           </p:cNvPicPr>
@@ -3029,8 +2235,8 @@
         </p:blipFill>
         <p:spPr>
           <a:xfrm>
-            <a:off x="713232" y="5925312"/>
-            <a:ext cx="201168" cy="201168"/>
+            <a:off x="7376831" y="5227991"/>
+            <a:ext cx="260787" cy="260787"/>
           </a:xfrm>
           <a:prstGeom prst="rect">
             <a:avLst/>
@@ -3039,50 +2245,14 @@
       </p:pic>
       <p:sp>
         <p:nvSpPr>
-          <p:cNvPr id="49" name="Text 42"/>
-          <p:cNvSpPr txBox="1"/>
-          <p:nvPr/>
-        </p:nvSpPr>
-        <p:spPr>
-          <a:xfrm>
-            <a:off x="1143000" y="5815584"/>
-            <a:ext cx="1874520" cy="420624"/>
-          </a:xfrm>
-          <a:prstGeom prst="rect">
-            <a:avLst/>
-          </a:prstGeom>
-          <a:noFill/>
-          <a:ln/>
-        </p:spPr>
-        <p:txBody>
-          <a:bodyPr wrap="square" lIns="0" tIns="0" rIns="0" bIns="0" rtlCol="0" anchor="ctr"/>
-          <a:lstStyle/>
-          <a:p>
-            <a:pPr indent="0" marL="0">
-              <a:buNone/>
-            </a:pPr>
-            <a:r>
-              <a:rPr lang="en-US" sz="1400" b="1" dirty="0">
-                <a:solidFill>
-                  <a:schemeClr val="bg1"/>
-                </a:solidFill>
-              </a:rPr>
-              <a:t>Avalúos</a:t>
-            </a:r>
-            <a:endParaRPr lang="en-US" sz="1400" dirty="0"/>
-          </a:p>
-        </p:txBody>
-      </p:sp>
-      <p:sp>
-        <p:nvSpPr>
-          <p:cNvPr id="50" name="Progreso fondo"/>
-          <p:cNvSpPr/>
-          <p:nvPr/>
-        </p:nvSpPr>
-        <p:spPr>
-          <a:xfrm>
-            <a:off x="603504" y="6281928"/>
-            <a:ext cx="1874520" cy="91440"/>
+          <p:cNvPr id="14" name="Etiqueta portada"/>
+          <p:cNvSpPr/>
+          <p:nvPr/>
+        </p:nvSpPr>
+        <p:spPr>
+          <a:xfrm>
+            <a:off x="640080" y="1600200"/>
+            <a:ext cx="2194560" cy="365760"/>
           </a:xfrm>
           <a:prstGeom prst="roundRect">
             <a:avLst>
@@ -3090,53 +2260,26 @@
             </a:avLst>
           </a:prstGeom>
           <a:solidFill>
-            <a:schemeClr val="accent3"/>
+            <a:schemeClr val="accent6"/>
           </a:solidFill>
           <a:ln w="12700">
             <a:solidFill>
-              <a:schemeClr val="accent3"/>
-            </a:solidFill>
-            <a:prstDash val="solid"/>
-          </a:ln>
-        </p:spPr>
-      </p:sp>
-      <p:sp>
-        <p:nvSpPr>
-          <p:cNvPr id="51" name="Progreso avance"/>
-          <p:cNvSpPr/>
-          <p:nvPr/>
-        </p:nvSpPr>
-        <p:spPr>
-          <a:xfrm>
-            <a:off x="603504" y="6281928"/>
-            <a:ext cx="1124712" cy="91440"/>
-          </a:xfrm>
-          <a:prstGeom prst="roundRect">
-            <a:avLst>
-              <a:gd name="adj" fmla="val 50000"/>
-            </a:avLst>
-          </a:prstGeom>
-          <a:solidFill>
-            <a:srgbClr val="F2B233"/>
-          </a:solidFill>
-          <a:ln w="12700">
-            <a:solidFill>
-              <a:srgbClr val="F2B233"/>
-            </a:solidFill>
-            <a:prstDash val="solid"/>
-          </a:ln>
-        </p:spPr>
-      </p:sp>
-      <p:sp>
-        <p:nvSpPr>
-          <p:cNvPr id="52" name="Text 45"/>
+              <a:schemeClr val="accent6"/>
+            </a:solidFill>
+            <a:prstDash val="solid"/>
+          </a:ln>
+        </p:spPr>
+      </p:sp>
+      <p:sp>
+        <p:nvSpPr>
+          <p:cNvPr id="15" name="Text 8"/>
           <p:cNvSpPr txBox="1"/>
           <p:nvPr/>
         </p:nvSpPr>
         <p:spPr>
           <a:xfrm>
-            <a:off x="2560320" y="6190488"/>
-            <a:ext cx="457200" cy="274320"/>
+            <a:off x="640080" y="1600200"/>
+            <a:ext cx="2194560" cy="365760"/>
           </a:xfrm>
           <a:prstGeom prst="rect">
             <a:avLst/>
@@ -3148,58 +2291,156 @@
           <a:bodyPr wrap="square" lIns="0" tIns="0" rIns="0" bIns="0" rtlCol="0" anchor="ctr"/>
           <a:lstStyle/>
           <a:p>
-            <a:pPr indent="0" marL="0">
-              <a:buNone/>
-            </a:pPr>
-            <a:r>
-              <a:rPr lang="en-US" sz="1300" b="1" dirty="0">
+            <a:pPr algn="ctr" indent="0" marL="0">
+              <a:buNone/>
+            </a:pPr>
+            <a:r>
+              <a:rPr lang="en-US" sz="1200" b="1" dirty="0">
+                <a:solidFill>
+                  <a:schemeClr val="tx2"/>
+                </a:solidFill>
+              </a:rPr>
+              <a:t>COMITÉ DE RIESGOS</a:t>
+            </a:r>
+            <a:endParaRPr lang="en-US" sz="1200" dirty="0"/>
+          </a:p>
+        </p:txBody>
+      </p:sp>
+      <p:sp>
+        <p:nvSpPr>
+          <p:cNvPr id="16" name="Text 0"/>
+          <p:cNvSpPr/>
+          <p:nvPr>
+            <p:ph idx="100" type="title" hasCustomPrompt="1"/>
+          </p:nvPr>
+        </p:nvSpPr>
+        <p:spPr>
+          <a:xfrm>
+            <a:off x="640080" y="2148840"/>
+            <a:ext cx="6949440" cy="1554480"/>
+          </a:xfrm>
+          <a:prstGeom prst="rect">
+            <a:avLst/>
+          </a:prstGeom>
+          <a:noFill/>
+          <a:ln/>
+        </p:spPr>
+        <p:txBody>
+          <a:bodyPr wrap="square" lIns="0" tIns="0" rIns="0" bIns="0" rtlCol="0" anchor="b"/>
+          <a:lstStyle/>
+          <a:p>
+            <a:pPr algn="l" indent="0" marL="0">
+              <a:buNone/>
+            </a:pPr>
+            <a:r>
+              <a:rPr lang="en-US" sz="4800" b="1" dirty="0">
                 <a:solidFill>
                   <a:schemeClr val="bg1"/>
                 </a:solidFill>
               </a:rPr>
-              <a:t>60%</a:t>
-            </a:r>
-            <a:endParaRPr lang="en-US" sz="1300" dirty="0"/>
-          </a:p>
-        </p:txBody>
-      </p:sp>
-      <p:sp>
-        <p:nvSpPr>
-          <p:cNvPr id="53" name="S1 Avalúos"/>
-          <p:cNvSpPr/>
-          <p:nvPr/>
-        </p:nvSpPr>
-        <p:spPr>
-          <a:xfrm>
-            <a:off x="3291840" y="5687568"/>
-            <a:ext cx="4160520" cy="841248"/>
-          </a:xfrm>
-          <a:prstGeom prst="roundRect">
-            <a:avLst>
-              <a:gd name="adj" fmla="val 10870"/>
-            </a:avLst>
-          </a:prstGeom>
-          <a:solidFill>
-            <a:schemeClr val="bg2"/>
+              <a:t>Resumen Ejecutivo de Riesgos</a:t>
+            </a:r>
+            <a:endParaRPr lang="en-US" sz="4800" dirty="0"/>
+          </a:p>
+        </p:txBody>
+      </p:sp>
+      <p:sp>
+        <p:nvSpPr>
+          <p:cNvPr id="17" name="Text 0"/>
+          <p:cNvSpPr/>
+          <p:nvPr>
+            <p:ph idx="101" type="body" hasCustomPrompt="1"/>
+          </p:nvPr>
+        </p:nvSpPr>
+        <p:spPr>
+          <a:xfrm>
+            <a:off x="640080" y="3840480"/>
+            <a:ext cx="6949440" cy="457200"/>
+          </a:xfrm>
+          <a:prstGeom prst="rect">
+            <a:avLst/>
+          </a:prstGeom>
+          <a:noFill/>
+          <a:ln/>
+        </p:spPr>
+        <p:txBody>
+          <a:bodyPr wrap="square" lIns="0" tIns="0" rIns="0" bIns="0" rtlCol="0" anchor="t"/>
+          <a:lstStyle/>
+          <a:p>
+            <a:pPr algn="l" indent="0" marL="0">
+              <a:buNone/>
+            </a:pPr>
+            <a:r>
+              <a:rPr lang="en-US" sz="2000" dirty="0">
+                <a:solidFill>
+                  <a:schemeClr val="accent5"/>
+                </a:solidFill>
+              </a:rPr>
+              <a:t>Cumplimiento regulatorio, riesgos financieros y no financieros</a:t>
+            </a:r>
+            <a:endParaRPr lang="en-US" sz="2000" dirty="0"/>
+          </a:p>
+        </p:txBody>
+      </p:sp>
+      <p:sp>
+        <p:nvSpPr>
+          <p:cNvPr id="18" name="Círculo fecha"/>
+          <p:cNvSpPr/>
+          <p:nvPr/>
+        </p:nvSpPr>
+        <p:spPr>
+          <a:xfrm>
+            <a:off x="640080" y="5074920"/>
+            <a:ext cx="457200" cy="457200"/>
+          </a:xfrm>
+          <a:prstGeom prst="ellipse">
+            <a:avLst/>
+          </a:prstGeom>
+          <a:solidFill>
+            <a:srgbClr val="15396B"/>
           </a:solidFill>
           <a:ln w="12700">
             <a:solidFill>
-              <a:schemeClr val="bg2"/>
-            </a:solidFill>
-            <a:prstDash val="solid"/>
-          </a:ln>
-        </p:spPr>
-      </p:sp>
-      <p:sp>
-        <p:nvSpPr>
-          <p:cNvPr id="54" name="Text 47"/>
+              <a:srgbClr val="15396B"/>
+            </a:solidFill>
+            <a:prstDash val="solid"/>
+          </a:ln>
+        </p:spPr>
+      </p:sp>
+      <p:pic>
+        <p:nvPicPr>
+          <p:cNvPr id="19" name="Icono fecha" descr="preencoded.png">    </p:cNvPr>
+          <p:cNvPicPr>
+            <a:picLocks noChangeAspect="1"/>
+          </p:cNvPicPr>
+          <p:nvPr/>
+        </p:nvPicPr>
+        <p:blipFill>
+          <a:blip r:embed="rId6"/>
+          <a:stretch>
+            <a:fillRect/>
+          </a:stretch>
+        </p:blipFill>
+        <p:spPr>
+          <a:xfrm>
+            <a:off x="763524" y="5198364"/>
+            <a:ext cx="210312" cy="210312"/>
+          </a:xfrm>
+          <a:prstGeom prst="rect">
+            <a:avLst/>
+          </a:prstGeom>
+        </p:spPr>
+      </p:pic>
+      <p:sp>
+        <p:nvSpPr>
+          <p:cNvPr id="20" name="Text 12"/>
           <p:cNvSpPr txBox="1"/>
           <p:nvPr/>
         </p:nvSpPr>
         <p:spPr>
           <a:xfrm>
-            <a:off x="3429000" y="5733288"/>
-            <a:ext cx="3886200" cy="749808"/>
+            <a:off x="1234440" y="5029200"/>
+            <a:ext cx="4114800" cy="548640"/>
           </a:xfrm>
           <a:prstGeom prst="rect">
             <a:avLst/>
@@ -3211,130 +2452,32 @@
           <a:bodyPr wrap="square" lIns="0" tIns="0" rIns="0" bIns="0" rtlCol="0" anchor="ctr"/>
           <a:lstStyle/>
           <a:p>
-            <a:pPr marL="152400" indent="-152400">
-              <a:lnSpc>
-                <a:spcPct val="100000"/>
-              </a:lnSpc>
-              <a:spcAft>
-                <a:spcPts val="200"/>
-              </a:spcAft>
-              <a:buSzPct val="100000"/>
-              <a:buChar char="•"/>
-            </a:pPr>
-            <a:r>
-              <a:rPr lang="en-US" sz="1100" dirty="0">
-                <a:solidFill>
-                  <a:schemeClr val="tx1"/>
-                </a:solidFill>
-              </a:rPr>
-              <a:t>Revisión de Política de Avalúos</a:t>
-            </a:r>
-            <a:endParaRPr lang="en-US" sz="1100" dirty="0"/>
-          </a:p>
-          <a:p>
-            <a:pPr marL="152400" indent="-152400">
-              <a:lnSpc>
-                <a:spcPct val="100000"/>
-              </a:lnSpc>
-              <a:spcAft>
-                <a:spcPts val="200"/>
-              </a:spcAft>
-              <a:buSzPct val="100000"/>
-              <a:buChar char="•"/>
-            </a:pPr>
-            <a:r>
-              <a:rPr lang="en-US" sz="1100" dirty="0">
-                <a:solidFill>
-                  <a:schemeClr val="tx1"/>
-                </a:solidFill>
-              </a:rPr>
-              <a:t>Revisión de Procedimientos de Administración de Avalúos</a:t>
-            </a:r>
-            <a:endParaRPr lang="en-US" sz="1100" dirty="0"/>
-          </a:p>
-          <a:p>
-            <a:pPr marL="152400" indent="-152400">
-              <a:lnSpc>
-                <a:spcPct val="100000"/>
-              </a:lnSpc>
-              <a:spcAft>
-                <a:spcPts val="200"/>
-              </a:spcAft>
-              <a:buSzPct val="100000"/>
-              <a:buChar char="•"/>
-            </a:pPr>
-            <a:r>
-              <a:rPr lang="en-US" sz="1100" dirty="0">
-                <a:solidFill>
-                  <a:schemeClr val="tx1"/>
-                </a:solidFill>
-              </a:rPr>
-              <a:t>Revisión de Perfil de Revisor</a:t>
-            </a:r>
-            <a:endParaRPr lang="en-US" sz="1100" dirty="0"/>
-          </a:p>
-        </p:txBody>
-      </p:sp>
-      <p:sp>
-        <p:nvSpPr>
-          <p:cNvPr id="55" name="S2 Avalúos"/>
-          <p:cNvSpPr/>
-          <p:nvPr/>
-        </p:nvSpPr>
-        <p:spPr>
-          <a:xfrm>
-            <a:off x="7589520" y="5687568"/>
-            <a:ext cx="4142232" cy="841248"/>
-          </a:xfrm>
-          <a:prstGeom prst="roundRect">
-            <a:avLst>
-              <a:gd name="adj" fmla="val 10870"/>
-            </a:avLst>
-          </a:prstGeom>
-          <a:solidFill>
-            <a:schemeClr val="bg2"/>
-          </a:solidFill>
-          <a:ln w="12700">
-            <a:solidFill>
-              <a:schemeClr val="bg2"/>
-            </a:solidFill>
-            <a:prstDash val="solid"/>
-          </a:ln>
-        </p:spPr>
-      </p:sp>
-      <p:sp>
-        <p:nvSpPr>
-          <p:cNvPr id="56" name="Text 49"/>
-          <p:cNvSpPr txBox="1"/>
-          <p:nvPr/>
-        </p:nvSpPr>
-        <p:spPr>
-          <a:xfrm>
-            <a:off x="7726680" y="5687568"/>
-            <a:ext cx="3867912" cy="841248"/>
-          </a:xfrm>
-          <a:prstGeom prst="rect">
-            <a:avLst/>
-          </a:prstGeom>
-          <a:noFill/>
-          <a:ln/>
-        </p:spPr>
-        <p:txBody>
-          <a:bodyPr wrap="square" lIns="0" tIns="0" rIns="0" bIns="0" rtlCol="0" anchor="ctr"/>
-          <a:lstStyle/>
-          <a:p>
-            <a:pPr indent="0" marL="0">
-              <a:buNone/>
-            </a:pPr>
-            <a:r>
-              <a:rPr lang="en-US" sz="1100" i="1" dirty="0">
-                <a:solidFill>
-                  <a:schemeClr val="accent4"/>
-                </a:solidFill>
-              </a:rPr>
-              <a:t>Sin actividades programadas</a:t>
-            </a:r>
-            <a:endParaRPr lang="en-US" sz="1100" dirty="0"/>
+            <a:pPr indent="0" marL="0">
+              <a:buNone/>
+            </a:pPr>
+            <a:r>
+              <a:rPr lang="en-US" sz="1400" b="1" dirty="0">
+                <a:solidFill>
+                  <a:schemeClr val="bg1"/>
+                </a:solidFill>
+              </a:rPr>
+              <a:t>Corte al 10 de octubre de 2026</a:t>
+            </a:r>
+            <a:endParaRPr lang="en-US" sz="1400" dirty="0"/>
+          </a:p>
+          <a:p>
+            <a:pPr indent="0" marL="0">
+              <a:buNone/>
+            </a:pPr>
+            <a:r>
+              <a:rPr lang="en-US" sz="1200" dirty="0">
+                <a:solidFill>
+                  <a:schemeClr val="accent5"/>
+                </a:solidFill>
+              </a:rPr>
+              <a:t>Gerencia de Riesgos</a:t>
+            </a:r>
+            <a:endParaRPr lang="en-US" sz="1400" dirty="0"/>
           </a:p>
         </p:txBody>
       </p:sp>
@@ -3395,7 +2538,7 @@
                   <a:schemeClr val="tx2"/>
                 </a:solidFill>
               </a:rPr>
-              <a:t>Calendario regulatorio SSF</a:t>
+              <a:t>Panorama en cifras</a:t>
             </a:r>
             <a:endParaRPr lang="en-US" sz="3000" dirty="0"/>
           </a:p>
@@ -3424,7 +2567,7 @@
           <a:bodyPr wrap="square" lIns="0" tIns="0" rIns="0" bIns="0" rtlCol="0" anchor="ctr"/>
           <a:lstStyle/>
           <a:p>
-            <a:pPr indent="0" marL="0">
+            <a:pPr algn="l" indent="0" marL="0">
               <a:buNone/>
             </a:pPr>
             <a:r>
@@ -3433,7 +2576,7 @@
                   <a:schemeClr val="accent4"/>
                 </a:solidFill>
               </a:rPr>
-              <a:t>Hitos de las circulares en curso · corte al 10/10/2026</a:t>
+              <a:t>Lo que el comité debe saber en 30 segundos</a:t>
             </a:r>
             <a:endParaRPr lang="en-US" sz="1300" dirty="0"/>
           </a:p>
@@ -3441,60 +2584,1176 @@
       </p:sp>
       <p:sp>
         <p:nvSpPr>
-          <p:cNvPr id="4" name="Línea de tiempo"/>
-          <p:cNvSpPr/>
-          <p:nvPr/>
-        </p:nvSpPr>
-        <p:spPr>
-          <a:xfrm>
-            <a:off x="548640" y="2743200"/>
-            <a:ext cx="11109960" cy="0"/>
-          </a:xfrm>
-          <a:prstGeom prst="line">
-            <a:avLst/>
-          </a:prstGeom>
-          <a:noFill/>
-          <a:ln w="38100">
-            <a:solidFill>
-              <a:srgbClr val="D7DEE9"/>
-            </a:solidFill>
-            <a:prstDash val="solid"/>
-          </a:ln>
-        </p:spPr>
-      </p:sp>
-      <p:sp>
-        <p:nvSpPr>
-          <p:cNvPr id="5" name="Hoy línea"/>
-          <p:cNvSpPr/>
-          <p:nvPr/>
-        </p:nvSpPr>
-        <p:spPr>
-          <a:xfrm>
-            <a:off x="5376672" y="1600200"/>
-            <a:ext cx="0" cy="1417320"/>
-          </a:xfrm>
-          <a:prstGeom prst="line">
-            <a:avLst/>
-          </a:prstGeom>
-          <a:noFill/>
-          <a:ln w="19050">
-            <a:solidFill>
-              <a:srgbClr val="B87300"/>
-            </a:solidFill>
-            <a:prstDash val="dash"/>
-          </a:ln>
-        </p:spPr>
-      </p:sp>
-      <p:sp>
-        <p:nvSpPr>
-          <p:cNvPr id="6" name="Hoy"/>
-          <p:cNvSpPr/>
-          <p:nvPr/>
-        </p:nvSpPr>
-        <p:spPr>
-          <a:xfrm>
-            <a:off x="4919472" y="1325880"/>
-            <a:ext cx="914400" cy="274320"/>
+          <p:cNvPr id="4" name="KPI Requerimientos SSF en curso"/>
+          <p:cNvSpPr/>
+          <p:nvPr/>
+        </p:nvSpPr>
+        <p:spPr>
+          <a:xfrm>
+            <a:off x="457200" y="1371600"/>
+            <a:ext cx="2612898" cy="1737360"/>
+          </a:xfrm>
+          <a:prstGeom prst="roundRect">
+            <a:avLst>
+              <a:gd name="adj" fmla="val 6316"/>
+            </a:avLst>
+          </a:prstGeom>
+          <a:solidFill>
+            <a:schemeClr val="bg2"/>
+          </a:solidFill>
+          <a:ln w="12700">
+            <a:solidFill>
+              <a:schemeClr val="bg2"/>
+            </a:solidFill>
+            <a:prstDash val="solid"/>
+          </a:ln>
+        </p:spPr>
+      </p:sp>
+      <p:sp>
+        <p:nvSpPr>
+          <p:cNvPr id="5" name="Círculo Requerimientos SSF en curso"/>
+          <p:cNvSpPr/>
+          <p:nvPr/>
+        </p:nvSpPr>
+        <p:spPr>
+          <a:xfrm>
+            <a:off x="2338578" y="1572768"/>
+            <a:ext cx="512064" cy="512064"/>
+          </a:xfrm>
+          <a:prstGeom prst="ellipse">
+            <a:avLst/>
+          </a:prstGeom>
+          <a:solidFill>
+            <a:schemeClr val="tx2"/>
+          </a:solidFill>
+          <a:ln w="12700">
+            <a:solidFill>
+              <a:schemeClr val="tx2"/>
+            </a:solidFill>
+            <a:prstDash val="solid"/>
+          </a:ln>
+        </p:spPr>
+      </p:sp>
+      <p:pic>
+        <p:nvPicPr>
+          <p:cNvPr id="6" name="Icono Requerimientos SSF en curso" descr="preencoded.png">    </p:cNvPr>
+          <p:cNvPicPr>
+            <a:picLocks noChangeAspect="1"/>
+          </p:cNvPicPr>
+          <p:nvPr/>
+        </p:nvPicPr>
+        <p:blipFill>
+          <a:blip r:embed="rId1"/>
+          <a:stretch>
+            <a:fillRect/>
+          </a:stretch>
+        </p:blipFill>
+        <p:spPr>
+          <a:xfrm>
+            <a:off x="2476835" y="1711025"/>
+            <a:ext cx="235549" cy="235549"/>
+          </a:xfrm>
+          <a:prstGeom prst="rect">
+            <a:avLst/>
+          </a:prstGeom>
+        </p:spPr>
+      </p:pic>
+      <p:sp>
+        <p:nvSpPr>
+          <p:cNvPr id="7" name="Text 4"/>
+          <p:cNvSpPr txBox="1"/>
+          <p:nvPr/>
+        </p:nvSpPr>
+        <p:spPr>
+          <a:xfrm>
+            <a:off x="685800" y="1508760"/>
+            <a:ext cx="1607058" cy="731520"/>
+          </a:xfrm>
+          <a:prstGeom prst="rect">
+            <a:avLst/>
+          </a:prstGeom>
+          <a:noFill/>
+          <a:ln/>
+        </p:spPr>
+        <p:txBody>
+          <a:bodyPr wrap="square" lIns="0" tIns="0" rIns="0" bIns="0" rtlCol="0" anchor="ctr"/>
+          <a:lstStyle/>
+          <a:p>
+            <a:pPr indent="0" marL="0">
+              <a:buNone/>
+            </a:pPr>
+            <a:r>
+              <a:rPr lang="en-US" sz="4400" b="1" dirty="0">
+                <a:solidFill>
+                  <a:schemeClr val="tx2"/>
+                </a:solidFill>
+              </a:rPr>
+              <a:t>4</a:t>
+            </a:r>
+            <a:pPr indent="0" marL="0">
+              <a:buNone/>
+            </a:pPr>
+            <a:endParaRPr lang="en-US" sz="4400" dirty="0"/>
+          </a:p>
+        </p:txBody>
+      </p:sp>
+      <p:sp>
+        <p:nvSpPr>
+          <p:cNvPr id="8" name="Text 5"/>
+          <p:cNvSpPr txBox="1"/>
+          <p:nvPr/>
+        </p:nvSpPr>
+        <p:spPr>
+          <a:xfrm>
+            <a:off x="685800" y="2286000"/>
+            <a:ext cx="2155698" cy="685800"/>
+          </a:xfrm>
+          <a:prstGeom prst="rect">
+            <a:avLst/>
+          </a:prstGeom>
+          <a:noFill/>
+          <a:ln/>
+        </p:spPr>
+        <p:txBody>
+          <a:bodyPr wrap="square" lIns="0" tIns="0" rIns="0" bIns="0" rtlCol="0" anchor="t"/>
+          <a:lstStyle/>
+          <a:p>
+            <a:pPr indent="0" marL="0">
+              <a:buNone/>
+            </a:pPr>
+            <a:r>
+              <a:rPr lang="en-US" sz="1400" b="1" dirty="0">
+                <a:solidFill>
+                  <a:schemeClr val="tx1"/>
+                </a:solidFill>
+              </a:rPr>
+              <a:t>Requerimientos SSF en curso</a:t>
+            </a:r>
+            <a:endParaRPr lang="en-US" sz="1400" dirty="0"/>
+          </a:p>
+          <a:p>
+            <a:pPr indent="0" marL="0">
+              <a:buNone/>
+            </a:pPr>
+            <a:r>
+              <a:rPr lang="en-US" sz="1100" dirty="0">
+                <a:solidFill>
+                  <a:schemeClr val="accent4"/>
+                </a:solidFill>
+              </a:rPr>
+              <a:t>Circulares 22737, 22741, 22742 y 23486</a:t>
+            </a:r>
+            <a:endParaRPr lang="en-US" sz="1400" dirty="0"/>
+          </a:p>
+        </p:txBody>
+      </p:sp>
+      <p:sp>
+        <p:nvSpPr>
+          <p:cNvPr id="9" name="KPI Iniciativas en seguimiento"/>
+          <p:cNvSpPr/>
+          <p:nvPr/>
+        </p:nvSpPr>
+        <p:spPr>
+          <a:xfrm>
+            <a:off x="3344418" y="1371600"/>
+            <a:ext cx="2612898" cy="1737360"/>
+          </a:xfrm>
+          <a:prstGeom prst="roundRect">
+            <a:avLst>
+              <a:gd name="adj" fmla="val 6316"/>
+            </a:avLst>
+          </a:prstGeom>
+          <a:solidFill>
+            <a:schemeClr val="bg2"/>
+          </a:solidFill>
+          <a:ln w="12700">
+            <a:solidFill>
+              <a:schemeClr val="bg2"/>
+            </a:solidFill>
+            <a:prstDash val="solid"/>
+          </a:ln>
+        </p:spPr>
+      </p:sp>
+      <p:sp>
+        <p:nvSpPr>
+          <p:cNvPr id="10" name="Círculo Iniciativas en seguimiento"/>
+          <p:cNvSpPr/>
+          <p:nvPr/>
+        </p:nvSpPr>
+        <p:spPr>
+          <a:xfrm>
+            <a:off x="5225796" y="1572768"/>
+            <a:ext cx="512064" cy="512064"/>
+          </a:xfrm>
+          <a:prstGeom prst="ellipse">
+            <a:avLst/>
+          </a:prstGeom>
+          <a:solidFill>
+            <a:schemeClr val="tx2"/>
+          </a:solidFill>
+          <a:ln w="12700">
+            <a:solidFill>
+              <a:schemeClr val="tx2"/>
+            </a:solidFill>
+            <a:prstDash val="solid"/>
+          </a:ln>
+        </p:spPr>
+      </p:sp>
+      <p:pic>
+        <p:nvPicPr>
+          <p:cNvPr id="11" name="Icono Iniciativas en seguimiento" descr="preencoded.png">    </p:cNvPr>
+          <p:cNvPicPr>
+            <a:picLocks noChangeAspect="1"/>
+          </p:cNvPicPr>
+          <p:nvPr/>
+        </p:nvPicPr>
+        <p:blipFill>
+          <a:blip r:embed="rId2"/>
+          <a:stretch>
+            <a:fillRect/>
+          </a:stretch>
+        </p:blipFill>
+        <p:spPr>
+          <a:xfrm>
+            <a:off x="5364053" y="1711025"/>
+            <a:ext cx="235549" cy="235549"/>
+          </a:xfrm>
+          <a:prstGeom prst="rect">
+            <a:avLst/>
+          </a:prstGeom>
+        </p:spPr>
+      </p:pic>
+      <p:sp>
+        <p:nvSpPr>
+          <p:cNvPr id="12" name="Text 8"/>
+          <p:cNvSpPr txBox="1"/>
+          <p:nvPr/>
+        </p:nvSpPr>
+        <p:spPr>
+          <a:xfrm>
+            <a:off x="3573018" y="1508760"/>
+            <a:ext cx="1607058" cy="731520"/>
+          </a:xfrm>
+          <a:prstGeom prst="rect">
+            <a:avLst/>
+          </a:prstGeom>
+          <a:noFill/>
+          <a:ln/>
+        </p:spPr>
+        <p:txBody>
+          <a:bodyPr wrap="square" lIns="0" tIns="0" rIns="0" bIns="0" rtlCol="0" anchor="ctr"/>
+          <a:lstStyle/>
+          <a:p>
+            <a:pPr indent="0" marL="0">
+              <a:buNone/>
+            </a:pPr>
+            <a:r>
+              <a:rPr lang="en-US" sz="4400" b="1" dirty="0">
+                <a:solidFill>
+                  <a:schemeClr val="tx2"/>
+                </a:solidFill>
+              </a:rPr>
+              <a:t>18</a:t>
+            </a:r>
+            <a:pPr indent="0" marL="0">
+              <a:buNone/>
+            </a:pPr>
+            <a:endParaRPr lang="en-US" sz="4400" dirty="0"/>
+          </a:p>
+        </p:txBody>
+      </p:sp>
+      <p:sp>
+        <p:nvSpPr>
+          <p:cNvPr id="13" name="Text 9"/>
+          <p:cNvSpPr txBox="1"/>
+          <p:nvPr/>
+        </p:nvSpPr>
+        <p:spPr>
+          <a:xfrm>
+            <a:off x="3573018" y="2286000"/>
+            <a:ext cx="2155698" cy="685800"/>
+          </a:xfrm>
+          <a:prstGeom prst="rect">
+            <a:avLst/>
+          </a:prstGeom>
+          <a:noFill/>
+          <a:ln/>
+        </p:spPr>
+        <p:txBody>
+          <a:bodyPr wrap="square" lIns="0" tIns="0" rIns="0" bIns="0" rtlCol="0" anchor="t"/>
+          <a:lstStyle/>
+          <a:p>
+            <a:pPr indent="0" marL="0">
+              <a:buNone/>
+            </a:pPr>
+            <a:r>
+              <a:rPr lang="en-US" sz="1400" b="1" dirty="0">
+                <a:solidFill>
+                  <a:schemeClr val="tx1"/>
+                </a:solidFill>
+              </a:rPr>
+              <a:t>Iniciativas en seguimiento</a:t>
+            </a:r>
+            <a:endParaRPr lang="en-US" sz="1400" dirty="0"/>
+          </a:p>
+          <a:p>
+            <a:pPr indent="0" marL="0">
+              <a:buNone/>
+            </a:pPr>
+            <a:r>
+              <a:rPr lang="en-US" sz="1100" dirty="0">
+                <a:solidFill>
+                  <a:schemeClr val="accent4"/>
+                </a:solidFill>
+              </a:rPr>
+              <a:t>11 en S1 · 7 en S2</a:t>
+            </a:r>
+            <a:endParaRPr lang="en-US" sz="1400" dirty="0"/>
+          </a:p>
+        </p:txBody>
+      </p:sp>
+      <p:sp>
+        <p:nvSpPr>
+          <p:cNvPr id="14" name="KPI Próximo vencimiento SSF"/>
+          <p:cNvSpPr/>
+          <p:nvPr/>
+        </p:nvSpPr>
+        <p:spPr>
+          <a:xfrm>
+            <a:off x="6231636" y="1371600"/>
+            <a:ext cx="2612898" cy="1737360"/>
+          </a:xfrm>
+          <a:prstGeom prst="roundRect">
+            <a:avLst>
+              <a:gd name="adj" fmla="val 6316"/>
+            </a:avLst>
+          </a:prstGeom>
+          <a:solidFill>
+            <a:schemeClr val="tx2"/>
+          </a:solidFill>
+          <a:ln w="12700">
+            <a:solidFill>
+              <a:schemeClr val="tx2"/>
+            </a:solidFill>
+            <a:prstDash val="solid"/>
+          </a:ln>
+        </p:spPr>
+      </p:sp>
+      <p:sp>
+        <p:nvSpPr>
+          <p:cNvPr id="15" name="Círculo Próximo vencimiento SSF"/>
+          <p:cNvSpPr/>
+          <p:nvPr/>
+        </p:nvSpPr>
+        <p:spPr>
+          <a:xfrm>
+            <a:off x="8113014" y="1572768"/>
+            <a:ext cx="512064" cy="512064"/>
+          </a:xfrm>
+          <a:prstGeom prst="ellipse">
+            <a:avLst/>
+          </a:prstGeom>
+          <a:solidFill>
+            <a:schemeClr val="accent6"/>
+          </a:solidFill>
+          <a:ln w="12700">
+            <a:solidFill>
+              <a:schemeClr val="accent6"/>
+            </a:solidFill>
+            <a:prstDash val="solid"/>
+          </a:ln>
+        </p:spPr>
+      </p:sp>
+      <p:pic>
+        <p:nvPicPr>
+          <p:cNvPr id="16" name="Icono Próximo vencimiento SSF" descr="preencoded.png">    </p:cNvPr>
+          <p:cNvPicPr>
+            <a:picLocks noChangeAspect="1"/>
+          </p:cNvPicPr>
+          <p:nvPr/>
+        </p:nvPicPr>
+        <p:blipFill>
+          <a:blip r:embed="rId3"/>
+          <a:stretch>
+            <a:fillRect/>
+          </a:stretch>
+        </p:blipFill>
+        <p:spPr>
+          <a:xfrm>
+            <a:off x="8251271" y="1711025"/>
+            <a:ext cx="235549" cy="235549"/>
+          </a:xfrm>
+          <a:prstGeom prst="rect">
+            <a:avLst/>
+          </a:prstGeom>
+        </p:spPr>
+      </p:pic>
+      <p:sp>
+        <p:nvSpPr>
+          <p:cNvPr id="17" name="Text 12"/>
+          <p:cNvSpPr txBox="1"/>
+          <p:nvPr/>
+        </p:nvSpPr>
+        <p:spPr>
+          <a:xfrm>
+            <a:off x="6460236" y="1508760"/>
+            <a:ext cx="1607058" cy="731520"/>
+          </a:xfrm>
+          <a:prstGeom prst="rect">
+            <a:avLst/>
+          </a:prstGeom>
+          <a:noFill/>
+          <a:ln/>
+        </p:spPr>
+        <p:txBody>
+          <a:bodyPr wrap="square" lIns="0" tIns="0" rIns="0" bIns="0" rtlCol="0" anchor="ctr"/>
+          <a:lstStyle/>
+          <a:p>
+            <a:pPr indent="0" marL="0">
+              <a:buNone/>
+            </a:pPr>
+            <a:r>
+              <a:rPr lang="en-US" sz="4400" b="1" dirty="0">
+                <a:solidFill>
+                  <a:schemeClr val="accent6"/>
+                </a:solidFill>
+              </a:rPr>
+              <a:t>6</a:t>
+            </a:r>
+            <a:pPr indent="0" marL="0">
+              <a:buNone/>
+            </a:pPr>
+            <a:r>
+              <a:rPr lang="en-US" sz="1800" b="1" dirty="0">
+                <a:solidFill>
+                  <a:schemeClr val="accent6"/>
+                </a:solidFill>
+              </a:rPr>
+              <a:t> días</a:t>
+            </a:r>
+            <a:endParaRPr lang="en-US" sz="4400" dirty="0"/>
+          </a:p>
+        </p:txBody>
+      </p:sp>
+      <p:sp>
+        <p:nvSpPr>
+          <p:cNvPr id="18" name="Text 13"/>
+          <p:cNvSpPr txBox="1"/>
+          <p:nvPr/>
+        </p:nvSpPr>
+        <p:spPr>
+          <a:xfrm>
+            <a:off x="6460236" y="2286000"/>
+            <a:ext cx="2155698" cy="685800"/>
+          </a:xfrm>
+          <a:prstGeom prst="rect">
+            <a:avLst/>
+          </a:prstGeom>
+          <a:noFill/>
+          <a:ln/>
+        </p:spPr>
+        <p:txBody>
+          <a:bodyPr wrap="square" lIns="0" tIns="0" rIns="0" bIns="0" rtlCol="0" anchor="t"/>
+          <a:lstStyle/>
+          <a:p>
+            <a:pPr indent="0" marL="0">
+              <a:buNone/>
+            </a:pPr>
+            <a:r>
+              <a:rPr lang="en-US" sz="1400" b="1" dirty="0">
+                <a:solidFill>
+                  <a:schemeClr val="bg1"/>
+                </a:solidFill>
+              </a:rPr>
+              <a:t>Próximo vencimiento SSF</a:t>
+            </a:r>
+            <a:endParaRPr lang="en-US" sz="1400" dirty="0"/>
+          </a:p>
+          <a:p>
+            <a:pPr indent="0" marL="0">
+              <a:buNone/>
+            </a:pPr>
+            <a:r>
+              <a:rPr lang="en-US" sz="1100" dirty="0">
+                <a:solidFill>
+                  <a:schemeClr val="accent5"/>
+                </a:solidFill>
+              </a:rPr>
+              <a:t>16/10 · Resultados PLD/FT</a:t>
+            </a:r>
+            <a:endParaRPr lang="en-US" sz="1400" dirty="0"/>
+          </a:p>
+        </p:txBody>
+      </p:sp>
+      <p:sp>
+        <p:nvSpPr>
+          <p:cNvPr id="19" name="KPI Avance de Avalúos"/>
+          <p:cNvSpPr/>
+          <p:nvPr/>
+        </p:nvSpPr>
+        <p:spPr>
+          <a:xfrm>
+            <a:off x="9118854" y="1371600"/>
+            <a:ext cx="2612898" cy="1737360"/>
+          </a:xfrm>
+          <a:prstGeom prst="roundRect">
+            <a:avLst>
+              <a:gd name="adj" fmla="val 6316"/>
+            </a:avLst>
+          </a:prstGeom>
+          <a:solidFill>
+            <a:schemeClr val="bg2"/>
+          </a:solidFill>
+          <a:ln w="12700">
+            <a:solidFill>
+              <a:schemeClr val="bg2"/>
+            </a:solidFill>
+            <a:prstDash val="solid"/>
+          </a:ln>
+        </p:spPr>
+      </p:sp>
+      <p:sp>
+        <p:nvSpPr>
+          <p:cNvPr id="20" name="Círculo Avance de Avalúos"/>
+          <p:cNvSpPr/>
+          <p:nvPr/>
+        </p:nvSpPr>
+        <p:spPr>
+          <a:xfrm>
+            <a:off x="11000232" y="1572768"/>
+            <a:ext cx="512064" cy="512064"/>
+          </a:xfrm>
+          <a:prstGeom prst="ellipse">
+            <a:avLst/>
+          </a:prstGeom>
+          <a:solidFill>
+            <a:schemeClr val="tx2"/>
+          </a:solidFill>
+          <a:ln w="12700">
+            <a:solidFill>
+              <a:schemeClr val="tx2"/>
+            </a:solidFill>
+            <a:prstDash val="solid"/>
+          </a:ln>
+        </p:spPr>
+      </p:sp>
+      <p:pic>
+        <p:nvPicPr>
+          <p:cNvPr id="21" name="Icono Avance de Avalúos" descr="preencoded.png">    </p:cNvPr>
+          <p:cNvPicPr>
+            <a:picLocks noChangeAspect="1"/>
+          </p:cNvPicPr>
+          <p:nvPr/>
+        </p:nvPicPr>
+        <p:blipFill>
+          <a:blip r:embed="rId4"/>
+          <a:stretch>
+            <a:fillRect/>
+          </a:stretch>
+        </p:blipFill>
+        <p:spPr>
+          <a:xfrm>
+            <a:off x="11138489" y="1711025"/>
+            <a:ext cx="235549" cy="235549"/>
+          </a:xfrm>
+          <a:prstGeom prst="rect">
+            <a:avLst/>
+          </a:prstGeom>
+        </p:spPr>
+      </p:pic>
+      <p:sp>
+        <p:nvSpPr>
+          <p:cNvPr id="22" name="Text 16"/>
+          <p:cNvSpPr txBox="1"/>
+          <p:nvPr/>
+        </p:nvSpPr>
+        <p:spPr>
+          <a:xfrm>
+            <a:off x="9347454" y="1508760"/>
+            <a:ext cx="1607058" cy="731520"/>
+          </a:xfrm>
+          <a:prstGeom prst="rect">
+            <a:avLst/>
+          </a:prstGeom>
+          <a:noFill/>
+          <a:ln/>
+        </p:spPr>
+        <p:txBody>
+          <a:bodyPr wrap="square" lIns="0" tIns="0" rIns="0" bIns="0" rtlCol="0" anchor="ctr"/>
+          <a:lstStyle/>
+          <a:p>
+            <a:pPr indent="0" marL="0">
+              <a:buNone/>
+            </a:pPr>
+            <a:r>
+              <a:rPr lang="en-US" sz="4400" b="1" dirty="0">
+                <a:solidFill>
+                  <a:schemeClr val="tx2"/>
+                </a:solidFill>
+              </a:rPr>
+              <a:t>60</a:t>
+            </a:r>
+            <a:pPr indent="0" marL="0">
+              <a:buNone/>
+            </a:pPr>
+            <a:r>
+              <a:rPr lang="en-US" sz="1800" b="1" dirty="0">
+                <a:solidFill>
+                  <a:schemeClr val="tx2"/>
+                </a:solidFill>
+              </a:rPr>
+              <a:t>%</a:t>
+            </a:r>
+            <a:endParaRPr lang="en-US" sz="4400" dirty="0"/>
+          </a:p>
+        </p:txBody>
+      </p:sp>
+      <p:sp>
+        <p:nvSpPr>
+          <p:cNvPr id="23" name="Text 17"/>
+          <p:cNvSpPr txBox="1"/>
+          <p:nvPr/>
+        </p:nvSpPr>
+        <p:spPr>
+          <a:xfrm>
+            <a:off x="9347454" y="2286000"/>
+            <a:ext cx="2155698" cy="685800"/>
+          </a:xfrm>
+          <a:prstGeom prst="rect">
+            <a:avLst/>
+          </a:prstGeom>
+          <a:noFill/>
+          <a:ln/>
+        </p:spPr>
+        <p:txBody>
+          <a:bodyPr wrap="square" lIns="0" tIns="0" rIns="0" bIns="0" rtlCol="0" anchor="t"/>
+          <a:lstStyle/>
+          <a:p>
+            <a:pPr indent="0" marL="0">
+              <a:buNone/>
+            </a:pPr>
+            <a:r>
+              <a:rPr lang="en-US" sz="1400" b="1" dirty="0">
+                <a:solidFill>
+                  <a:schemeClr val="tx1"/>
+                </a:solidFill>
+              </a:rPr>
+              <a:t>Avance de Avalúos</a:t>
+            </a:r>
+            <a:endParaRPr lang="en-US" sz="1400" dirty="0"/>
+          </a:p>
+          <a:p>
+            <a:pPr indent="0" marL="0">
+              <a:buNone/>
+            </a:pPr>
+            <a:r>
+              <a:rPr lang="en-US" sz="1100" dirty="0">
+                <a:solidFill>
+                  <a:schemeClr val="accent4"/>
+                </a:solidFill>
+              </a:rPr>
+              <a:t>Examen GIR 2026 al 50 %</a:t>
+            </a:r>
+            <a:endParaRPr lang="en-US" sz="1400" dirty="0"/>
+          </a:p>
+        </p:txBody>
+      </p:sp>
+      <p:sp>
+        <p:nvSpPr>
+          <p:cNvPr id="24" name="Text 18"/>
+          <p:cNvSpPr txBox="1"/>
+          <p:nvPr/>
+        </p:nvSpPr>
+        <p:spPr>
+          <a:xfrm>
+            <a:off x="457200" y="3429000"/>
+            <a:ext cx="5943600" cy="320040"/>
+          </a:xfrm>
+          <a:prstGeom prst="rect">
+            <a:avLst/>
+          </a:prstGeom>
+          <a:noFill/>
+          <a:ln/>
+        </p:spPr>
+        <p:txBody>
+          <a:bodyPr wrap="square" lIns="0" tIns="0" rIns="0" bIns="0" rtlCol="0" anchor="ctr"/>
+          <a:lstStyle/>
+          <a:p>
+            <a:pPr indent="0" marL="0">
+              <a:buNone/>
+            </a:pPr>
+            <a:r>
+              <a:rPr lang="en-US" sz="1600" b="1" dirty="0">
+                <a:solidFill>
+                  <a:schemeClr val="tx2"/>
+                </a:solidFill>
+              </a:rPr>
+              <a:t>Iniciativas por frente de riesgo</a:t>
+            </a:r>
+            <a:endParaRPr lang="en-US" sz="1600" dirty="0"/>
+          </a:p>
+        </p:txBody>
+      </p:sp>
+      <p:graphicFrame>
+        <p:nvGraphicFramePr>
+          <p:cNvPr id="25" name="Chart 0" descr=""/>
+          <p:cNvGraphicFramePr/>
+          <p:nvPr/>
+        </p:nvGraphicFramePr>
+        <p:xfrm>
+          <a:off x="365760" y="3794760"/>
+          <a:ext cx="6126480" cy="2697480"/>
+        </p:xfrm>
+        <a:graphic xmlns:a="http://schemas.openxmlformats.org/drawingml/2006/main">
+          <a:graphicData uri="http://schemas.openxmlformats.org/drawingml/2006/chart">
+            <c:chart xmlns:c="http://schemas.openxmlformats.org/drawingml/2006/chart" r:id="rId5"/>
+          </a:graphicData>
+        </a:graphic>
+      </p:graphicFrame>
+      <p:sp>
+        <p:nvSpPr>
+          <p:cNvPr id="26" name="Text 19"/>
+          <p:cNvSpPr txBox="1"/>
+          <p:nvPr/>
+        </p:nvSpPr>
+        <p:spPr>
+          <a:xfrm>
+            <a:off x="6949440" y="3429000"/>
+            <a:ext cx="4754880" cy="320040"/>
+          </a:xfrm>
+          <a:prstGeom prst="rect">
+            <a:avLst/>
+          </a:prstGeom>
+          <a:noFill/>
+          <a:ln/>
+        </p:spPr>
+        <p:txBody>
+          <a:bodyPr wrap="square" lIns="0" tIns="0" rIns="0" bIns="0" rtlCol="0" anchor="ctr"/>
+          <a:lstStyle/>
+          <a:p>
+            <a:pPr indent="0" marL="0">
+              <a:buNone/>
+            </a:pPr>
+            <a:r>
+              <a:rPr lang="en-US" sz="1600" b="1" dirty="0">
+                <a:solidFill>
+                  <a:schemeClr val="tx2"/>
+                </a:solidFill>
+              </a:rPr>
+              <a:t>Lectura ejecutiva</a:t>
+            </a:r>
+            <a:endParaRPr lang="en-US" sz="1600" dirty="0"/>
+          </a:p>
+        </p:txBody>
+      </p:sp>
+      <p:sp>
+        <p:nvSpPr>
+          <p:cNvPr id="27" name="Círculo Foco regulatorio"/>
+          <p:cNvSpPr/>
+          <p:nvPr/>
+        </p:nvSpPr>
+        <p:spPr>
+          <a:xfrm>
+            <a:off x="6949440" y="3931920"/>
+            <a:ext cx="512064" cy="512064"/>
+          </a:xfrm>
+          <a:prstGeom prst="ellipse">
+            <a:avLst/>
+          </a:prstGeom>
+          <a:solidFill>
+            <a:schemeClr val="accent2"/>
+          </a:solidFill>
+          <a:ln w="12700">
+            <a:solidFill>
+              <a:schemeClr val="accent2"/>
+            </a:solidFill>
+            <a:prstDash val="solid"/>
+          </a:ln>
+        </p:spPr>
+      </p:sp>
+      <p:pic>
+        <p:nvPicPr>
+          <p:cNvPr id="28" name="Icono Foco regulatorio" descr="preencoded.png">    </p:cNvPr>
+          <p:cNvPicPr>
+            <a:picLocks noChangeAspect="1"/>
+          </p:cNvPicPr>
+          <p:nvPr/>
+        </p:nvPicPr>
+        <p:blipFill>
+          <a:blip r:embed="rId6"/>
+          <a:stretch>
+            <a:fillRect/>
+          </a:stretch>
+        </p:blipFill>
+        <p:spPr>
+          <a:xfrm>
+            <a:off x="7087697" y="4070177"/>
+            <a:ext cx="235549" cy="235549"/>
+          </a:xfrm>
+          <a:prstGeom prst="rect">
+            <a:avLst/>
+          </a:prstGeom>
+        </p:spPr>
+      </p:pic>
+      <p:sp>
+        <p:nvSpPr>
+          <p:cNvPr id="29" name="Text 21"/>
+          <p:cNvSpPr txBox="1"/>
+          <p:nvPr/>
+        </p:nvSpPr>
+        <p:spPr>
+          <a:xfrm>
+            <a:off x="7635240" y="3886200"/>
+            <a:ext cx="4114800" cy="685800"/>
+          </a:xfrm>
+          <a:prstGeom prst="rect">
+            <a:avLst/>
+          </a:prstGeom>
+          <a:noFill/>
+          <a:ln/>
+        </p:spPr>
+        <p:txBody>
+          <a:bodyPr wrap="square" lIns="0" tIns="0" rIns="0" bIns="0" rtlCol="0" anchor="ctr"/>
+          <a:lstStyle/>
+          <a:p>
+            <a:pPr indent="0" marL="0">
+              <a:buNone/>
+            </a:pPr>
+            <a:r>
+              <a:rPr lang="en-US" sz="1400" b="1" dirty="0">
+                <a:solidFill>
+                  <a:schemeClr val="tx2"/>
+                </a:solidFill>
+              </a:rPr>
+              <a:t>Foco regulatorio</a:t>
+            </a:r>
+            <a:endParaRPr lang="en-US" sz="1400" dirty="0"/>
+          </a:p>
+          <a:p>
+            <a:pPr indent="0" marL="0">
+              <a:buNone/>
+            </a:pPr>
+            <a:r>
+              <a:rPr lang="en-US" sz="1200" dirty="0">
+                <a:solidFill>
+                  <a:schemeClr val="tx1"/>
+                </a:solidFill>
+              </a:rPr>
+              <a:t>4 hitos SSF entre el 16/10 y el 03/11; PLD/FT es el más urgente</a:t>
+            </a:r>
+            <a:endParaRPr lang="en-US" sz="1400" dirty="0"/>
+          </a:p>
+        </p:txBody>
+      </p:sp>
+      <p:sp>
+        <p:nvSpPr>
+          <p:cNvPr id="30" name="Círculo Carga concentrada en S1"/>
+          <p:cNvSpPr/>
+          <p:nvPr/>
+        </p:nvSpPr>
+        <p:spPr>
+          <a:xfrm>
+            <a:off x="6949440" y="4800600"/>
+            <a:ext cx="512064" cy="512064"/>
+          </a:xfrm>
+          <a:prstGeom prst="ellipse">
+            <a:avLst/>
+          </a:prstGeom>
+          <a:solidFill>
+            <a:schemeClr val="accent3"/>
+          </a:solidFill>
+          <a:ln w="12700">
+            <a:solidFill>
+              <a:schemeClr val="accent3"/>
+            </a:solidFill>
+            <a:prstDash val="solid"/>
+          </a:ln>
+        </p:spPr>
+      </p:sp>
+      <p:pic>
+        <p:nvPicPr>
+          <p:cNvPr id="31" name="Icono Carga concentrada en S1" descr="preencoded.png">    </p:cNvPr>
+          <p:cNvPicPr>
+            <a:picLocks noChangeAspect="1"/>
+          </p:cNvPicPr>
+          <p:nvPr/>
+        </p:nvPicPr>
+        <p:blipFill>
+          <a:blip r:embed="rId7"/>
+          <a:stretch>
+            <a:fillRect/>
+          </a:stretch>
+        </p:blipFill>
+        <p:spPr>
+          <a:xfrm>
+            <a:off x="7087697" y="4938857"/>
+            <a:ext cx="235549" cy="235549"/>
+          </a:xfrm>
+          <a:prstGeom prst="rect">
+            <a:avLst/>
+          </a:prstGeom>
+        </p:spPr>
+      </p:pic>
+      <p:sp>
+        <p:nvSpPr>
+          <p:cNvPr id="32" name="Text 23"/>
+          <p:cNvSpPr txBox="1"/>
+          <p:nvPr/>
+        </p:nvSpPr>
+        <p:spPr>
+          <a:xfrm>
+            <a:off x="7635240" y="4754880"/>
+            <a:ext cx="4114800" cy="685800"/>
+          </a:xfrm>
+          <a:prstGeom prst="rect">
+            <a:avLst/>
+          </a:prstGeom>
+          <a:noFill/>
+          <a:ln/>
+        </p:spPr>
+        <p:txBody>
+          <a:bodyPr wrap="square" lIns="0" tIns="0" rIns="0" bIns="0" rtlCol="0" anchor="ctr"/>
+          <a:lstStyle/>
+          <a:p>
+            <a:pPr indent="0" marL="0">
+              <a:buNone/>
+            </a:pPr>
+            <a:r>
+              <a:rPr lang="en-US" sz="1400" b="1" dirty="0">
+                <a:solidFill>
+                  <a:schemeClr val="tx2"/>
+                </a:solidFill>
+              </a:rPr>
+              <a:t>Carga concentrada en S1</a:t>
+            </a:r>
+            <a:endParaRPr lang="en-US" sz="1400" dirty="0"/>
+          </a:p>
+          <a:p>
+            <a:pPr indent="0" marL="0">
+              <a:buNone/>
+            </a:pPr>
+            <a:r>
+              <a:rPr lang="en-US" sz="1200" dirty="0">
+                <a:solidFill>
+                  <a:schemeClr val="tx1"/>
+                </a:solidFill>
+              </a:rPr>
+              <a:t>11 de 18 iniciativas, lideradas por SSF y Avalúos</a:t>
+            </a:r>
+            <a:endParaRPr lang="en-US" sz="1400" dirty="0"/>
+          </a:p>
+        </p:txBody>
+      </p:sp>
+      <p:sp>
+        <p:nvSpPr>
+          <p:cNvPr id="33" name="Círculo Avances en ejecución"/>
+          <p:cNvSpPr/>
+          <p:nvPr/>
+        </p:nvSpPr>
+        <p:spPr>
+          <a:xfrm>
+            <a:off x="6949440" y="5669280"/>
+            <a:ext cx="512064" cy="512064"/>
+          </a:xfrm>
+          <a:prstGeom prst="ellipse">
+            <a:avLst/>
+          </a:prstGeom>
+          <a:solidFill>
+            <a:schemeClr val="accent3"/>
+          </a:solidFill>
+          <a:ln w="12700">
+            <a:solidFill>
+              <a:schemeClr val="accent3"/>
+            </a:solidFill>
+            <a:prstDash val="solid"/>
+          </a:ln>
+        </p:spPr>
+      </p:sp>
+      <p:pic>
+        <p:nvPicPr>
+          <p:cNvPr id="34" name="Icono Avances en ejecución" descr="preencoded.png">    </p:cNvPr>
+          <p:cNvPicPr>
+            <a:picLocks noChangeAspect="1"/>
+          </p:cNvPicPr>
+          <p:nvPr/>
+        </p:nvPicPr>
+        <p:blipFill>
+          <a:blip r:embed="rId8"/>
+          <a:stretch>
+            <a:fillRect/>
+          </a:stretch>
+        </p:blipFill>
+        <p:spPr>
+          <a:xfrm>
+            <a:off x="7087697" y="5807537"/>
+            <a:ext cx="235549" cy="235549"/>
+          </a:xfrm>
+          <a:prstGeom prst="rect">
+            <a:avLst/>
+          </a:prstGeom>
+        </p:spPr>
+      </p:pic>
+      <p:sp>
+        <p:nvSpPr>
+          <p:cNvPr id="35" name="Text 25"/>
+          <p:cNvSpPr txBox="1"/>
+          <p:nvPr/>
+        </p:nvSpPr>
+        <p:spPr>
+          <a:xfrm>
+            <a:off x="7635240" y="5623560"/>
+            <a:ext cx="4114800" cy="685800"/>
+          </a:xfrm>
+          <a:prstGeom prst="rect">
+            <a:avLst/>
+          </a:prstGeom>
+          <a:noFill/>
+          <a:ln/>
+        </p:spPr>
+        <p:txBody>
+          <a:bodyPr wrap="square" lIns="0" tIns="0" rIns="0" bIns="0" rtlCol="0" anchor="ctr"/>
+          <a:lstStyle/>
+          <a:p>
+            <a:pPr indent="0" marL="0">
+              <a:buNone/>
+            </a:pPr>
+            <a:r>
+              <a:rPr lang="en-US" sz="1400" b="1" dirty="0">
+                <a:solidFill>
+                  <a:schemeClr val="tx2"/>
+                </a:solidFill>
+              </a:rPr>
+              <a:t>Avances en ejecución</a:t>
+            </a:r>
+            <a:endParaRPr lang="en-US" sz="1400" dirty="0"/>
+          </a:p>
+          <a:p>
+            <a:pPr indent="0" marL="0">
+              <a:buNone/>
+            </a:pPr>
+            <a:r>
+              <a:rPr lang="en-US" sz="1200" dirty="0">
+                <a:solidFill>
+                  <a:schemeClr val="tx1"/>
+                </a:solidFill>
+              </a:rPr>
+              <a:t>Avalúos al 60 % y Examen GIR 2026 al 50 %</a:t>
+            </a:r>
+            <a:endParaRPr lang="en-US" sz="1400" dirty="0"/>
+          </a:p>
+        </p:txBody>
+      </p:sp>
+    </p:spTree>
+  </p:cSld>
+  <p:clrMapOvr>
+    <a:masterClrMapping/>
+  </p:clrMapOvr>
+</p:sld>
+</file>
+
+<file path=ppt/slides/slide3.xml><?xml version="1.0" encoding="utf-8"?>
+<p:sld xmlns:a="http://schemas.openxmlformats.org/drawingml/2006/main" xmlns:r="http://schemas.openxmlformats.org/officeDocument/2006/relationships" xmlns:p="http://schemas.openxmlformats.org/presentationml/2006/main">
+  <p:cSld name="Slide 3">
+    <p:spTree>
+      <p:nvGrpSpPr>
+        <p:cNvPr id="1" name=""/>
+        <p:cNvGrpSpPr/>
+        <p:nvPr/>
+      </p:nvGrpSpPr>
+      <p:grpSpPr>
+        <a:xfrm>
+          <a:off x="0" y="0"/>
+          <a:ext cx="0" cy="0"/>
+          <a:chOff x="0" y="0"/>
+          <a:chExt cx="0" cy="0"/>
+        </a:xfrm>
+      </p:grpSpPr>
+      <p:sp>
+        <p:nvSpPr>
+          <p:cNvPr id="2" name="Text 0"/>
+          <p:cNvSpPr/>
+          <p:nvPr>
+            <p:ph idx="100" type="title" hasCustomPrompt="1"/>
+          </p:nvPr>
+        </p:nvSpPr>
+        <p:spPr>
+          <a:xfrm>
+            <a:off x="457200" y="274320"/>
+            <a:ext cx="8686800" cy="548640"/>
+          </a:xfrm>
+          <a:prstGeom prst="rect">
+            <a:avLst/>
+          </a:prstGeom>
+          <a:noFill/>
+          <a:ln/>
+        </p:spPr>
+        <p:txBody>
+          <a:bodyPr wrap="square" lIns="0" tIns="0" rIns="0" bIns="0" rtlCol="0" anchor="ctr"/>
+          <a:lstStyle/>
+          <a:p>
+            <a:pPr algn="l" indent="0" marL="0">
+              <a:buNone/>
+            </a:pPr>
+            <a:r>
+              <a:rPr lang="en-US" sz="3000" b="1" dirty="0">
+                <a:solidFill>
+                  <a:schemeClr val="tx2"/>
+                </a:solidFill>
+              </a:rPr>
+              <a:t>Resumen Ejecutivo de Riesgos</a:t>
+            </a:r>
+            <a:endParaRPr lang="en-US" sz="3000" dirty="0"/>
+          </a:p>
+        </p:txBody>
+      </p:sp>
+      <p:sp>
+        <p:nvSpPr>
+          <p:cNvPr id="3" name="Text 0"/>
+          <p:cNvSpPr/>
+          <p:nvPr>
+            <p:ph idx="101" type="body" hasCustomPrompt="1"/>
+          </p:nvPr>
+        </p:nvSpPr>
+        <p:spPr>
+          <a:xfrm>
+            <a:off x="457200" y="804672"/>
+            <a:ext cx="8686800" cy="292608"/>
+          </a:xfrm>
+          <a:prstGeom prst="rect">
+            <a:avLst/>
+          </a:prstGeom>
+          <a:noFill/>
+          <a:ln/>
+        </p:spPr>
+        <p:txBody>
+          <a:bodyPr wrap="square" lIns="0" tIns="0" rIns="0" bIns="0" rtlCol="0" anchor="ctr"/>
+          <a:lstStyle/>
+          <a:p>
+            <a:pPr algn="l" indent="0" marL="0">
+              <a:buNone/>
+            </a:pPr>
+            <a:r>
+              <a:rPr lang="en-US" sz="1300" dirty="0">
+                <a:solidFill>
+                  <a:schemeClr val="accent4"/>
+                </a:solidFill>
+              </a:rPr>
+              <a:t>Iniciativas por frente de riesgo y período · corte al 10/10/2026</a:t>
+            </a:r>
+            <a:endParaRPr lang="en-US" sz="1300" dirty="0"/>
+          </a:p>
+        </p:txBody>
+      </p:sp>
+      <p:sp>
+        <p:nvSpPr>
+          <p:cNvPr id="4" name="Etiqueta"/>
+          <p:cNvSpPr/>
+          <p:nvPr/>
+        </p:nvSpPr>
+        <p:spPr>
+          <a:xfrm>
+            <a:off x="9646920" y="384048"/>
+            <a:ext cx="2084832" cy="365760"/>
           </a:xfrm>
           <a:prstGeom prst="roundRect">
             <a:avLst>
@@ -3502,11 +3761,74 @@
             </a:avLst>
           </a:prstGeom>
           <a:solidFill>
-            <a:schemeClr val="accent2"/>
+            <a:schemeClr val="bg2"/>
           </a:solidFill>
           <a:ln w="12700">
             <a:solidFill>
-              <a:schemeClr val="accent2"/>
+              <a:schemeClr val="bg2"/>
+            </a:solidFill>
+            <a:prstDash val="solid"/>
+          </a:ln>
+        </p:spPr>
+      </p:sp>
+      <p:sp>
+        <p:nvSpPr>
+          <p:cNvPr id="5" name="Text 3"/>
+          <p:cNvSpPr txBox="1"/>
+          <p:nvPr/>
+        </p:nvSpPr>
+        <p:spPr>
+          <a:xfrm>
+            <a:off x="9646920" y="384048"/>
+            <a:ext cx="2084832" cy="365760"/>
+          </a:xfrm>
+          <a:prstGeom prst="rect">
+            <a:avLst/>
+          </a:prstGeom>
+          <a:noFill/>
+          <a:ln/>
+        </p:spPr>
+        <p:txBody>
+          <a:bodyPr wrap="square" lIns="0" tIns="0" rIns="0" bIns="0" rtlCol="0" anchor="ctr"/>
+          <a:lstStyle/>
+          <a:p>
+            <a:pPr algn="ctr" indent="0" marL="0">
+              <a:buNone/>
+            </a:pPr>
+            <a:r>
+              <a:rPr lang="en-US" sz="1200" b="1" dirty="0">
+                <a:solidFill>
+                  <a:schemeClr val="tx2"/>
+                </a:solidFill>
+              </a:rPr>
+              <a:t>Comité de Riesgos</a:t>
+            </a:r>
+            <a:endParaRPr lang="en-US" sz="1200" dirty="0"/>
+          </a:p>
+        </p:txBody>
+      </p:sp>
+      <p:sp>
+        <p:nvSpPr>
+          <p:cNvPr id="6" name="Encabezado S1"/>
+          <p:cNvSpPr/>
+          <p:nvPr/>
+        </p:nvSpPr>
+        <p:spPr>
+          <a:xfrm>
+            <a:off x="3291840" y="1188720"/>
+            <a:ext cx="4160520" cy="292608"/>
+          </a:xfrm>
+          <a:prstGeom prst="roundRect">
+            <a:avLst>
+              <a:gd name="adj" fmla="val 50000"/>
+            </a:avLst>
+          </a:prstGeom>
+          <a:solidFill>
+            <a:schemeClr val="tx2"/>
+          </a:solidFill>
+          <a:ln w="12700">
+            <a:solidFill>
+              <a:schemeClr val="tx2"/>
             </a:solidFill>
             <a:prstDash val="solid"/>
           </a:ln>
@@ -3520,9 +3842,3273 @@
         </p:nvSpPr>
         <p:spPr>
           <a:xfrm>
+            <a:off x="3291840" y="1188720"/>
+            <a:ext cx="4160520" cy="292608"/>
+          </a:xfrm>
+          <a:prstGeom prst="rect">
+            <a:avLst/>
+          </a:prstGeom>
+          <a:noFill/>
+          <a:ln/>
+        </p:spPr>
+        <p:txBody>
+          <a:bodyPr wrap="square" lIns="0" tIns="0" rIns="0" bIns="0" rtlCol="0" anchor="ctr"/>
+          <a:lstStyle/>
+          <a:p>
+            <a:pPr algn="ctr" indent="0" marL="0">
+              <a:buNone/>
+            </a:pPr>
+            <a:r>
+              <a:rPr lang="en-US" sz="1300" b="1" dirty="0">
+                <a:solidFill>
+                  <a:schemeClr val="bg1"/>
+                </a:solidFill>
+              </a:rPr>
+              <a:t>S1</a:t>
+            </a:r>
+            <a:endParaRPr lang="en-US" sz="1300" dirty="0"/>
+          </a:p>
+        </p:txBody>
+      </p:sp>
+      <p:sp>
+        <p:nvSpPr>
+          <p:cNvPr id="8" name="Encabezado S2"/>
+          <p:cNvSpPr/>
+          <p:nvPr/>
+        </p:nvSpPr>
+        <p:spPr>
+          <a:xfrm>
+            <a:off x="7589520" y="1188720"/>
+            <a:ext cx="4142232" cy="292608"/>
+          </a:xfrm>
+          <a:prstGeom prst="roundRect">
+            <a:avLst>
+              <a:gd name="adj" fmla="val 50000"/>
+            </a:avLst>
+          </a:prstGeom>
+          <a:solidFill>
+            <a:schemeClr val="tx2"/>
+          </a:solidFill>
+          <a:ln w="12700">
+            <a:solidFill>
+              <a:schemeClr val="tx2"/>
+            </a:solidFill>
+            <a:prstDash val="solid"/>
+          </a:ln>
+        </p:spPr>
+      </p:sp>
+      <p:sp>
+        <p:nvSpPr>
+          <p:cNvPr id="9" name="Text 7"/>
+          <p:cNvSpPr txBox="1"/>
+          <p:nvPr/>
+        </p:nvSpPr>
+        <p:spPr>
+          <a:xfrm>
+            <a:off x="7589520" y="1188720"/>
+            <a:ext cx="4142232" cy="292608"/>
+          </a:xfrm>
+          <a:prstGeom prst="rect">
+            <a:avLst/>
+          </a:prstGeom>
+          <a:noFill/>
+          <a:ln/>
+        </p:spPr>
+        <p:txBody>
+          <a:bodyPr wrap="square" lIns="0" tIns="0" rIns="0" bIns="0" rtlCol="0" anchor="ctr"/>
+          <a:lstStyle/>
+          <a:p>
+            <a:pPr algn="ctr" indent="0" marL="0">
+              <a:buNone/>
+            </a:pPr>
+            <a:r>
+              <a:rPr lang="en-US" sz="1300" b="1" dirty="0">
+                <a:solidFill>
+                  <a:schemeClr val="bg1"/>
+                </a:solidFill>
+              </a:rPr>
+              <a:t>S2</a:t>
+            </a:r>
+            <a:endParaRPr lang="en-US" sz="1300" dirty="0"/>
+          </a:p>
+        </p:txBody>
+      </p:sp>
+      <p:sp>
+        <p:nvSpPr>
+          <p:cNvPr id="10" name="Text 8"/>
+          <p:cNvSpPr txBox="1"/>
+          <p:nvPr/>
+        </p:nvSpPr>
+        <p:spPr>
+          <a:xfrm>
+            <a:off x="457200" y="1188720"/>
+            <a:ext cx="2697480" cy="292608"/>
+          </a:xfrm>
+          <a:prstGeom prst="rect">
+            <a:avLst/>
+          </a:prstGeom>
+          <a:noFill/>
+          <a:ln/>
+        </p:spPr>
+        <p:txBody>
+          <a:bodyPr wrap="square" lIns="0" tIns="0" rIns="0" bIns="0" rtlCol="0" anchor="ctr"/>
+          <a:lstStyle/>
+          <a:p>
+            <a:pPr indent="0" marL="0">
+              <a:buNone/>
+            </a:pPr>
+            <a:r>
+              <a:rPr lang="en-US" sz="1100" b="1" spc="150" kern="0" dirty="0">
+                <a:solidFill>
+                  <a:schemeClr val="accent4"/>
+                </a:solidFill>
+              </a:rPr>
+              <a:t>FRENTE DE RIESGO</a:t>
+            </a:r>
+            <a:endParaRPr lang="en-US" sz="1100" dirty="0"/>
+          </a:p>
+        </p:txBody>
+      </p:sp>
+      <p:sp>
+        <p:nvSpPr>
+          <p:cNvPr id="11" name="Frente Cumplimiento Regulatorio"/>
+          <p:cNvSpPr/>
+          <p:nvPr/>
+        </p:nvSpPr>
+        <p:spPr>
+          <a:xfrm>
+            <a:off x="457200" y="1591056"/>
+            <a:ext cx="2697480" cy="1554480"/>
+          </a:xfrm>
+          <a:prstGeom prst="roundRect">
+            <a:avLst>
+              <a:gd name="adj" fmla="val 5882"/>
+            </a:avLst>
+          </a:prstGeom>
+          <a:solidFill>
+            <a:schemeClr val="tx2"/>
+          </a:solidFill>
+          <a:ln w="12700">
+            <a:solidFill>
+              <a:schemeClr val="tx2"/>
+            </a:solidFill>
+            <a:prstDash val="solid"/>
+          </a:ln>
+        </p:spPr>
+      </p:sp>
+      <p:sp>
+        <p:nvSpPr>
+          <p:cNvPr id="12" name="Círculo Cumplimiento Regulatorio"/>
+          <p:cNvSpPr/>
+          <p:nvPr/>
+        </p:nvSpPr>
+        <p:spPr>
+          <a:xfrm>
+            <a:off x="603504" y="2157984"/>
+            <a:ext cx="420624" cy="420624"/>
+          </a:xfrm>
+          <a:prstGeom prst="ellipse">
+            <a:avLst/>
+          </a:prstGeom>
+          <a:solidFill>
+            <a:schemeClr val="accent3"/>
+          </a:solidFill>
+          <a:ln w="12700">
+            <a:solidFill>
+              <a:schemeClr val="accent3"/>
+            </a:solidFill>
+            <a:prstDash val="solid"/>
+          </a:ln>
+        </p:spPr>
+      </p:sp>
+      <p:pic>
+        <p:nvPicPr>
+          <p:cNvPr id="13" name="Icono Cumplimiento Regulatorio" descr="preencoded.png">    </p:cNvPr>
+          <p:cNvPicPr>
+            <a:picLocks noChangeAspect="1"/>
+          </p:cNvPicPr>
+          <p:nvPr/>
+        </p:nvPicPr>
+        <p:blipFill>
+          <a:blip r:embed="rId1"/>
+          <a:stretch>
+            <a:fillRect/>
+          </a:stretch>
+        </p:blipFill>
+        <p:spPr>
+          <a:xfrm>
+            <a:off x="717072" y="2271552"/>
+            <a:ext cx="193487" cy="193487"/>
+          </a:xfrm>
+          <a:prstGeom prst="rect">
+            <a:avLst/>
+          </a:prstGeom>
+        </p:spPr>
+      </p:pic>
+      <p:sp>
+        <p:nvSpPr>
+          <p:cNvPr id="14" name="Text 11"/>
+          <p:cNvSpPr txBox="1"/>
+          <p:nvPr/>
+        </p:nvSpPr>
+        <p:spPr>
+          <a:xfrm>
+            <a:off x="1143000" y="1591056"/>
+            <a:ext cx="1920240" cy="1554480"/>
+          </a:xfrm>
+          <a:prstGeom prst="rect">
+            <a:avLst/>
+          </a:prstGeom>
+          <a:noFill/>
+          <a:ln/>
+        </p:spPr>
+        <p:txBody>
+          <a:bodyPr wrap="square" lIns="0" tIns="0" rIns="0" bIns="0" rtlCol="0" anchor="ctr"/>
+          <a:lstStyle/>
+          <a:p>
+            <a:pPr indent="0" marL="0">
+              <a:buNone/>
+            </a:pPr>
+            <a:r>
+              <a:rPr lang="en-US" sz="1400" b="1" dirty="0">
+                <a:solidFill>
+                  <a:schemeClr val="bg1"/>
+                </a:solidFill>
+              </a:rPr>
+              <a:t>Cumplimiento Regulatorio</a:t>
+            </a:r>
+            <a:endParaRPr lang="en-US" sz="1400" dirty="0"/>
+          </a:p>
+          <a:p>
+            <a:pPr indent="0" marL="0">
+              <a:buNone/>
+            </a:pPr>
+            <a:r>
+              <a:rPr lang="en-US" sz="1100" dirty="0">
+                <a:solidFill>
+                  <a:schemeClr val="accent5"/>
+                </a:solidFill>
+              </a:rPr>
+              <a:t>Requerimientos SSF</a:t>
+            </a:r>
+            <a:endParaRPr lang="en-US" sz="1400" dirty="0"/>
+          </a:p>
+        </p:txBody>
+      </p:sp>
+      <p:sp>
+        <p:nvSpPr>
+          <p:cNvPr id="15" name="S1 Cumplimiento Regulatorio"/>
+          <p:cNvSpPr/>
+          <p:nvPr/>
+        </p:nvSpPr>
+        <p:spPr>
+          <a:xfrm>
+            <a:off x="3291840" y="1591056"/>
+            <a:ext cx="4160520" cy="1554480"/>
+          </a:xfrm>
+          <a:prstGeom prst="roundRect">
+            <a:avLst>
+              <a:gd name="adj" fmla="val 5882"/>
+            </a:avLst>
+          </a:prstGeom>
+          <a:solidFill>
+            <a:schemeClr val="bg2"/>
+          </a:solidFill>
+          <a:ln w="12700">
+            <a:solidFill>
+              <a:schemeClr val="bg2"/>
+            </a:solidFill>
+            <a:prstDash val="solid"/>
+          </a:ln>
+        </p:spPr>
+      </p:sp>
+      <p:sp>
+        <p:nvSpPr>
+          <p:cNvPr id="16" name="Círculo S1"/>
+          <p:cNvSpPr/>
+          <p:nvPr/>
+        </p:nvSpPr>
+        <p:spPr>
+          <a:xfrm>
+            <a:off x="3429000" y="1618488"/>
+            <a:ext cx="237744" cy="237744"/>
+          </a:xfrm>
+          <a:prstGeom prst="ellipse">
+            <a:avLst/>
+          </a:prstGeom>
+          <a:solidFill>
+            <a:schemeClr val="bg1"/>
+          </a:solidFill>
+          <a:ln w="12700">
+            <a:solidFill>
+              <a:schemeClr val="bg1"/>
+            </a:solidFill>
+            <a:prstDash val="solid"/>
+          </a:ln>
+        </p:spPr>
+      </p:sp>
+      <p:pic>
+        <p:nvPicPr>
+          <p:cNvPr id="17" name="Icono S1" descr="preencoded.png">    </p:cNvPr>
+          <p:cNvPicPr>
+            <a:picLocks noChangeAspect="1"/>
+          </p:cNvPicPr>
+          <p:nvPr/>
+        </p:nvPicPr>
+        <p:blipFill>
+          <a:blip r:embed="rId2"/>
+          <a:stretch>
+            <a:fillRect/>
+          </a:stretch>
+        </p:blipFill>
+        <p:spPr>
+          <a:xfrm>
+            <a:off x="3493191" y="1682679"/>
+            <a:ext cx="109362" cy="109362"/>
+          </a:xfrm>
+          <a:prstGeom prst="rect">
+            <a:avLst/>
+          </a:prstGeom>
+        </p:spPr>
+      </p:pic>
+      <p:sp>
+        <p:nvSpPr>
+          <p:cNvPr id="18" name="Text 14"/>
+          <p:cNvSpPr txBox="1"/>
+          <p:nvPr/>
+        </p:nvSpPr>
+        <p:spPr>
+          <a:xfrm>
+            <a:off x="3767328" y="1636776"/>
+            <a:ext cx="3566160" cy="365760"/>
+          </a:xfrm>
+          <a:prstGeom prst="rect">
+            <a:avLst/>
+          </a:prstGeom>
+          <a:noFill/>
+          <a:ln/>
+        </p:spPr>
+        <p:txBody>
+          <a:bodyPr wrap="square" lIns="0" tIns="0" rIns="0" bIns="0" rtlCol="0" anchor="t"/>
+          <a:lstStyle/>
+          <a:p>
+            <a:pPr indent="0" marL="0">
+              <a:lnSpc>
+                <a:spcPct val="98000"/>
+              </a:lnSpc>
+              <a:buNone/>
+            </a:pPr>
+            <a:r>
+              <a:rPr lang="en-US" sz="1100" b="1" dirty="0">
+                <a:solidFill>
+                  <a:schemeClr val="tx2"/>
+                </a:solidFill>
+              </a:rPr>
+              <a:t>Plan de Recuperación</a:t>
+            </a:r>
+            <a:pPr indent="0" marL="0">
+              <a:lnSpc>
+                <a:spcPct val="98000"/>
+              </a:lnSpc>
+              <a:buNone/>
+            </a:pPr>
+            <a:r>
+              <a:rPr lang="en-US" sz="1100" dirty="0">
+                <a:solidFill>
+                  <a:schemeClr val="accent4"/>
+                </a:solidFill>
+              </a:rPr>
+              <a:t>  ·  Circ. 22737</a:t>
+            </a:r>
+            <a:endParaRPr lang="en-US" sz="1100" dirty="0"/>
+          </a:p>
+          <a:p>
+            <a:pPr indent="0" marL="0">
+              <a:lnSpc>
+                <a:spcPct val="98000"/>
+              </a:lnSpc>
+              <a:buNone/>
+            </a:pPr>
+            <a:r>
+              <a:rPr lang="en-US" sz="1100" b="1" dirty="0">
+                <a:solidFill>
+                  <a:schemeClr val="accent2"/>
+                </a:solidFill>
+              </a:rPr>
+              <a:t>Recepción 22/09  →  Envío 03/11/2026</a:t>
+            </a:r>
+            <a:endParaRPr lang="en-US" sz="1100" dirty="0"/>
+          </a:p>
+        </p:txBody>
+      </p:sp>
+      <p:sp>
+        <p:nvSpPr>
+          <p:cNvPr id="19" name="Círculo S1"/>
+          <p:cNvSpPr/>
+          <p:nvPr/>
+        </p:nvSpPr>
+        <p:spPr>
+          <a:xfrm>
+            <a:off x="3429000" y="2075688"/>
+            <a:ext cx="237744" cy="237744"/>
+          </a:xfrm>
+          <a:prstGeom prst="ellipse">
+            <a:avLst/>
+          </a:prstGeom>
+          <a:solidFill>
+            <a:schemeClr val="bg1"/>
+          </a:solidFill>
+          <a:ln w="12700">
+            <a:solidFill>
+              <a:schemeClr val="bg1"/>
+            </a:solidFill>
+            <a:prstDash val="solid"/>
+          </a:ln>
+        </p:spPr>
+      </p:sp>
+      <p:pic>
+        <p:nvPicPr>
+          <p:cNvPr id="20" name="Icono S1" descr="preencoded.png">    </p:cNvPr>
+          <p:cNvPicPr>
+            <a:picLocks noChangeAspect="1"/>
+          </p:cNvPicPr>
+          <p:nvPr/>
+        </p:nvPicPr>
+        <p:blipFill>
+          <a:blip r:embed="rId3"/>
+          <a:stretch>
+            <a:fillRect/>
+          </a:stretch>
+        </p:blipFill>
+        <p:spPr>
+          <a:xfrm>
+            <a:off x="3493191" y="2139879"/>
+            <a:ext cx="109362" cy="109362"/>
+          </a:xfrm>
+          <a:prstGeom prst="rect">
+            <a:avLst/>
+          </a:prstGeom>
+        </p:spPr>
+      </p:pic>
+      <p:sp>
+        <p:nvSpPr>
+          <p:cNvPr id="21" name="Text 16"/>
+          <p:cNvSpPr txBox="1"/>
+          <p:nvPr/>
+        </p:nvSpPr>
+        <p:spPr>
+          <a:xfrm>
+            <a:off x="3767328" y="2093976"/>
+            <a:ext cx="3566160" cy="548640"/>
+          </a:xfrm>
+          <a:prstGeom prst="rect">
+            <a:avLst/>
+          </a:prstGeom>
+          <a:noFill/>
+          <a:ln/>
+        </p:spPr>
+        <p:txBody>
+          <a:bodyPr wrap="square" lIns="0" tIns="0" rIns="0" bIns="0" rtlCol="0" anchor="t"/>
+          <a:lstStyle/>
+          <a:p>
+            <a:pPr indent="0" marL="0">
+              <a:lnSpc>
+                <a:spcPct val="98000"/>
+              </a:lnSpc>
+              <a:buNone/>
+            </a:pPr>
+            <a:r>
+              <a:rPr lang="en-US" sz="1100" b="1" dirty="0">
+                <a:solidFill>
+                  <a:schemeClr val="tx2"/>
+                </a:solidFill>
+              </a:rPr>
+              <a:t>Visita inicial – Riesgos Específicos</a:t>
+            </a:r>
+            <a:pPr indent="0" marL="0">
+              <a:lnSpc>
+                <a:spcPct val="98000"/>
+              </a:lnSpc>
+              <a:buNone/>
+            </a:pPr>
+            <a:r>
+              <a:rPr lang="en-US" sz="1100" dirty="0">
+                <a:solidFill>
+                  <a:schemeClr val="accent4"/>
+                </a:solidFill>
+              </a:rPr>
+              <a:t>  ·  Circ. 22742</a:t>
+            </a:r>
+            <a:endParaRPr lang="en-US" sz="1100" dirty="0"/>
+          </a:p>
+          <a:p>
+            <a:pPr indent="0" marL="0">
+              <a:lnSpc>
+                <a:spcPct val="98000"/>
+              </a:lnSpc>
+              <a:buNone/>
+            </a:pPr>
+            <a:r>
+              <a:rPr lang="en-US" sz="1100" dirty="0">
+                <a:solidFill>
+                  <a:schemeClr val="tx1"/>
+                </a:solidFill>
+              </a:rPr>
+              <a:t>Crédito, Liquidez y Mercado</a:t>
+            </a:r>
+            <a:endParaRPr lang="en-US" sz="1100" dirty="0"/>
+          </a:p>
+          <a:p>
+            <a:pPr indent="0" marL="0">
+              <a:lnSpc>
+                <a:spcPct val="98000"/>
+              </a:lnSpc>
+              <a:buNone/>
+            </a:pPr>
+            <a:r>
+              <a:rPr lang="en-US" sz="1100" b="1" dirty="0">
+                <a:solidFill>
+                  <a:schemeClr val="accent2"/>
+                </a:solidFill>
+              </a:rPr>
+              <a:t>Recepción 24/09  →  Inicio 09/10/2026</a:t>
+            </a:r>
+            <a:endParaRPr lang="en-US" sz="1100" dirty="0"/>
+          </a:p>
+        </p:txBody>
+      </p:sp>
+      <p:sp>
+        <p:nvSpPr>
+          <p:cNvPr id="22" name="Círculo S1"/>
+          <p:cNvSpPr/>
+          <p:nvPr/>
+        </p:nvSpPr>
+        <p:spPr>
+          <a:xfrm>
+            <a:off x="3429000" y="2715768"/>
+            <a:ext cx="237744" cy="237744"/>
+          </a:xfrm>
+          <a:prstGeom prst="ellipse">
+            <a:avLst/>
+          </a:prstGeom>
+          <a:solidFill>
+            <a:schemeClr val="bg1"/>
+          </a:solidFill>
+          <a:ln w="12700">
+            <a:solidFill>
+              <a:schemeClr val="bg1"/>
+            </a:solidFill>
+            <a:prstDash val="solid"/>
+          </a:ln>
+        </p:spPr>
+      </p:sp>
+      <p:pic>
+        <p:nvPicPr>
+          <p:cNvPr id="23" name="Icono S1" descr="preencoded.png">    </p:cNvPr>
+          <p:cNvPicPr>
+            <a:picLocks noChangeAspect="1"/>
+          </p:cNvPicPr>
+          <p:nvPr/>
+        </p:nvPicPr>
+        <p:blipFill>
+          <a:blip r:embed="rId4"/>
+          <a:stretch>
+            <a:fillRect/>
+          </a:stretch>
+        </p:blipFill>
+        <p:spPr>
+          <a:xfrm>
+            <a:off x="3493191" y="2779959"/>
+            <a:ext cx="109362" cy="109362"/>
+          </a:xfrm>
+          <a:prstGeom prst="rect">
+            <a:avLst/>
+          </a:prstGeom>
+        </p:spPr>
+      </p:pic>
+      <p:sp>
+        <p:nvSpPr>
+          <p:cNvPr id="24" name="Text 18"/>
+          <p:cNvSpPr txBox="1"/>
+          <p:nvPr/>
+        </p:nvSpPr>
+        <p:spPr>
+          <a:xfrm>
+            <a:off x="3767328" y="2734056"/>
+            <a:ext cx="3566160" cy="365760"/>
+          </a:xfrm>
+          <a:prstGeom prst="rect">
+            <a:avLst/>
+          </a:prstGeom>
+          <a:noFill/>
+          <a:ln/>
+        </p:spPr>
+        <p:txBody>
+          <a:bodyPr wrap="square" lIns="0" tIns="0" rIns="0" bIns="0" rtlCol="0" anchor="t"/>
+          <a:lstStyle/>
+          <a:p>
+            <a:pPr indent="0" marL="0">
+              <a:lnSpc>
+                <a:spcPct val="98000"/>
+              </a:lnSpc>
+              <a:buNone/>
+            </a:pPr>
+            <a:r>
+              <a:rPr lang="en-US" sz="1100" b="1" dirty="0">
+                <a:solidFill>
+                  <a:schemeClr val="tx2"/>
+                </a:solidFill>
+              </a:rPr>
+              <a:t>Resultados preliminares – PLD/FT</a:t>
+            </a:r>
+            <a:pPr indent="0" marL="0">
+              <a:lnSpc>
+                <a:spcPct val="98000"/>
+              </a:lnSpc>
+              <a:buNone/>
+            </a:pPr>
+            <a:r>
+              <a:rPr lang="en-US" sz="1100" dirty="0">
+                <a:solidFill>
+                  <a:schemeClr val="accent4"/>
+                </a:solidFill>
+              </a:rPr>
+              <a:t>  ·  Circ. 23486</a:t>
+            </a:r>
+            <a:endParaRPr lang="en-US" sz="1100" dirty="0"/>
+          </a:p>
+          <a:p>
+            <a:pPr indent="0" marL="0">
+              <a:lnSpc>
+                <a:spcPct val="98000"/>
+              </a:lnSpc>
+              <a:buNone/>
+            </a:pPr>
+            <a:r>
+              <a:rPr lang="en-US" sz="1100" b="1" dirty="0">
+                <a:solidFill>
+                  <a:schemeClr val="accent2"/>
+                </a:solidFill>
+              </a:rPr>
+              <a:t>Recepción 02/10  →  Límite envío 16/10/2026</a:t>
+            </a:r>
+            <a:endParaRPr lang="en-US" sz="1100" dirty="0"/>
+          </a:p>
+        </p:txBody>
+      </p:sp>
+      <p:sp>
+        <p:nvSpPr>
+          <p:cNvPr id="25" name="S2 Cumplimiento Regulatorio"/>
+          <p:cNvSpPr/>
+          <p:nvPr/>
+        </p:nvSpPr>
+        <p:spPr>
+          <a:xfrm>
+            <a:off x="7589520" y="1591056"/>
+            <a:ext cx="4142232" cy="1554480"/>
+          </a:xfrm>
+          <a:prstGeom prst="roundRect">
+            <a:avLst>
+              <a:gd name="adj" fmla="val 5882"/>
+            </a:avLst>
+          </a:prstGeom>
+          <a:solidFill>
+            <a:schemeClr val="bg2"/>
+          </a:solidFill>
+          <a:ln w="12700">
+            <a:solidFill>
+              <a:schemeClr val="bg2"/>
+            </a:solidFill>
+            <a:prstDash val="solid"/>
+          </a:ln>
+        </p:spPr>
+      </p:sp>
+      <p:sp>
+        <p:nvSpPr>
+          <p:cNvPr id="26" name="Círculo S2"/>
+          <p:cNvSpPr/>
+          <p:nvPr/>
+        </p:nvSpPr>
+        <p:spPr>
+          <a:xfrm>
+            <a:off x="7726680" y="1801368"/>
+            <a:ext cx="237744" cy="237744"/>
+          </a:xfrm>
+          <a:prstGeom prst="ellipse">
+            <a:avLst/>
+          </a:prstGeom>
+          <a:solidFill>
+            <a:schemeClr val="bg1"/>
+          </a:solidFill>
+          <a:ln w="12700">
+            <a:solidFill>
+              <a:schemeClr val="bg1"/>
+            </a:solidFill>
+            <a:prstDash val="solid"/>
+          </a:ln>
+        </p:spPr>
+      </p:sp>
+      <p:pic>
+        <p:nvPicPr>
+          <p:cNvPr id="27" name="Icono S2" descr="preencoded.png">    </p:cNvPr>
+          <p:cNvPicPr>
+            <a:picLocks noChangeAspect="1"/>
+          </p:cNvPicPr>
+          <p:nvPr/>
+        </p:nvPicPr>
+        <p:blipFill>
+          <a:blip r:embed="rId5"/>
+          <a:stretch>
+            <a:fillRect/>
+          </a:stretch>
+        </p:blipFill>
+        <p:spPr>
+          <a:xfrm>
+            <a:off x="7790871" y="1865559"/>
+            <a:ext cx="109362" cy="109362"/>
+          </a:xfrm>
+          <a:prstGeom prst="rect">
+            <a:avLst/>
+          </a:prstGeom>
+        </p:spPr>
+      </p:pic>
+      <p:sp>
+        <p:nvSpPr>
+          <p:cNvPr id="28" name="Text 21"/>
+          <p:cNvSpPr txBox="1"/>
+          <p:nvPr/>
+        </p:nvSpPr>
+        <p:spPr>
+          <a:xfrm>
+            <a:off x="8065008" y="1819656"/>
+            <a:ext cx="3547872" cy="1097280"/>
+          </a:xfrm>
+          <a:prstGeom prst="rect">
+            <a:avLst/>
+          </a:prstGeom>
+          <a:noFill/>
+          <a:ln/>
+        </p:spPr>
+        <p:txBody>
+          <a:bodyPr wrap="square" lIns="0" tIns="0" rIns="0" bIns="0" rtlCol="0" anchor="t"/>
+          <a:lstStyle/>
+          <a:p>
+            <a:pPr indent="0" marL="0">
+              <a:lnSpc>
+                <a:spcPct val="98000"/>
+              </a:lnSpc>
+              <a:buNone/>
+            </a:pPr>
+            <a:r>
+              <a:rPr lang="en-US" sz="1100" b="1" dirty="0">
+                <a:solidFill>
+                  <a:schemeClr val="tx2"/>
+                </a:solidFill>
+              </a:rPr>
+              <a:t>Resultados preliminares – Gobierno Corporativo</a:t>
+            </a:r>
+            <a:endParaRPr lang="en-US" sz="1100" dirty="0"/>
+          </a:p>
+          <a:p>
+            <a:pPr indent="0" marL="0">
+              <a:lnSpc>
+                <a:spcPct val="98000"/>
+              </a:lnSpc>
+              <a:buNone/>
+            </a:pPr>
+            <a:r>
+              <a:rPr lang="en-US" sz="1100" dirty="0">
+                <a:solidFill>
+                  <a:schemeClr val="accent4"/>
+                </a:solidFill>
+              </a:rPr>
+              <a:t>Circ. 22741  ·  </a:t>
+            </a:r>
+            <a:pPr indent="0" marL="0">
+              <a:lnSpc>
+                <a:spcPct val="98000"/>
+              </a:lnSpc>
+              <a:buNone/>
+            </a:pPr>
+            <a:r>
+              <a:rPr lang="en-US" sz="1100" b="1" dirty="0">
+                <a:solidFill>
+                  <a:schemeClr val="accent2"/>
+                </a:solidFill>
+              </a:rPr>
+              <a:t>Recepción 09/10/2026</a:t>
+            </a:r>
+            <a:endParaRPr lang="en-US" sz="1100" dirty="0"/>
+          </a:p>
+          <a:p>
+            <a:pPr indent="0" marL="0">
+              <a:lnSpc>
+                <a:spcPct val="98000"/>
+              </a:lnSpc>
+              <a:buNone/>
+            </a:pPr>
+            <a:r>
+              <a:rPr lang="en-US" sz="1100" b="1" dirty="0">
+                <a:solidFill>
+                  <a:schemeClr val="accent2"/>
+                </a:solidFill>
+              </a:rPr>
+              <a:t>Límite 23/10/2026</a:t>
+            </a:r>
+            <a:pPr indent="0" marL="0">
+              <a:lnSpc>
+                <a:spcPct val="98000"/>
+              </a:lnSpc>
+              <a:buNone/>
+            </a:pPr>
+            <a:r>
+              <a:rPr lang="en-US" sz="1100" dirty="0">
+                <a:solidFill>
+                  <a:schemeClr val="tx1"/>
+                </a:solidFill>
+              </a:rPr>
+              <a:t>  ·  Nuevas observaciones</a:t>
+            </a:r>
+            <a:endParaRPr lang="en-US" sz="1100" dirty="0"/>
+          </a:p>
+          <a:p>
+            <a:pPr indent="0" marL="0">
+              <a:lnSpc>
+                <a:spcPct val="98000"/>
+              </a:lnSpc>
+              <a:buNone/>
+            </a:pPr>
+            <a:r>
+              <a:rPr lang="en-US" sz="1100" b="1" dirty="0">
+                <a:solidFill>
+                  <a:schemeClr val="accent2"/>
+                </a:solidFill>
+              </a:rPr>
+              <a:t>Límite 30/10/2026</a:t>
+            </a:r>
+            <a:pPr indent="0" marL="0">
+              <a:lnSpc>
+                <a:spcPct val="98000"/>
+              </a:lnSpc>
+              <a:buNone/>
+            </a:pPr>
+            <a:r>
+              <a:rPr lang="en-US" sz="1100" dirty="0">
+                <a:solidFill>
+                  <a:schemeClr val="tx1"/>
+                </a:solidFill>
+              </a:rPr>
+              <a:t>  ·  Seguimiento de observaciones</a:t>
+            </a:r>
+            <a:endParaRPr lang="en-US" sz="1100" dirty="0"/>
+          </a:p>
+          <a:p>
+            <a:pPr indent="0" marL="0">
+              <a:lnSpc>
+                <a:spcPct val="98000"/>
+              </a:lnSpc>
+              <a:buNone/>
+            </a:pPr>
+            <a:r>
+              <a:rPr lang="en-US" sz="1100" dirty="0">
+                <a:solidFill>
+                  <a:schemeClr val="accent4"/>
+                </a:solidFill>
+              </a:rPr>
+              <a:t>Incluye pruebas de descargo a observaciones de visitas anteriores</a:t>
+            </a:r>
+            <a:endParaRPr lang="en-US" sz="1100" dirty="0"/>
+          </a:p>
+        </p:txBody>
+      </p:sp>
+      <p:sp>
+        <p:nvSpPr>
+          <p:cNvPr id="29" name="Frente Riesgos No Financieros"/>
+          <p:cNvSpPr/>
+          <p:nvPr/>
+        </p:nvSpPr>
+        <p:spPr>
+          <a:xfrm>
+            <a:off x="457200" y="3236976"/>
+            <a:ext cx="2697480" cy="914400"/>
+          </a:xfrm>
+          <a:prstGeom prst="roundRect">
+            <a:avLst>
+              <a:gd name="adj" fmla="val 10000"/>
+            </a:avLst>
+          </a:prstGeom>
+          <a:solidFill>
+            <a:schemeClr val="tx2"/>
+          </a:solidFill>
+          <a:ln w="12700">
+            <a:solidFill>
+              <a:schemeClr val="tx2"/>
+            </a:solidFill>
+            <a:prstDash val="solid"/>
+          </a:ln>
+        </p:spPr>
+      </p:sp>
+      <p:sp>
+        <p:nvSpPr>
+          <p:cNvPr id="30" name="Círculo Riesgos No Financieros"/>
+          <p:cNvSpPr/>
+          <p:nvPr/>
+        </p:nvSpPr>
+        <p:spPr>
+          <a:xfrm>
+            <a:off x="603504" y="3483864"/>
+            <a:ext cx="420624" cy="420624"/>
+          </a:xfrm>
+          <a:prstGeom prst="ellipse">
+            <a:avLst/>
+          </a:prstGeom>
+          <a:solidFill>
+            <a:schemeClr val="accent3"/>
+          </a:solidFill>
+          <a:ln w="12700">
+            <a:solidFill>
+              <a:schemeClr val="accent3"/>
+            </a:solidFill>
+            <a:prstDash val="solid"/>
+          </a:ln>
+        </p:spPr>
+      </p:sp>
+      <p:pic>
+        <p:nvPicPr>
+          <p:cNvPr id="31" name="Icono Riesgos No Financieros" descr="preencoded.png">    </p:cNvPr>
+          <p:cNvPicPr>
+            <a:picLocks noChangeAspect="1"/>
+          </p:cNvPicPr>
+          <p:nvPr/>
+        </p:nvPicPr>
+        <p:blipFill>
+          <a:blip r:embed="rId6"/>
+          <a:stretch>
+            <a:fillRect/>
+          </a:stretch>
+        </p:blipFill>
+        <p:spPr>
+          <a:xfrm>
+            <a:off x="717072" y="3597432"/>
+            <a:ext cx="193487" cy="193487"/>
+          </a:xfrm>
+          <a:prstGeom prst="rect">
+            <a:avLst/>
+          </a:prstGeom>
+        </p:spPr>
+      </p:pic>
+      <p:sp>
+        <p:nvSpPr>
+          <p:cNvPr id="32" name="Text 24"/>
+          <p:cNvSpPr txBox="1"/>
+          <p:nvPr/>
+        </p:nvSpPr>
+        <p:spPr>
+          <a:xfrm>
+            <a:off x="1143000" y="3236976"/>
+            <a:ext cx="1920240" cy="914400"/>
+          </a:xfrm>
+          <a:prstGeom prst="rect">
+            <a:avLst/>
+          </a:prstGeom>
+          <a:noFill/>
+          <a:ln/>
+        </p:spPr>
+        <p:txBody>
+          <a:bodyPr wrap="square" lIns="0" tIns="0" rIns="0" bIns="0" rtlCol="0" anchor="ctr"/>
+          <a:lstStyle/>
+          <a:p>
+            <a:pPr indent="0" marL="0">
+              <a:buNone/>
+            </a:pPr>
+            <a:r>
+              <a:rPr lang="en-US" sz="1400" b="1" dirty="0">
+                <a:solidFill>
+                  <a:schemeClr val="bg1"/>
+                </a:solidFill>
+              </a:rPr>
+              <a:t>Riesgos No Financieros</a:t>
+            </a:r>
+            <a:endParaRPr lang="en-US" sz="1400" dirty="0"/>
+          </a:p>
+          <a:p>
+            <a:pPr indent="0" marL="0">
+              <a:buNone/>
+            </a:pPr>
+            <a:r>
+              <a:rPr lang="en-US" sz="1100" dirty="0">
+                <a:solidFill>
+                  <a:schemeClr val="accent5"/>
+                </a:solidFill>
+              </a:rPr>
+              <a:t>Riesgo Operacional</a:t>
+            </a:r>
+            <a:endParaRPr lang="en-US" sz="1400" dirty="0"/>
+          </a:p>
+        </p:txBody>
+      </p:sp>
+      <p:sp>
+        <p:nvSpPr>
+          <p:cNvPr id="33" name="S1 Riesgos No Financieros"/>
+          <p:cNvSpPr/>
+          <p:nvPr/>
+        </p:nvSpPr>
+        <p:spPr>
+          <a:xfrm>
+            <a:off x="3291840" y="3236976"/>
+            <a:ext cx="4160520" cy="914400"/>
+          </a:xfrm>
+          <a:prstGeom prst="roundRect">
+            <a:avLst>
+              <a:gd name="adj" fmla="val 10000"/>
+            </a:avLst>
+          </a:prstGeom>
+          <a:solidFill>
+            <a:schemeClr val="bg2"/>
+          </a:solidFill>
+          <a:ln w="12700">
+            <a:solidFill>
+              <a:schemeClr val="bg2"/>
+            </a:solidFill>
+            <a:prstDash val="solid"/>
+          </a:ln>
+        </p:spPr>
+      </p:sp>
+      <p:sp>
+        <p:nvSpPr>
+          <p:cNvPr id="34" name="Círculo S1"/>
+          <p:cNvSpPr/>
+          <p:nvPr/>
+        </p:nvSpPr>
+        <p:spPr>
+          <a:xfrm>
+            <a:off x="3429000" y="3465576"/>
+            <a:ext cx="237744" cy="237744"/>
+          </a:xfrm>
+          <a:prstGeom prst="ellipse">
+            <a:avLst/>
+          </a:prstGeom>
+          <a:solidFill>
+            <a:schemeClr val="bg1"/>
+          </a:solidFill>
+          <a:ln w="12700">
+            <a:solidFill>
+              <a:schemeClr val="bg1"/>
+            </a:solidFill>
+            <a:prstDash val="solid"/>
+          </a:ln>
+        </p:spPr>
+      </p:sp>
+      <p:pic>
+        <p:nvPicPr>
+          <p:cNvPr id="35" name="Icono S1" descr="preencoded.png">    </p:cNvPr>
+          <p:cNvPicPr>
+            <a:picLocks noChangeAspect="1"/>
+          </p:cNvPicPr>
+          <p:nvPr/>
+        </p:nvPicPr>
+        <p:blipFill>
+          <a:blip r:embed="rId7"/>
+          <a:stretch>
+            <a:fillRect/>
+          </a:stretch>
+        </p:blipFill>
+        <p:spPr>
+          <a:xfrm>
+            <a:off x="3493191" y="3529767"/>
+            <a:ext cx="109362" cy="109362"/>
+          </a:xfrm>
+          <a:prstGeom prst="rect">
+            <a:avLst/>
+          </a:prstGeom>
+        </p:spPr>
+      </p:pic>
+      <p:sp>
+        <p:nvSpPr>
+          <p:cNvPr id="36" name="Text 27"/>
+          <p:cNvSpPr txBox="1"/>
+          <p:nvPr/>
+        </p:nvSpPr>
+        <p:spPr>
+          <a:xfrm>
+            <a:off x="3767328" y="3483864"/>
+            <a:ext cx="3566160" cy="182880"/>
+          </a:xfrm>
+          <a:prstGeom prst="rect">
+            <a:avLst/>
+          </a:prstGeom>
+          <a:noFill/>
+          <a:ln/>
+        </p:spPr>
+        <p:txBody>
+          <a:bodyPr wrap="square" lIns="0" tIns="0" rIns="0" bIns="0" rtlCol="0" anchor="t"/>
+          <a:lstStyle/>
+          <a:p>
+            <a:pPr indent="0" marL="0">
+              <a:lnSpc>
+                <a:spcPct val="98000"/>
+              </a:lnSpc>
+              <a:buNone/>
+            </a:pPr>
+            <a:r>
+              <a:rPr lang="en-US" sz="1100" dirty="0">
+                <a:solidFill>
+                  <a:schemeClr val="tx1"/>
+                </a:solidFill>
+              </a:rPr>
+              <a:t>Capacitación y Examen GIR 2026</a:t>
+            </a:r>
+            <a:endParaRPr lang="en-US" sz="1100" dirty="0"/>
+          </a:p>
+        </p:txBody>
+      </p:sp>
+      <p:sp>
+        <p:nvSpPr>
+          <p:cNvPr id="37" name="GIR fondo"/>
+          <p:cNvSpPr/>
+          <p:nvPr/>
+        </p:nvSpPr>
+        <p:spPr>
+          <a:xfrm>
+            <a:off x="6035040" y="3529584"/>
+            <a:ext cx="868680" cy="91440"/>
+          </a:xfrm>
+          <a:prstGeom prst="roundRect">
+            <a:avLst>
+              <a:gd name="adj" fmla="val 50000"/>
+            </a:avLst>
+          </a:prstGeom>
+          <a:solidFill>
+            <a:schemeClr val="accent5"/>
+          </a:solidFill>
+          <a:ln w="12700">
+            <a:solidFill>
+              <a:schemeClr val="accent5"/>
+            </a:solidFill>
+            <a:prstDash val="solid"/>
+          </a:ln>
+        </p:spPr>
+      </p:sp>
+      <p:sp>
+        <p:nvSpPr>
+          <p:cNvPr id="38" name="GIR avance"/>
+          <p:cNvSpPr/>
+          <p:nvPr/>
+        </p:nvSpPr>
+        <p:spPr>
+          <a:xfrm>
+            <a:off x="6035040" y="3529584"/>
+            <a:ext cx="434340" cy="91440"/>
+          </a:xfrm>
+          <a:prstGeom prst="roundRect">
+            <a:avLst>
+              <a:gd name="adj" fmla="val 50000"/>
+            </a:avLst>
+          </a:prstGeom>
+          <a:solidFill>
+            <a:schemeClr val="accent2"/>
+          </a:solidFill>
+          <a:ln w="12700">
+            <a:solidFill>
+              <a:schemeClr val="accent2"/>
+            </a:solidFill>
+            <a:prstDash val="solid"/>
+          </a:ln>
+        </p:spPr>
+      </p:sp>
+      <p:sp>
+        <p:nvSpPr>
+          <p:cNvPr id="39" name="Text 30"/>
+          <p:cNvSpPr txBox="1"/>
+          <p:nvPr/>
+        </p:nvSpPr>
+        <p:spPr>
+          <a:xfrm>
+            <a:off x="6949440" y="3438144"/>
+            <a:ext cx="411480" cy="274320"/>
+          </a:xfrm>
+          <a:prstGeom prst="rect">
+            <a:avLst/>
+          </a:prstGeom>
+          <a:noFill/>
+          <a:ln/>
+        </p:spPr>
+        <p:txBody>
+          <a:bodyPr wrap="square" lIns="0" tIns="0" rIns="0" bIns="0" rtlCol="0" anchor="ctr"/>
+          <a:lstStyle/>
+          <a:p>
+            <a:pPr indent="0" marL="0">
+              <a:buNone/>
+            </a:pPr>
+            <a:r>
+              <a:rPr lang="en-US" sz="1100" b="1" dirty="0">
+                <a:solidFill>
+                  <a:schemeClr val="accent2"/>
+                </a:solidFill>
+              </a:rPr>
+              <a:t>50%</a:t>
+            </a:r>
+            <a:endParaRPr lang="en-US" sz="1100" dirty="0"/>
+          </a:p>
+        </p:txBody>
+      </p:sp>
+      <p:sp>
+        <p:nvSpPr>
+          <p:cNvPr id="40" name="Círculo S1"/>
+          <p:cNvSpPr/>
+          <p:nvPr/>
+        </p:nvSpPr>
+        <p:spPr>
+          <a:xfrm>
+            <a:off x="3429000" y="3703320"/>
+            <a:ext cx="237744" cy="237744"/>
+          </a:xfrm>
+          <a:prstGeom prst="ellipse">
+            <a:avLst/>
+          </a:prstGeom>
+          <a:solidFill>
+            <a:schemeClr val="bg1"/>
+          </a:solidFill>
+          <a:ln w="12700">
+            <a:solidFill>
+              <a:schemeClr val="bg1"/>
+            </a:solidFill>
+            <a:prstDash val="solid"/>
+          </a:ln>
+        </p:spPr>
+      </p:sp>
+      <p:pic>
+        <p:nvPicPr>
+          <p:cNvPr id="41" name="Icono S1" descr="preencoded.png">    </p:cNvPr>
+          <p:cNvPicPr>
+            <a:picLocks noChangeAspect="1"/>
+          </p:cNvPicPr>
+          <p:nvPr/>
+        </p:nvPicPr>
+        <p:blipFill>
+          <a:blip r:embed="rId8"/>
+          <a:stretch>
+            <a:fillRect/>
+          </a:stretch>
+        </p:blipFill>
+        <p:spPr>
+          <a:xfrm>
+            <a:off x="3493191" y="3767511"/>
+            <a:ext cx="109362" cy="109362"/>
+          </a:xfrm>
+          <a:prstGeom prst="rect">
+            <a:avLst/>
+          </a:prstGeom>
+        </p:spPr>
+      </p:pic>
+      <p:sp>
+        <p:nvSpPr>
+          <p:cNvPr id="42" name="Text 32"/>
+          <p:cNvSpPr txBox="1"/>
+          <p:nvPr/>
+        </p:nvSpPr>
+        <p:spPr>
+          <a:xfrm>
+            <a:off x="3767328" y="3721608"/>
+            <a:ext cx="3566160" cy="182880"/>
+          </a:xfrm>
+          <a:prstGeom prst="rect">
+            <a:avLst/>
+          </a:prstGeom>
+          <a:noFill/>
+          <a:ln/>
+        </p:spPr>
+        <p:txBody>
+          <a:bodyPr wrap="square" lIns="0" tIns="0" rIns="0" bIns="0" rtlCol="0" anchor="t"/>
+          <a:lstStyle/>
+          <a:p>
+            <a:pPr indent="0" marL="0">
+              <a:lnSpc>
+                <a:spcPct val="98000"/>
+              </a:lnSpc>
+              <a:buNone/>
+            </a:pPr>
+            <a:r>
+              <a:rPr lang="en-US" sz="1100" dirty="0">
+                <a:solidFill>
+                  <a:schemeClr val="tx1"/>
+                </a:solidFill>
+              </a:rPr>
+              <a:t>Opinión Fábrica de Créditos</a:t>
+            </a:r>
+            <a:endParaRPr lang="en-US" sz="1100" dirty="0"/>
+          </a:p>
+        </p:txBody>
+      </p:sp>
+      <p:sp>
+        <p:nvSpPr>
+          <p:cNvPr id="43" name="S2 Riesgos No Financieros"/>
+          <p:cNvSpPr/>
+          <p:nvPr/>
+        </p:nvSpPr>
+        <p:spPr>
+          <a:xfrm>
+            <a:off x="7589520" y="3236976"/>
+            <a:ext cx="4142232" cy="914400"/>
+          </a:xfrm>
+          <a:prstGeom prst="roundRect">
+            <a:avLst>
+              <a:gd name="adj" fmla="val 10000"/>
+            </a:avLst>
+          </a:prstGeom>
+          <a:solidFill>
+            <a:schemeClr val="bg2"/>
+          </a:solidFill>
+          <a:ln w="12700">
+            <a:solidFill>
+              <a:schemeClr val="bg2"/>
+            </a:solidFill>
+            <a:prstDash val="solid"/>
+          </a:ln>
+        </p:spPr>
+      </p:sp>
+      <p:sp>
+        <p:nvSpPr>
+          <p:cNvPr id="44" name="Círculo S2"/>
+          <p:cNvSpPr/>
+          <p:nvPr/>
+        </p:nvSpPr>
+        <p:spPr>
+          <a:xfrm>
+            <a:off x="7726680" y="3255264"/>
+            <a:ext cx="237744" cy="237744"/>
+          </a:xfrm>
+          <a:prstGeom prst="ellipse">
+            <a:avLst/>
+          </a:prstGeom>
+          <a:solidFill>
+            <a:schemeClr val="bg1"/>
+          </a:solidFill>
+          <a:ln w="12700">
+            <a:solidFill>
+              <a:schemeClr val="bg1"/>
+            </a:solidFill>
+            <a:prstDash val="solid"/>
+          </a:ln>
+        </p:spPr>
+      </p:sp>
+      <p:pic>
+        <p:nvPicPr>
+          <p:cNvPr id="45" name="Icono S2" descr="preencoded.png">    </p:cNvPr>
+          <p:cNvPicPr>
+            <a:picLocks noChangeAspect="1"/>
+          </p:cNvPicPr>
+          <p:nvPr/>
+        </p:nvPicPr>
+        <p:blipFill>
+          <a:blip r:embed="rId9"/>
+          <a:stretch>
+            <a:fillRect/>
+          </a:stretch>
+        </p:blipFill>
+        <p:spPr>
+          <a:xfrm>
+            <a:off x="7790871" y="3319455"/>
+            <a:ext cx="109362" cy="109362"/>
+          </a:xfrm>
+          <a:prstGeom prst="rect">
+            <a:avLst/>
+          </a:prstGeom>
+        </p:spPr>
+      </p:pic>
+      <p:sp>
+        <p:nvSpPr>
+          <p:cNvPr id="46" name="Text 35"/>
+          <p:cNvSpPr txBox="1"/>
+          <p:nvPr/>
+        </p:nvSpPr>
+        <p:spPr>
+          <a:xfrm>
+            <a:off x="8065008" y="3273552"/>
+            <a:ext cx="3547872" cy="182880"/>
+          </a:xfrm>
+          <a:prstGeom prst="rect">
+            <a:avLst/>
+          </a:prstGeom>
+          <a:noFill/>
+          <a:ln/>
+        </p:spPr>
+        <p:txBody>
+          <a:bodyPr wrap="square" lIns="0" tIns="0" rIns="0" bIns="0" rtlCol="0" anchor="t"/>
+          <a:lstStyle/>
+          <a:p>
+            <a:pPr indent="0" marL="0">
+              <a:lnSpc>
+                <a:spcPct val="98000"/>
+              </a:lnSpc>
+              <a:buNone/>
+            </a:pPr>
+            <a:r>
+              <a:rPr lang="en-US" sz="1100" dirty="0">
+                <a:solidFill>
+                  <a:schemeClr val="tx1"/>
+                </a:solidFill>
+              </a:rPr>
+              <a:t>Actualización Matriz BIA</a:t>
+            </a:r>
+            <a:endParaRPr lang="en-US" sz="1100" dirty="0"/>
+          </a:p>
+        </p:txBody>
+      </p:sp>
+      <p:sp>
+        <p:nvSpPr>
+          <p:cNvPr id="47" name="Círculo S2"/>
+          <p:cNvSpPr/>
+          <p:nvPr/>
+        </p:nvSpPr>
+        <p:spPr>
+          <a:xfrm>
+            <a:off x="7726680" y="3493008"/>
+            <a:ext cx="237744" cy="237744"/>
+          </a:xfrm>
+          <a:prstGeom prst="ellipse">
+            <a:avLst/>
+          </a:prstGeom>
+          <a:solidFill>
+            <a:schemeClr val="bg1"/>
+          </a:solidFill>
+          <a:ln w="12700">
+            <a:solidFill>
+              <a:schemeClr val="bg1"/>
+            </a:solidFill>
+            <a:prstDash val="solid"/>
+          </a:ln>
+        </p:spPr>
+      </p:sp>
+      <p:pic>
+        <p:nvPicPr>
+          <p:cNvPr id="48" name="Icono S2" descr="preencoded.png">    </p:cNvPr>
+          <p:cNvPicPr>
+            <a:picLocks noChangeAspect="1"/>
+          </p:cNvPicPr>
+          <p:nvPr/>
+        </p:nvPicPr>
+        <p:blipFill>
+          <a:blip r:embed="rId10"/>
+          <a:stretch>
+            <a:fillRect/>
+          </a:stretch>
+        </p:blipFill>
+        <p:spPr>
+          <a:xfrm>
+            <a:off x="7790871" y="3557199"/>
+            <a:ext cx="109362" cy="109362"/>
+          </a:xfrm>
+          <a:prstGeom prst="rect">
+            <a:avLst/>
+          </a:prstGeom>
+        </p:spPr>
+      </p:pic>
+      <p:sp>
+        <p:nvSpPr>
+          <p:cNvPr id="49" name="Text 37"/>
+          <p:cNvSpPr txBox="1"/>
+          <p:nvPr/>
+        </p:nvSpPr>
+        <p:spPr>
+          <a:xfrm>
+            <a:off x="8065008" y="3511296"/>
+            <a:ext cx="3547872" cy="182880"/>
+          </a:xfrm>
+          <a:prstGeom prst="rect">
+            <a:avLst/>
+          </a:prstGeom>
+          <a:noFill/>
+          <a:ln/>
+        </p:spPr>
+        <p:txBody>
+          <a:bodyPr wrap="square" lIns="0" tIns="0" rIns="0" bIns="0" rtlCol="0" anchor="t"/>
+          <a:lstStyle/>
+          <a:p>
+            <a:pPr indent="0" marL="0">
+              <a:lnSpc>
+                <a:spcPct val="98000"/>
+              </a:lnSpc>
+              <a:buNone/>
+            </a:pPr>
+            <a:r>
+              <a:rPr lang="en-US" sz="1100" dirty="0">
+                <a:solidFill>
+                  <a:schemeClr val="tx1"/>
+                </a:solidFill>
+              </a:rPr>
+              <a:t>Segunda prueba de continuidad</a:t>
+            </a:r>
+            <a:endParaRPr lang="en-US" sz="1100" dirty="0"/>
+          </a:p>
+        </p:txBody>
+      </p:sp>
+      <p:sp>
+        <p:nvSpPr>
+          <p:cNvPr id="50" name="Círculo S2"/>
+          <p:cNvSpPr/>
+          <p:nvPr/>
+        </p:nvSpPr>
+        <p:spPr>
+          <a:xfrm>
+            <a:off x="7726680" y="3730752"/>
+            <a:ext cx="237744" cy="237744"/>
+          </a:xfrm>
+          <a:prstGeom prst="ellipse">
+            <a:avLst/>
+          </a:prstGeom>
+          <a:solidFill>
+            <a:schemeClr val="bg1"/>
+          </a:solidFill>
+          <a:ln w="12700">
+            <a:solidFill>
+              <a:schemeClr val="bg1"/>
+            </a:solidFill>
+            <a:prstDash val="solid"/>
+          </a:ln>
+        </p:spPr>
+      </p:sp>
+      <p:pic>
+        <p:nvPicPr>
+          <p:cNvPr id="51" name="Icono S2" descr="preencoded.png">    </p:cNvPr>
+          <p:cNvPicPr>
+            <a:picLocks noChangeAspect="1"/>
+          </p:cNvPicPr>
+          <p:nvPr/>
+        </p:nvPicPr>
+        <p:blipFill>
+          <a:blip r:embed="rId11"/>
+          <a:stretch>
+            <a:fillRect/>
+          </a:stretch>
+        </p:blipFill>
+        <p:spPr>
+          <a:xfrm>
+            <a:off x="7790871" y="3794943"/>
+            <a:ext cx="109362" cy="109362"/>
+          </a:xfrm>
+          <a:prstGeom prst="rect">
+            <a:avLst/>
+          </a:prstGeom>
+        </p:spPr>
+      </p:pic>
+      <p:sp>
+        <p:nvSpPr>
+          <p:cNvPr id="52" name="Text 39"/>
+          <p:cNvSpPr txBox="1"/>
+          <p:nvPr/>
+        </p:nvSpPr>
+        <p:spPr>
+          <a:xfrm>
+            <a:off x="8065008" y="3749040"/>
+            <a:ext cx="3547872" cy="365760"/>
+          </a:xfrm>
+          <a:prstGeom prst="rect">
+            <a:avLst/>
+          </a:prstGeom>
+          <a:noFill/>
+          <a:ln/>
+        </p:spPr>
+        <p:txBody>
+          <a:bodyPr wrap="square" lIns="0" tIns="0" rIns="0" bIns="0" rtlCol="0" anchor="t"/>
+          <a:lstStyle/>
+          <a:p>
+            <a:pPr indent="0" marL="0">
+              <a:lnSpc>
+                <a:spcPct val="98000"/>
+              </a:lnSpc>
+              <a:buNone/>
+            </a:pPr>
+            <a:r>
+              <a:rPr lang="en-US" sz="1100" dirty="0">
+                <a:solidFill>
+                  <a:schemeClr val="tx1"/>
+                </a:solidFill>
+              </a:rPr>
+              <a:t>Indicadores de Gobierno Corporativo y Reputacional (Plan de Recuperación)</a:t>
+            </a:r>
+            <a:endParaRPr lang="en-US" sz="1100" dirty="0"/>
+          </a:p>
+        </p:txBody>
+      </p:sp>
+      <p:sp>
+        <p:nvSpPr>
+          <p:cNvPr id="53" name="Frente Cumplimiento Normativo"/>
+          <p:cNvSpPr/>
+          <p:nvPr/>
+        </p:nvSpPr>
+        <p:spPr>
+          <a:xfrm>
+            <a:off x="457200" y="4242816"/>
+            <a:ext cx="2697480" cy="658368"/>
+          </a:xfrm>
+          <a:prstGeom prst="roundRect">
+            <a:avLst>
+              <a:gd name="adj" fmla="val 13889"/>
+            </a:avLst>
+          </a:prstGeom>
+          <a:solidFill>
+            <a:schemeClr val="tx2"/>
+          </a:solidFill>
+          <a:ln w="12700">
+            <a:solidFill>
+              <a:schemeClr val="tx2"/>
+            </a:solidFill>
+            <a:prstDash val="solid"/>
+          </a:ln>
+        </p:spPr>
+      </p:sp>
+      <p:sp>
+        <p:nvSpPr>
+          <p:cNvPr id="54" name="Círculo Cumplimiento Normativo"/>
+          <p:cNvSpPr/>
+          <p:nvPr/>
+        </p:nvSpPr>
+        <p:spPr>
+          <a:xfrm>
+            <a:off x="603504" y="4361688"/>
+            <a:ext cx="420624" cy="420624"/>
+          </a:xfrm>
+          <a:prstGeom prst="ellipse">
+            <a:avLst/>
+          </a:prstGeom>
+          <a:solidFill>
+            <a:schemeClr val="accent3"/>
+          </a:solidFill>
+          <a:ln w="12700">
+            <a:solidFill>
+              <a:schemeClr val="accent3"/>
+            </a:solidFill>
+            <a:prstDash val="solid"/>
+          </a:ln>
+        </p:spPr>
+      </p:sp>
+      <p:pic>
+        <p:nvPicPr>
+          <p:cNvPr id="55" name="Icono Cumplimiento Normativo" descr="preencoded.png">    </p:cNvPr>
+          <p:cNvPicPr>
+            <a:picLocks noChangeAspect="1"/>
+          </p:cNvPicPr>
+          <p:nvPr/>
+        </p:nvPicPr>
+        <p:blipFill>
+          <a:blip r:embed="rId12"/>
+          <a:stretch>
+            <a:fillRect/>
+          </a:stretch>
+        </p:blipFill>
+        <p:spPr>
+          <a:xfrm>
+            <a:off x="717072" y="4475256"/>
+            <a:ext cx="193487" cy="193487"/>
+          </a:xfrm>
+          <a:prstGeom prst="rect">
+            <a:avLst/>
+          </a:prstGeom>
+        </p:spPr>
+      </p:pic>
+      <p:sp>
+        <p:nvSpPr>
+          <p:cNvPr id="56" name="Text 42"/>
+          <p:cNvSpPr txBox="1"/>
+          <p:nvPr/>
+        </p:nvSpPr>
+        <p:spPr>
+          <a:xfrm>
+            <a:off x="1143000" y="4242816"/>
+            <a:ext cx="1920240" cy="658368"/>
+          </a:xfrm>
+          <a:prstGeom prst="rect">
+            <a:avLst/>
+          </a:prstGeom>
+          <a:noFill/>
+          <a:ln/>
+        </p:spPr>
+        <p:txBody>
+          <a:bodyPr wrap="square" lIns="0" tIns="0" rIns="0" bIns="0" rtlCol="0" anchor="ctr"/>
+          <a:lstStyle/>
+          <a:p>
+            <a:pPr indent="0" marL="0">
+              <a:buNone/>
+            </a:pPr>
+            <a:r>
+              <a:rPr lang="en-US" sz="1400" b="1" dirty="0">
+                <a:solidFill>
+                  <a:schemeClr val="bg1"/>
+                </a:solidFill>
+              </a:rPr>
+              <a:t>Cumplimiento Normativo</a:t>
+            </a:r>
+            <a:endParaRPr lang="en-US" sz="1400" dirty="0"/>
+          </a:p>
+          <a:p>
+            <a:pPr indent="0" marL="0">
+              <a:buNone/>
+            </a:pPr>
+            <a:r>
+              <a:rPr lang="en-US" sz="1100" dirty="0">
+                <a:solidFill>
+                  <a:schemeClr val="accent5"/>
+                </a:solidFill>
+              </a:rPr>
+              <a:t>Envíos y auditorías</a:t>
+            </a:r>
+            <a:endParaRPr lang="en-US" sz="1400" dirty="0"/>
+          </a:p>
+        </p:txBody>
+      </p:sp>
+      <p:sp>
+        <p:nvSpPr>
+          <p:cNvPr id="57" name="S1 Cumplimiento Normativo"/>
+          <p:cNvSpPr/>
+          <p:nvPr/>
+        </p:nvSpPr>
+        <p:spPr>
+          <a:xfrm>
+            <a:off x="3291840" y="4242816"/>
+            <a:ext cx="4160520" cy="658368"/>
+          </a:xfrm>
+          <a:prstGeom prst="roundRect">
+            <a:avLst>
+              <a:gd name="adj" fmla="val 13889"/>
+            </a:avLst>
+          </a:prstGeom>
+          <a:solidFill>
+            <a:schemeClr val="bg2"/>
+          </a:solidFill>
+          <a:ln w="12700">
+            <a:solidFill>
+              <a:schemeClr val="bg2"/>
+            </a:solidFill>
+            <a:prstDash val="solid"/>
+          </a:ln>
+        </p:spPr>
+      </p:sp>
+      <p:sp>
+        <p:nvSpPr>
+          <p:cNvPr id="58" name="Círculo S1"/>
+          <p:cNvSpPr/>
+          <p:nvPr/>
+        </p:nvSpPr>
+        <p:spPr>
+          <a:xfrm>
+            <a:off x="3429000" y="4462272"/>
+            <a:ext cx="237744" cy="237744"/>
+          </a:xfrm>
+          <a:prstGeom prst="ellipse">
+            <a:avLst/>
+          </a:prstGeom>
+          <a:solidFill>
+            <a:schemeClr val="bg1"/>
+          </a:solidFill>
+          <a:ln w="12700">
+            <a:solidFill>
+              <a:schemeClr val="bg1"/>
+            </a:solidFill>
+            <a:prstDash val="solid"/>
+          </a:ln>
+        </p:spPr>
+      </p:sp>
+      <p:pic>
+        <p:nvPicPr>
+          <p:cNvPr id="59" name="Icono S1" descr="preencoded.png">    </p:cNvPr>
+          <p:cNvPicPr>
+            <a:picLocks noChangeAspect="1"/>
+          </p:cNvPicPr>
+          <p:nvPr/>
+        </p:nvPicPr>
+        <p:blipFill>
+          <a:blip r:embed="rId13"/>
+          <a:stretch>
+            <a:fillRect/>
+          </a:stretch>
+        </p:blipFill>
+        <p:spPr>
+          <a:xfrm>
+            <a:off x="3493191" y="4526463"/>
+            <a:ext cx="109362" cy="109362"/>
+          </a:xfrm>
+          <a:prstGeom prst="rect">
+            <a:avLst/>
+          </a:prstGeom>
+        </p:spPr>
+      </p:pic>
+      <p:sp>
+        <p:nvSpPr>
+          <p:cNvPr id="60" name="Text 45"/>
+          <p:cNvSpPr txBox="1"/>
+          <p:nvPr/>
+        </p:nvSpPr>
+        <p:spPr>
+          <a:xfrm>
+            <a:off x="3767328" y="4480560"/>
+            <a:ext cx="3566160" cy="182880"/>
+          </a:xfrm>
+          <a:prstGeom prst="rect">
+            <a:avLst/>
+          </a:prstGeom>
+          <a:noFill/>
+          <a:ln/>
+        </p:spPr>
+        <p:txBody>
+          <a:bodyPr wrap="square" lIns="0" tIns="0" rIns="0" bIns="0" rtlCol="0" anchor="t"/>
+          <a:lstStyle/>
+          <a:p>
+            <a:pPr indent="0" marL="0">
+              <a:lnSpc>
+                <a:spcPct val="98000"/>
+              </a:lnSpc>
+              <a:buNone/>
+            </a:pPr>
+            <a:r>
+              <a:rPr lang="en-US" sz="1100" dirty="0">
+                <a:solidFill>
+                  <a:schemeClr val="tx1"/>
+                </a:solidFill>
+              </a:rPr>
+              <a:t>Envíos regulatorios (DAR)</a:t>
+            </a:r>
+            <a:endParaRPr lang="en-US" sz="1100" dirty="0"/>
+          </a:p>
+        </p:txBody>
+      </p:sp>
+      <p:sp>
+        <p:nvSpPr>
+          <p:cNvPr id="61" name="S2 Cumplimiento Normativo"/>
+          <p:cNvSpPr/>
+          <p:nvPr/>
+        </p:nvSpPr>
+        <p:spPr>
+          <a:xfrm>
+            <a:off x="7589520" y="4242816"/>
+            <a:ext cx="4142232" cy="658368"/>
+          </a:xfrm>
+          <a:prstGeom prst="roundRect">
+            <a:avLst>
+              <a:gd name="adj" fmla="val 13889"/>
+            </a:avLst>
+          </a:prstGeom>
+          <a:solidFill>
+            <a:schemeClr val="bg2"/>
+          </a:solidFill>
+          <a:ln w="12700">
+            <a:solidFill>
+              <a:schemeClr val="bg2"/>
+            </a:solidFill>
+            <a:prstDash val="solid"/>
+          </a:ln>
+        </p:spPr>
+      </p:sp>
+      <p:sp>
+        <p:nvSpPr>
+          <p:cNvPr id="62" name="Círculo S2"/>
+          <p:cNvSpPr/>
+          <p:nvPr/>
+        </p:nvSpPr>
+        <p:spPr>
+          <a:xfrm>
+            <a:off x="7726680" y="4343400"/>
+            <a:ext cx="237744" cy="237744"/>
+          </a:xfrm>
+          <a:prstGeom prst="ellipse">
+            <a:avLst/>
+          </a:prstGeom>
+          <a:solidFill>
+            <a:schemeClr val="bg1"/>
+          </a:solidFill>
+          <a:ln w="12700">
+            <a:solidFill>
+              <a:schemeClr val="bg1"/>
+            </a:solidFill>
+            <a:prstDash val="solid"/>
+          </a:ln>
+        </p:spPr>
+      </p:sp>
+      <p:pic>
+        <p:nvPicPr>
+          <p:cNvPr id="63" name="Icono S2" descr="preencoded.png">    </p:cNvPr>
+          <p:cNvPicPr>
+            <a:picLocks noChangeAspect="1"/>
+          </p:cNvPicPr>
+          <p:nvPr/>
+        </p:nvPicPr>
+        <p:blipFill>
+          <a:blip r:embed="rId14"/>
+          <a:stretch>
+            <a:fillRect/>
+          </a:stretch>
+        </p:blipFill>
+        <p:spPr>
+          <a:xfrm>
+            <a:off x="7790871" y="4407591"/>
+            <a:ext cx="109362" cy="109362"/>
+          </a:xfrm>
+          <a:prstGeom prst="rect">
+            <a:avLst/>
+          </a:prstGeom>
+        </p:spPr>
+      </p:pic>
+      <p:sp>
+        <p:nvSpPr>
+          <p:cNvPr id="64" name="Text 48"/>
+          <p:cNvSpPr txBox="1"/>
+          <p:nvPr/>
+        </p:nvSpPr>
+        <p:spPr>
+          <a:xfrm>
+            <a:off x="8065008" y="4361688"/>
+            <a:ext cx="3547872" cy="182880"/>
+          </a:xfrm>
+          <a:prstGeom prst="rect">
+            <a:avLst/>
+          </a:prstGeom>
+          <a:noFill/>
+          <a:ln/>
+        </p:spPr>
+        <p:txBody>
+          <a:bodyPr wrap="square" lIns="0" tIns="0" rIns="0" bIns="0" rtlCol="0" anchor="t"/>
+          <a:lstStyle/>
+          <a:p>
+            <a:pPr indent="0" marL="0">
+              <a:lnSpc>
+                <a:spcPct val="98000"/>
+              </a:lnSpc>
+              <a:buNone/>
+            </a:pPr>
+            <a:r>
+              <a:rPr lang="en-US" sz="1100" dirty="0">
+                <a:solidFill>
+                  <a:schemeClr val="tx1"/>
+                </a:solidFill>
+              </a:rPr>
+              <a:t>Auditoría Interna – Evaluación NRP-24</a:t>
+            </a:r>
+            <a:endParaRPr lang="en-US" sz="1100" dirty="0"/>
+          </a:p>
+        </p:txBody>
+      </p:sp>
+      <p:sp>
+        <p:nvSpPr>
+          <p:cNvPr id="65" name="Círculo S2"/>
+          <p:cNvSpPr/>
+          <p:nvPr/>
+        </p:nvSpPr>
+        <p:spPr>
+          <a:xfrm>
+            <a:off x="7726680" y="4581144"/>
+            <a:ext cx="237744" cy="237744"/>
+          </a:xfrm>
+          <a:prstGeom prst="ellipse">
+            <a:avLst/>
+          </a:prstGeom>
+          <a:solidFill>
+            <a:schemeClr val="bg1"/>
+          </a:solidFill>
+          <a:ln w="12700">
+            <a:solidFill>
+              <a:schemeClr val="bg1"/>
+            </a:solidFill>
+            <a:prstDash val="solid"/>
+          </a:ln>
+        </p:spPr>
+      </p:sp>
+      <p:pic>
+        <p:nvPicPr>
+          <p:cNvPr id="66" name="Icono S2" descr="preencoded.png">    </p:cNvPr>
+          <p:cNvPicPr>
+            <a:picLocks noChangeAspect="1"/>
+          </p:cNvPicPr>
+          <p:nvPr/>
+        </p:nvPicPr>
+        <p:blipFill>
+          <a:blip r:embed="rId15"/>
+          <a:stretch>
+            <a:fillRect/>
+          </a:stretch>
+        </p:blipFill>
+        <p:spPr>
+          <a:xfrm>
+            <a:off x="7790871" y="4645335"/>
+            <a:ext cx="109362" cy="109362"/>
+          </a:xfrm>
+          <a:prstGeom prst="rect">
+            <a:avLst/>
+          </a:prstGeom>
+        </p:spPr>
+      </p:pic>
+      <p:sp>
+        <p:nvSpPr>
+          <p:cNvPr id="67" name="Text 50"/>
+          <p:cNvSpPr txBox="1"/>
+          <p:nvPr/>
+        </p:nvSpPr>
+        <p:spPr>
+          <a:xfrm>
+            <a:off x="8065008" y="4599432"/>
+            <a:ext cx="3547872" cy="182880"/>
+          </a:xfrm>
+          <a:prstGeom prst="rect">
+            <a:avLst/>
+          </a:prstGeom>
+          <a:noFill/>
+          <a:ln/>
+        </p:spPr>
+        <p:txBody>
+          <a:bodyPr wrap="square" lIns="0" tIns="0" rIns="0" bIns="0" rtlCol="0" anchor="t"/>
+          <a:lstStyle/>
+          <a:p>
+            <a:pPr indent="0" marL="0">
+              <a:lnSpc>
+                <a:spcPct val="98000"/>
+              </a:lnSpc>
+              <a:buNone/>
+            </a:pPr>
+            <a:r>
+              <a:rPr lang="en-US" sz="1100" dirty="0">
+                <a:solidFill>
+                  <a:schemeClr val="tx1"/>
+                </a:solidFill>
+              </a:rPr>
+              <a:t>Auditoría Externa</a:t>
+            </a:r>
+            <a:endParaRPr lang="en-US" sz="1100" dirty="0"/>
+          </a:p>
+        </p:txBody>
+      </p:sp>
+      <p:sp>
+        <p:nvSpPr>
+          <p:cNvPr id="68" name="Frente Riesgos Financieros"/>
+          <p:cNvSpPr/>
+          <p:nvPr/>
+        </p:nvSpPr>
+        <p:spPr>
+          <a:xfrm>
+            <a:off x="457200" y="4992624"/>
+            <a:ext cx="2697480" cy="658368"/>
+          </a:xfrm>
+          <a:prstGeom prst="roundRect">
+            <a:avLst>
+              <a:gd name="adj" fmla="val 13889"/>
+            </a:avLst>
+          </a:prstGeom>
+          <a:solidFill>
+            <a:schemeClr val="tx2"/>
+          </a:solidFill>
+          <a:ln w="12700">
+            <a:solidFill>
+              <a:schemeClr val="tx2"/>
+            </a:solidFill>
+            <a:prstDash val="solid"/>
+          </a:ln>
+        </p:spPr>
+      </p:sp>
+      <p:sp>
+        <p:nvSpPr>
+          <p:cNvPr id="69" name="Círculo Riesgos Financieros"/>
+          <p:cNvSpPr/>
+          <p:nvPr/>
+        </p:nvSpPr>
+        <p:spPr>
+          <a:xfrm>
+            <a:off x="603504" y="5111496"/>
+            <a:ext cx="420624" cy="420624"/>
+          </a:xfrm>
+          <a:prstGeom prst="ellipse">
+            <a:avLst/>
+          </a:prstGeom>
+          <a:solidFill>
+            <a:schemeClr val="accent3"/>
+          </a:solidFill>
+          <a:ln w="12700">
+            <a:solidFill>
+              <a:schemeClr val="accent3"/>
+            </a:solidFill>
+            <a:prstDash val="solid"/>
+          </a:ln>
+        </p:spPr>
+      </p:sp>
+      <p:pic>
+        <p:nvPicPr>
+          <p:cNvPr id="70" name="Icono Riesgos Financieros" descr="preencoded.png">    </p:cNvPr>
+          <p:cNvPicPr>
+            <a:picLocks noChangeAspect="1"/>
+          </p:cNvPicPr>
+          <p:nvPr/>
+        </p:nvPicPr>
+        <p:blipFill>
+          <a:blip r:embed="rId16"/>
+          <a:stretch>
+            <a:fillRect/>
+          </a:stretch>
+        </p:blipFill>
+        <p:spPr>
+          <a:xfrm>
+            <a:off x="717072" y="5225064"/>
+            <a:ext cx="193487" cy="193487"/>
+          </a:xfrm>
+          <a:prstGeom prst="rect">
+            <a:avLst/>
+          </a:prstGeom>
+        </p:spPr>
+      </p:pic>
+      <p:sp>
+        <p:nvSpPr>
+          <p:cNvPr id="71" name="Text 53"/>
+          <p:cNvSpPr txBox="1"/>
+          <p:nvPr/>
+        </p:nvSpPr>
+        <p:spPr>
+          <a:xfrm>
+            <a:off x="1143000" y="4992624"/>
+            <a:ext cx="1920240" cy="658368"/>
+          </a:xfrm>
+          <a:prstGeom prst="rect">
+            <a:avLst/>
+          </a:prstGeom>
+          <a:noFill/>
+          <a:ln/>
+        </p:spPr>
+        <p:txBody>
+          <a:bodyPr wrap="square" lIns="0" tIns="0" rIns="0" bIns="0" rtlCol="0" anchor="ctr"/>
+          <a:lstStyle/>
+          <a:p>
+            <a:pPr indent="0" marL="0">
+              <a:buNone/>
+            </a:pPr>
+            <a:r>
+              <a:rPr lang="en-US" sz="1400" b="1" dirty="0">
+                <a:solidFill>
+                  <a:schemeClr val="bg1"/>
+                </a:solidFill>
+              </a:rPr>
+              <a:t>Riesgos Financieros</a:t>
+            </a:r>
+            <a:endParaRPr lang="en-US" sz="1400" dirty="0"/>
+          </a:p>
+          <a:p>
+            <a:pPr indent="0" marL="0">
+              <a:buNone/>
+            </a:pPr>
+            <a:r>
+              <a:rPr lang="en-US" sz="1100" dirty="0">
+                <a:solidFill>
+                  <a:schemeClr val="accent5"/>
+                </a:solidFill>
+              </a:rPr>
+              <a:t>Tarjeta de crédito</a:t>
+            </a:r>
+            <a:endParaRPr lang="en-US" sz="1400" dirty="0"/>
+          </a:p>
+        </p:txBody>
+      </p:sp>
+      <p:sp>
+        <p:nvSpPr>
+          <p:cNvPr id="72" name="S1 Riesgos Financieros"/>
+          <p:cNvSpPr/>
+          <p:nvPr/>
+        </p:nvSpPr>
+        <p:spPr>
+          <a:xfrm>
+            <a:off x="3291840" y="4992624"/>
+            <a:ext cx="4160520" cy="658368"/>
+          </a:xfrm>
+          <a:prstGeom prst="roundRect">
+            <a:avLst>
+              <a:gd name="adj" fmla="val 13889"/>
+            </a:avLst>
+          </a:prstGeom>
+          <a:solidFill>
+            <a:schemeClr val="bg2"/>
+          </a:solidFill>
+          <a:ln w="12700">
+            <a:solidFill>
+              <a:schemeClr val="bg2"/>
+            </a:solidFill>
+            <a:prstDash val="solid"/>
+          </a:ln>
+        </p:spPr>
+      </p:sp>
+      <p:sp>
+        <p:nvSpPr>
+          <p:cNvPr id="73" name="Círculo S1"/>
+          <p:cNvSpPr/>
+          <p:nvPr/>
+        </p:nvSpPr>
+        <p:spPr>
+          <a:xfrm>
+            <a:off x="3429000" y="5093208"/>
+            <a:ext cx="237744" cy="237744"/>
+          </a:xfrm>
+          <a:prstGeom prst="ellipse">
+            <a:avLst/>
+          </a:prstGeom>
+          <a:solidFill>
+            <a:schemeClr val="bg1"/>
+          </a:solidFill>
+          <a:ln w="12700">
+            <a:solidFill>
+              <a:schemeClr val="bg1"/>
+            </a:solidFill>
+            <a:prstDash val="solid"/>
+          </a:ln>
+        </p:spPr>
+      </p:sp>
+      <p:pic>
+        <p:nvPicPr>
+          <p:cNvPr id="74" name="Icono S1" descr="preencoded.png">    </p:cNvPr>
+          <p:cNvPicPr>
+            <a:picLocks noChangeAspect="1"/>
+          </p:cNvPicPr>
+          <p:nvPr/>
+        </p:nvPicPr>
+        <p:blipFill>
+          <a:blip r:embed="rId17"/>
+          <a:stretch>
+            <a:fillRect/>
+          </a:stretch>
+        </p:blipFill>
+        <p:spPr>
+          <a:xfrm>
+            <a:off x="3493191" y="5157399"/>
+            <a:ext cx="109362" cy="109362"/>
+          </a:xfrm>
+          <a:prstGeom prst="rect">
+            <a:avLst/>
+          </a:prstGeom>
+        </p:spPr>
+      </p:pic>
+      <p:sp>
+        <p:nvSpPr>
+          <p:cNvPr id="75" name="Text 56"/>
+          <p:cNvSpPr txBox="1"/>
+          <p:nvPr/>
+        </p:nvSpPr>
+        <p:spPr>
+          <a:xfrm>
+            <a:off x="3767328" y="5111496"/>
+            <a:ext cx="3566160" cy="182880"/>
+          </a:xfrm>
+          <a:prstGeom prst="rect">
+            <a:avLst/>
+          </a:prstGeom>
+          <a:noFill/>
+          <a:ln/>
+        </p:spPr>
+        <p:txBody>
+          <a:bodyPr wrap="square" lIns="0" tIns="0" rIns="0" bIns="0" rtlCol="0" anchor="t"/>
+          <a:lstStyle/>
+          <a:p>
+            <a:pPr indent="0" marL="0">
+              <a:lnSpc>
+                <a:spcPct val="98000"/>
+              </a:lnSpc>
+              <a:buNone/>
+            </a:pPr>
+            <a:r>
+              <a:rPr lang="en-US" sz="1100" dirty="0">
+                <a:solidFill>
+                  <a:schemeClr val="tx1"/>
+                </a:solidFill>
+              </a:rPr>
+              <a:t>Informe de Análisis de Cartera de TC</a:t>
+            </a:r>
+            <a:endParaRPr lang="en-US" sz="1100" dirty="0"/>
+          </a:p>
+        </p:txBody>
+      </p:sp>
+      <p:sp>
+        <p:nvSpPr>
+          <p:cNvPr id="76" name="Círculo S1"/>
+          <p:cNvSpPr/>
+          <p:nvPr/>
+        </p:nvSpPr>
+        <p:spPr>
+          <a:xfrm>
+            <a:off x="3429000" y="5330952"/>
+            <a:ext cx="237744" cy="237744"/>
+          </a:xfrm>
+          <a:prstGeom prst="ellipse">
+            <a:avLst/>
+          </a:prstGeom>
+          <a:solidFill>
+            <a:schemeClr val="bg1"/>
+          </a:solidFill>
+          <a:ln w="12700">
+            <a:solidFill>
+              <a:schemeClr val="bg1"/>
+            </a:solidFill>
+            <a:prstDash val="solid"/>
+          </a:ln>
+        </p:spPr>
+      </p:sp>
+      <p:pic>
+        <p:nvPicPr>
+          <p:cNvPr id="77" name="Icono S1" descr="preencoded.png">    </p:cNvPr>
+          <p:cNvPicPr>
+            <a:picLocks noChangeAspect="1"/>
+          </p:cNvPicPr>
+          <p:nvPr/>
+        </p:nvPicPr>
+        <p:blipFill>
+          <a:blip r:embed="rId18"/>
+          <a:stretch>
+            <a:fillRect/>
+          </a:stretch>
+        </p:blipFill>
+        <p:spPr>
+          <a:xfrm>
+            <a:off x="3493191" y="5395143"/>
+            <a:ext cx="109362" cy="109362"/>
+          </a:xfrm>
+          <a:prstGeom prst="rect">
+            <a:avLst/>
+          </a:prstGeom>
+        </p:spPr>
+      </p:pic>
+      <p:sp>
+        <p:nvSpPr>
+          <p:cNvPr id="78" name="Text 58"/>
+          <p:cNvSpPr txBox="1"/>
+          <p:nvPr/>
+        </p:nvSpPr>
+        <p:spPr>
+          <a:xfrm>
+            <a:off x="3767328" y="5349240"/>
+            <a:ext cx="3566160" cy="182880"/>
+          </a:xfrm>
+          <a:prstGeom prst="rect">
+            <a:avLst/>
+          </a:prstGeom>
+          <a:noFill/>
+          <a:ln/>
+        </p:spPr>
+        <p:txBody>
+          <a:bodyPr wrap="square" lIns="0" tIns="0" rIns="0" bIns="0" rtlCol="0" anchor="t"/>
+          <a:lstStyle/>
+          <a:p>
+            <a:pPr indent="0" marL="0">
+              <a:lnSpc>
+                <a:spcPct val="98000"/>
+              </a:lnSpc>
+              <a:buNone/>
+            </a:pPr>
+            <a:r>
+              <a:rPr lang="en-US" sz="1100" dirty="0">
+                <a:solidFill>
+                  <a:schemeClr val="tx1"/>
+                </a:solidFill>
+              </a:rPr>
+              <a:t>Simulación de cartera vencida</a:t>
+            </a:r>
+            <a:endParaRPr lang="en-US" sz="1100" dirty="0"/>
+          </a:p>
+        </p:txBody>
+      </p:sp>
+      <p:sp>
+        <p:nvSpPr>
+          <p:cNvPr id="79" name="S2 Riesgos Financieros"/>
+          <p:cNvSpPr/>
+          <p:nvPr/>
+        </p:nvSpPr>
+        <p:spPr>
+          <a:xfrm>
+            <a:off x="7589520" y="4992624"/>
+            <a:ext cx="4142232" cy="658368"/>
+          </a:xfrm>
+          <a:prstGeom prst="roundRect">
+            <a:avLst>
+              <a:gd name="adj" fmla="val 13889"/>
+            </a:avLst>
+          </a:prstGeom>
+          <a:solidFill>
+            <a:schemeClr val="bg2"/>
+          </a:solidFill>
+          <a:ln w="12700">
+            <a:solidFill>
+              <a:schemeClr val="bg2"/>
+            </a:solidFill>
+            <a:prstDash val="solid"/>
+          </a:ln>
+        </p:spPr>
+      </p:sp>
+      <p:sp>
+        <p:nvSpPr>
+          <p:cNvPr id="80" name="Círculo S2"/>
+          <p:cNvSpPr/>
+          <p:nvPr/>
+        </p:nvSpPr>
+        <p:spPr>
+          <a:xfrm>
+            <a:off x="7726680" y="5212080"/>
+            <a:ext cx="237744" cy="237744"/>
+          </a:xfrm>
+          <a:prstGeom prst="ellipse">
+            <a:avLst/>
+          </a:prstGeom>
+          <a:solidFill>
+            <a:schemeClr val="bg1"/>
+          </a:solidFill>
+          <a:ln w="12700">
+            <a:solidFill>
+              <a:schemeClr val="bg1"/>
+            </a:solidFill>
+            <a:prstDash val="solid"/>
+          </a:ln>
+        </p:spPr>
+      </p:sp>
+      <p:pic>
+        <p:nvPicPr>
+          <p:cNvPr id="81" name="Icono S2" descr="preencoded.png">    </p:cNvPr>
+          <p:cNvPicPr>
+            <a:picLocks noChangeAspect="1"/>
+          </p:cNvPicPr>
+          <p:nvPr/>
+        </p:nvPicPr>
+        <p:blipFill>
+          <a:blip r:embed="rId19"/>
+          <a:stretch>
+            <a:fillRect/>
+          </a:stretch>
+        </p:blipFill>
+        <p:spPr>
+          <a:xfrm>
+            <a:off x="7790871" y="5276271"/>
+            <a:ext cx="109362" cy="109362"/>
+          </a:xfrm>
+          <a:prstGeom prst="rect">
+            <a:avLst/>
+          </a:prstGeom>
+        </p:spPr>
+      </p:pic>
+      <p:sp>
+        <p:nvSpPr>
+          <p:cNvPr id="82" name="Text 61"/>
+          <p:cNvSpPr txBox="1"/>
+          <p:nvPr/>
+        </p:nvSpPr>
+        <p:spPr>
+          <a:xfrm>
+            <a:off x="8065008" y="5230368"/>
+            <a:ext cx="3547872" cy="182880"/>
+          </a:xfrm>
+          <a:prstGeom prst="rect">
+            <a:avLst/>
+          </a:prstGeom>
+          <a:noFill/>
+          <a:ln/>
+        </p:spPr>
+        <p:txBody>
+          <a:bodyPr wrap="square" lIns="0" tIns="0" rIns="0" bIns="0" rtlCol="0" anchor="t"/>
+          <a:lstStyle/>
+          <a:p>
+            <a:pPr indent="0" marL="0">
+              <a:lnSpc>
+                <a:spcPct val="98000"/>
+              </a:lnSpc>
+              <a:buNone/>
+            </a:pPr>
+            <a:r>
+              <a:rPr lang="en-US" sz="1100" dirty="0">
+                <a:solidFill>
+                  <a:schemeClr val="tx1"/>
+                </a:solidFill>
+              </a:rPr>
+              <a:t>Actualización de Política de TC</a:t>
+            </a:r>
+            <a:endParaRPr lang="en-US" sz="1100" dirty="0"/>
+          </a:p>
+        </p:txBody>
+      </p:sp>
+      <p:sp>
+        <p:nvSpPr>
+          <p:cNvPr id="83" name="Frente Avalúos"/>
+          <p:cNvSpPr/>
+          <p:nvPr/>
+        </p:nvSpPr>
+        <p:spPr>
+          <a:xfrm>
+            <a:off x="457200" y="5742432"/>
+            <a:ext cx="2697480" cy="822960"/>
+          </a:xfrm>
+          <a:prstGeom prst="roundRect">
+            <a:avLst>
+              <a:gd name="adj" fmla="val 11111"/>
+            </a:avLst>
+          </a:prstGeom>
+          <a:solidFill>
+            <a:schemeClr val="tx2"/>
+          </a:solidFill>
+          <a:ln w="12700">
+            <a:solidFill>
+              <a:schemeClr val="tx2"/>
+            </a:solidFill>
+            <a:prstDash val="solid"/>
+          </a:ln>
+        </p:spPr>
+      </p:sp>
+      <p:sp>
+        <p:nvSpPr>
+          <p:cNvPr id="84" name="Círculo Avalúos"/>
+          <p:cNvSpPr/>
+          <p:nvPr/>
+        </p:nvSpPr>
+        <p:spPr>
+          <a:xfrm>
+            <a:off x="603504" y="5852160"/>
+            <a:ext cx="420624" cy="420624"/>
+          </a:xfrm>
+          <a:prstGeom prst="ellipse">
+            <a:avLst/>
+          </a:prstGeom>
+          <a:solidFill>
+            <a:schemeClr val="accent3"/>
+          </a:solidFill>
+          <a:ln w="12700">
+            <a:solidFill>
+              <a:schemeClr val="accent3"/>
+            </a:solidFill>
+            <a:prstDash val="solid"/>
+          </a:ln>
+        </p:spPr>
+      </p:sp>
+      <p:pic>
+        <p:nvPicPr>
+          <p:cNvPr id="85" name="Icono Avalúos" descr="preencoded.png">    </p:cNvPr>
+          <p:cNvPicPr>
+            <a:picLocks noChangeAspect="1"/>
+          </p:cNvPicPr>
+          <p:nvPr/>
+        </p:nvPicPr>
+        <p:blipFill>
+          <a:blip r:embed="rId20"/>
+          <a:stretch>
+            <a:fillRect/>
+          </a:stretch>
+        </p:blipFill>
+        <p:spPr>
+          <a:xfrm>
+            <a:off x="717072" y="5965728"/>
+            <a:ext cx="193487" cy="193487"/>
+          </a:xfrm>
+          <a:prstGeom prst="rect">
+            <a:avLst/>
+          </a:prstGeom>
+        </p:spPr>
+      </p:pic>
+      <p:sp>
+        <p:nvSpPr>
+          <p:cNvPr id="86" name="Text 64"/>
+          <p:cNvSpPr txBox="1"/>
+          <p:nvPr/>
+        </p:nvSpPr>
+        <p:spPr>
+          <a:xfrm>
+            <a:off x="1143000" y="5852160"/>
+            <a:ext cx="1874520" cy="420624"/>
+          </a:xfrm>
+          <a:prstGeom prst="rect">
+            <a:avLst/>
+          </a:prstGeom>
+          <a:noFill/>
+          <a:ln/>
+        </p:spPr>
+        <p:txBody>
+          <a:bodyPr wrap="square" lIns="0" tIns="0" rIns="0" bIns="0" rtlCol="0" anchor="ctr"/>
+          <a:lstStyle/>
+          <a:p>
+            <a:pPr indent="0" marL="0">
+              <a:buNone/>
+            </a:pPr>
+            <a:r>
+              <a:rPr lang="en-US" sz="1400" b="1" dirty="0">
+                <a:solidFill>
+                  <a:schemeClr val="bg1"/>
+                </a:solidFill>
+              </a:rPr>
+              <a:t>Avalúos</a:t>
+            </a:r>
+            <a:endParaRPr lang="en-US" sz="1400" dirty="0"/>
+          </a:p>
+        </p:txBody>
+      </p:sp>
+      <p:sp>
+        <p:nvSpPr>
+          <p:cNvPr id="87" name="Progreso fondo"/>
+          <p:cNvSpPr/>
+          <p:nvPr/>
+        </p:nvSpPr>
+        <p:spPr>
+          <a:xfrm>
+            <a:off x="603504" y="6336792"/>
+            <a:ext cx="1874520" cy="91440"/>
+          </a:xfrm>
+          <a:prstGeom prst="roundRect">
+            <a:avLst>
+              <a:gd name="adj" fmla="val 50000"/>
+            </a:avLst>
+          </a:prstGeom>
+          <a:solidFill>
+            <a:schemeClr val="accent3"/>
+          </a:solidFill>
+          <a:ln w="12700">
+            <a:solidFill>
+              <a:schemeClr val="accent3"/>
+            </a:solidFill>
+            <a:prstDash val="solid"/>
+          </a:ln>
+        </p:spPr>
+      </p:sp>
+      <p:sp>
+        <p:nvSpPr>
+          <p:cNvPr id="88" name="Progreso avance"/>
+          <p:cNvSpPr/>
+          <p:nvPr/>
+        </p:nvSpPr>
+        <p:spPr>
+          <a:xfrm>
+            <a:off x="603504" y="6336792"/>
+            <a:ext cx="1124712" cy="91440"/>
+          </a:xfrm>
+          <a:prstGeom prst="roundRect">
+            <a:avLst>
+              <a:gd name="adj" fmla="val 50000"/>
+            </a:avLst>
+          </a:prstGeom>
+          <a:solidFill>
+            <a:schemeClr val="accent6"/>
+          </a:solidFill>
+          <a:ln w="12700">
+            <a:solidFill>
+              <a:schemeClr val="accent6"/>
+            </a:solidFill>
+            <a:prstDash val="solid"/>
+          </a:ln>
+        </p:spPr>
+      </p:sp>
+      <p:sp>
+        <p:nvSpPr>
+          <p:cNvPr id="89" name="Text 67"/>
+          <p:cNvSpPr txBox="1"/>
+          <p:nvPr/>
+        </p:nvSpPr>
+        <p:spPr>
+          <a:xfrm>
+            <a:off x="2560320" y="6245352"/>
+            <a:ext cx="457200" cy="274320"/>
+          </a:xfrm>
+          <a:prstGeom prst="rect">
+            <a:avLst/>
+          </a:prstGeom>
+          <a:noFill/>
+          <a:ln/>
+        </p:spPr>
+        <p:txBody>
+          <a:bodyPr wrap="square" lIns="0" tIns="0" rIns="0" bIns="0" rtlCol="0" anchor="ctr"/>
+          <a:lstStyle/>
+          <a:p>
+            <a:pPr indent="0" marL="0">
+              <a:buNone/>
+            </a:pPr>
+            <a:r>
+              <a:rPr lang="en-US" sz="1300" b="1" dirty="0">
+                <a:solidFill>
+                  <a:schemeClr val="bg1"/>
+                </a:solidFill>
+              </a:rPr>
+              <a:t>60%</a:t>
+            </a:r>
+            <a:endParaRPr lang="en-US" sz="1300" dirty="0"/>
+          </a:p>
+        </p:txBody>
+      </p:sp>
+      <p:sp>
+        <p:nvSpPr>
+          <p:cNvPr id="90" name="S1 Avalúos"/>
+          <p:cNvSpPr/>
+          <p:nvPr/>
+        </p:nvSpPr>
+        <p:spPr>
+          <a:xfrm>
+            <a:off x="3291840" y="5742432"/>
+            <a:ext cx="4160520" cy="822960"/>
+          </a:xfrm>
+          <a:prstGeom prst="roundRect">
+            <a:avLst>
+              <a:gd name="adj" fmla="val 11111"/>
+            </a:avLst>
+          </a:prstGeom>
+          <a:solidFill>
+            <a:schemeClr val="bg2"/>
+          </a:solidFill>
+          <a:ln w="12700">
+            <a:solidFill>
+              <a:schemeClr val="bg2"/>
+            </a:solidFill>
+            <a:prstDash val="solid"/>
+          </a:ln>
+        </p:spPr>
+      </p:sp>
+      <p:sp>
+        <p:nvSpPr>
+          <p:cNvPr id="91" name="Círculo S1"/>
+          <p:cNvSpPr/>
+          <p:nvPr/>
+        </p:nvSpPr>
+        <p:spPr>
+          <a:xfrm>
+            <a:off x="3429000" y="5806440"/>
+            <a:ext cx="237744" cy="237744"/>
+          </a:xfrm>
+          <a:prstGeom prst="ellipse">
+            <a:avLst/>
+          </a:prstGeom>
+          <a:solidFill>
+            <a:schemeClr val="bg1"/>
+          </a:solidFill>
+          <a:ln w="12700">
+            <a:solidFill>
+              <a:schemeClr val="bg1"/>
+            </a:solidFill>
+            <a:prstDash val="solid"/>
+          </a:ln>
+        </p:spPr>
+      </p:sp>
+      <p:pic>
+        <p:nvPicPr>
+          <p:cNvPr id="92" name="Icono S1" descr="preencoded.png">    </p:cNvPr>
+          <p:cNvPicPr>
+            <a:picLocks noChangeAspect="1"/>
+          </p:cNvPicPr>
+          <p:nvPr/>
+        </p:nvPicPr>
+        <p:blipFill>
+          <a:blip r:embed="rId21"/>
+          <a:stretch>
+            <a:fillRect/>
+          </a:stretch>
+        </p:blipFill>
+        <p:spPr>
+          <a:xfrm>
+            <a:off x="3493191" y="5870631"/>
+            <a:ext cx="109362" cy="109362"/>
+          </a:xfrm>
+          <a:prstGeom prst="rect">
+            <a:avLst/>
+          </a:prstGeom>
+        </p:spPr>
+      </p:pic>
+      <p:sp>
+        <p:nvSpPr>
+          <p:cNvPr id="93" name="Text 70"/>
+          <p:cNvSpPr txBox="1"/>
+          <p:nvPr/>
+        </p:nvSpPr>
+        <p:spPr>
+          <a:xfrm>
+            <a:off x="3767328" y="5824728"/>
+            <a:ext cx="3566160" cy="182880"/>
+          </a:xfrm>
+          <a:prstGeom prst="rect">
+            <a:avLst/>
+          </a:prstGeom>
+          <a:noFill/>
+          <a:ln/>
+        </p:spPr>
+        <p:txBody>
+          <a:bodyPr wrap="square" lIns="0" tIns="0" rIns="0" bIns="0" rtlCol="0" anchor="t"/>
+          <a:lstStyle/>
+          <a:p>
+            <a:pPr indent="0" marL="0">
+              <a:lnSpc>
+                <a:spcPct val="98000"/>
+              </a:lnSpc>
+              <a:buNone/>
+            </a:pPr>
+            <a:r>
+              <a:rPr lang="en-US" sz="1100" dirty="0">
+                <a:solidFill>
+                  <a:schemeClr val="tx1"/>
+                </a:solidFill>
+              </a:rPr>
+              <a:t>Revisión de Política de Avalúos</a:t>
+            </a:r>
+            <a:endParaRPr lang="en-US" sz="1100" dirty="0"/>
+          </a:p>
+        </p:txBody>
+      </p:sp>
+      <p:sp>
+        <p:nvSpPr>
+          <p:cNvPr id="94" name="Círculo S1"/>
+          <p:cNvSpPr/>
+          <p:nvPr/>
+        </p:nvSpPr>
+        <p:spPr>
+          <a:xfrm>
+            <a:off x="3429000" y="6044184"/>
+            <a:ext cx="237744" cy="237744"/>
+          </a:xfrm>
+          <a:prstGeom prst="ellipse">
+            <a:avLst/>
+          </a:prstGeom>
+          <a:solidFill>
+            <a:schemeClr val="bg1"/>
+          </a:solidFill>
+          <a:ln w="12700">
+            <a:solidFill>
+              <a:schemeClr val="bg1"/>
+            </a:solidFill>
+            <a:prstDash val="solid"/>
+          </a:ln>
+        </p:spPr>
+      </p:sp>
+      <p:pic>
+        <p:nvPicPr>
+          <p:cNvPr id="95" name="Icono S1" descr="preencoded.png">    </p:cNvPr>
+          <p:cNvPicPr>
+            <a:picLocks noChangeAspect="1"/>
+          </p:cNvPicPr>
+          <p:nvPr/>
+        </p:nvPicPr>
+        <p:blipFill>
+          <a:blip r:embed="rId22"/>
+          <a:stretch>
+            <a:fillRect/>
+          </a:stretch>
+        </p:blipFill>
+        <p:spPr>
+          <a:xfrm>
+            <a:off x="3493191" y="6108375"/>
+            <a:ext cx="109362" cy="109362"/>
+          </a:xfrm>
+          <a:prstGeom prst="rect">
+            <a:avLst/>
+          </a:prstGeom>
+        </p:spPr>
+      </p:pic>
+      <p:sp>
+        <p:nvSpPr>
+          <p:cNvPr id="96" name="Text 72"/>
+          <p:cNvSpPr txBox="1"/>
+          <p:nvPr/>
+        </p:nvSpPr>
+        <p:spPr>
+          <a:xfrm>
+            <a:off x="3767328" y="6062472"/>
+            <a:ext cx="3566160" cy="182880"/>
+          </a:xfrm>
+          <a:prstGeom prst="rect">
+            <a:avLst/>
+          </a:prstGeom>
+          <a:noFill/>
+          <a:ln/>
+        </p:spPr>
+        <p:txBody>
+          <a:bodyPr wrap="square" lIns="0" tIns="0" rIns="0" bIns="0" rtlCol="0" anchor="t"/>
+          <a:lstStyle/>
+          <a:p>
+            <a:pPr indent="0" marL="0">
+              <a:lnSpc>
+                <a:spcPct val="98000"/>
+              </a:lnSpc>
+              <a:buNone/>
+            </a:pPr>
+            <a:r>
+              <a:rPr lang="en-US" sz="1100" dirty="0">
+                <a:solidFill>
+                  <a:schemeClr val="tx1"/>
+                </a:solidFill>
+              </a:rPr>
+              <a:t>Revisión de Procedimientos de Administración de Avalúos</a:t>
+            </a:r>
+            <a:endParaRPr lang="en-US" sz="1100" dirty="0"/>
+          </a:p>
+        </p:txBody>
+      </p:sp>
+      <p:sp>
+        <p:nvSpPr>
+          <p:cNvPr id="97" name="Círculo S1"/>
+          <p:cNvSpPr/>
+          <p:nvPr/>
+        </p:nvSpPr>
+        <p:spPr>
+          <a:xfrm>
+            <a:off x="3429000" y="6281928"/>
+            <a:ext cx="237744" cy="237744"/>
+          </a:xfrm>
+          <a:prstGeom prst="ellipse">
+            <a:avLst/>
+          </a:prstGeom>
+          <a:solidFill>
+            <a:schemeClr val="bg1"/>
+          </a:solidFill>
+          <a:ln w="12700">
+            <a:solidFill>
+              <a:schemeClr val="bg1"/>
+            </a:solidFill>
+            <a:prstDash val="solid"/>
+          </a:ln>
+        </p:spPr>
+      </p:sp>
+      <p:pic>
+        <p:nvPicPr>
+          <p:cNvPr id="98" name="Icono S1" descr="preencoded.png">    </p:cNvPr>
+          <p:cNvPicPr>
+            <a:picLocks noChangeAspect="1"/>
+          </p:cNvPicPr>
+          <p:nvPr/>
+        </p:nvPicPr>
+        <p:blipFill>
+          <a:blip r:embed="rId23"/>
+          <a:stretch>
+            <a:fillRect/>
+          </a:stretch>
+        </p:blipFill>
+        <p:spPr>
+          <a:xfrm>
+            <a:off x="3493191" y="6346119"/>
+            <a:ext cx="109362" cy="109362"/>
+          </a:xfrm>
+          <a:prstGeom prst="rect">
+            <a:avLst/>
+          </a:prstGeom>
+        </p:spPr>
+      </p:pic>
+      <p:sp>
+        <p:nvSpPr>
+          <p:cNvPr id="99" name="Text 74"/>
+          <p:cNvSpPr txBox="1"/>
+          <p:nvPr/>
+        </p:nvSpPr>
+        <p:spPr>
+          <a:xfrm>
+            <a:off x="3767328" y="6300216"/>
+            <a:ext cx="3566160" cy="182880"/>
+          </a:xfrm>
+          <a:prstGeom prst="rect">
+            <a:avLst/>
+          </a:prstGeom>
+          <a:noFill/>
+          <a:ln/>
+        </p:spPr>
+        <p:txBody>
+          <a:bodyPr wrap="square" lIns="0" tIns="0" rIns="0" bIns="0" rtlCol="0" anchor="t"/>
+          <a:lstStyle/>
+          <a:p>
+            <a:pPr indent="0" marL="0">
+              <a:lnSpc>
+                <a:spcPct val="98000"/>
+              </a:lnSpc>
+              <a:buNone/>
+            </a:pPr>
+            <a:r>
+              <a:rPr lang="en-US" sz="1100" dirty="0">
+                <a:solidFill>
+                  <a:schemeClr val="tx1"/>
+                </a:solidFill>
+              </a:rPr>
+              <a:t>Revisión de Perfil de Revisor</a:t>
+            </a:r>
+            <a:endParaRPr lang="en-US" sz="1100" dirty="0"/>
+          </a:p>
+        </p:txBody>
+      </p:sp>
+      <p:sp>
+        <p:nvSpPr>
+          <p:cNvPr id="100" name="S2 Avalúos"/>
+          <p:cNvSpPr/>
+          <p:nvPr/>
+        </p:nvSpPr>
+        <p:spPr>
+          <a:xfrm>
+            <a:off x="7589520" y="5742432"/>
+            <a:ext cx="4142232" cy="822960"/>
+          </a:xfrm>
+          <a:prstGeom prst="roundRect">
+            <a:avLst>
+              <a:gd name="adj" fmla="val 11111"/>
+            </a:avLst>
+          </a:prstGeom>
+          <a:solidFill>
+            <a:schemeClr val="bg2"/>
+          </a:solidFill>
+          <a:ln w="12700">
+            <a:solidFill>
+              <a:schemeClr val="bg2"/>
+            </a:solidFill>
+            <a:prstDash val="solid"/>
+          </a:ln>
+        </p:spPr>
+      </p:sp>
+      <p:sp>
+        <p:nvSpPr>
+          <p:cNvPr id="101" name="Círculo sin actividades"/>
+          <p:cNvSpPr/>
+          <p:nvPr/>
+        </p:nvSpPr>
+        <p:spPr>
+          <a:xfrm>
+            <a:off x="7726680" y="6025896"/>
+            <a:ext cx="256032" cy="256032"/>
+          </a:xfrm>
+          <a:prstGeom prst="ellipse">
+            <a:avLst/>
+          </a:prstGeom>
+          <a:solidFill>
+            <a:schemeClr val="accent5"/>
+          </a:solidFill>
+          <a:ln w="12700">
+            <a:solidFill>
+              <a:schemeClr val="accent5"/>
+            </a:solidFill>
+            <a:prstDash val="solid"/>
+          </a:ln>
+        </p:spPr>
+      </p:sp>
+      <p:pic>
+        <p:nvPicPr>
+          <p:cNvPr id="102" name="Icono sin actividades" descr="preencoded.png">    </p:cNvPr>
+          <p:cNvPicPr>
+            <a:picLocks noChangeAspect="1"/>
+          </p:cNvPicPr>
+          <p:nvPr/>
+        </p:nvPicPr>
+        <p:blipFill>
+          <a:blip r:embed="rId24"/>
+          <a:stretch>
+            <a:fillRect/>
+          </a:stretch>
+        </p:blipFill>
+        <p:spPr>
+          <a:xfrm>
+            <a:off x="7795809" y="6095025"/>
+            <a:ext cx="117775" cy="117775"/>
+          </a:xfrm>
+          <a:prstGeom prst="rect">
+            <a:avLst/>
+          </a:prstGeom>
+        </p:spPr>
+      </p:pic>
+      <p:sp>
+        <p:nvSpPr>
+          <p:cNvPr id="103" name="Text 77"/>
+          <p:cNvSpPr txBox="1"/>
+          <p:nvPr/>
+        </p:nvSpPr>
+        <p:spPr>
+          <a:xfrm>
+            <a:off x="8092440" y="5742432"/>
+            <a:ext cx="3502152" cy="822960"/>
+          </a:xfrm>
+          <a:prstGeom prst="rect">
+            <a:avLst/>
+          </a:prstGeom>
+          <a:noFill/>
+          <a:ln/>
+        </p:spPr>
+        <p:txBody>
+          <a:bodyPr wrap="square" lIns="0" tIns="0" rIns="0" bIns="0" rtlCol="0" anchor="ctr"/>
+          <a:lstStyle/>
+          <a:p>
+            <a:pPr indent="0" marL="0">
+              <a:buNone/>
+            </a:pPr>
+            <a:r>
+              <a:rPr lang="en-US" sz="1100" i="1" dirty="0">
+                <a:solidFill>
+                  <a:schemeClr val="accent4"/>
+                </a:solidFill>
+              </a:rPr>
+              <a:t>Sin actividades programadas</a:t>
+            </a:r>
+            <a:endParaRPr lang="en-US" sz="1100" dirty="0"/>
+          </a:p>
+        </p:txBody>
+      </p:sp>
+    </p:spTree>
+  </p:cSld>
+  <p:clrMapOvr>
+    <a:masterClrMapping/>
+  </p:clrMapOvr>
+</p:sld>
+</file>
+
+<file path=ppt/slides/slide4.xml><?xml version="1.0" encoding="utf-8"?>
+<p:sld xmlns:a="http://schemas.openxmlformats.org/drawingml/2006/main" xmlns:r="http://schemas.openxmlformats.org/officeDocument/2006/relationships" xmlns:p="http://schemas.openxmlformats.org/presentationml/2006/main">
+  <p:cSld name="Slide 4">
+    <p:spTree>
+      <p:nvGrpSpPr>
+        <p:cNvPr id="1" name=""/>
+        <p:cNvGrpSpPr/>
+        <p:nvPr/>
+      </p:nvGrpSpPr>
+      <p:grpSpPr>
+        <a:xfrm>
+          <a:off x="0" y="0"/>
+          <a:ext cx="0" cy="0"/>
+          <a:chOff x="0" y="0"/>
+          <a:chExt cx="0" cy="0"/>
+        </a:xfrm>
+      </p:grpSpPr>
+      <p:sp>
+        <p:nvSpPr>
+          <p:cNvPr id="2" name="Text 0"/>
+          <p:cNvSpPr/>
+          <p:nvPr>
+            <p:ph idx="100" type="title" hasCustomPrompt="1"/>
+          </p:nvPr>
+        </p:nvSpPr>
+        <p:spPr>
+          <a:xfrm>
+            <a:off x="457200" y="274320"/>
+            <a:ext cx="8686800" cy="548640"/>
+          </a:xfrm>
+          <a:prstGeom prst="rect">
+            <a:avLst/>
+          </a:prstGeom>
+          <a:noFill/>
+          <a:ln/>
+        </p:spPr>
+        <p:txBody>
+          <a:bodyPr wrap="square" lIns="0" tIns="0" rIns="0" bIns="0" rtlCol="0" anchor="ctr"/>
+          <a:lstStyle/>
+          <a:p>
+            <a:pPr algn="l" indent="0" marL="0">
+              <a:buNone/>
+            </a:pPr>
+            <a:r>
+              <a:rPr lang="en-US" sz="3000" b="1" dirty="0">
+                <a:solidFill>
+                  <a:schemeClr val="tx2"/>
+                </a:solidFill>
+              </a:rPr>
+              <a:t>Calendario regulatorio SSF</a:t>
+            </a:r>
+            <a:endParaRPr lang="en-US" sz="3000" dirty="0"/>
+          </a:p>
+        </p:txBody>
+      </p:sp>
+      <p:sp>
+        <p:nvSpPr>
+          <p:cNvPr id="3" name="Text 0"/>
+          <p:cNvSpPr/>
+          <p:nvPr>
+            <p:ph idx="101" type="body" hasCustomPrompt="1"/>
+          </p:nvPr>
+        </p:nvSpPr>
+        <p:spPr>
+          <a:xfrm>
+            <a:off x="457200" y="804672"/>
+            <a:ext cx="8686800" cy="292608"/>
+          </a:xfrm>
+          <a:prstGeom prst="rect">
+            <a:avLst/>
+          </a:prstGeom>
+          <a:noFill/>
+          <a:ln/>
+        </p:spPr>
+        <p:txBody>
+          <a:bodyPr wrap="square" lIns="0" tIns="0" rIns="0" bIns="0" rtlCol="0" anchor="ctr"/>
+          <a:lstStyle/>
+          <a:p>
+            <a:pPr algn="l" indent="0" marL="0">
+              <a:buNone/>
+            </a:pPr>
+            <a:r>
+              <a:rPr lang="en-US" sz="1300" dirty="0">
+                <a:solidFill>
+                  <a:schemeClr val="accent4"/>
+                </a:solidFill>
+              </a:rPr>
+              <a:t>Hitos de las circulares en curso · corte al 10/10/2026</a:t>
+            </a:r>
+            <a:endParaRPr lang="en-US" sz="1300" dirty="0"/>
+          </a:p>
+        </p:txBody>
+      </p:sp>
+      <p:sp>
+        <p:nvSpPr>
+          <p:cNvPr id="4" name="Línea de tiempo"/>
+          <p:cNvSpPr/>
+          <p:nvPr/>
+        </p:nvSpPr>
+        <p:spPr>
+          <a:xfrm>
+            <a:off x="548640" y="2743200"/>
+            <a:ext cx="11109960" cy="0"/>
+          </a:xfrm>
+          <a:prstGeom prst="line">
+            <a:avLst/>
+          </a:prstGeom>
+          <a:noFill/>
+          <a:ln w="38100">
+            <a:solidFill>
+              <a:srgbClr val="D7DEE9"/>
+            </a:solidFill>
+            <a:prstDash val="solid"/>
+          </a:ln>
+        </p:spPr>
+      </p:sp>
+      <p:sp>
+        <p:nvSpPr>
+          <p:cNvPr id="5" name="Hoy línea"/>
+          <p:cNvSpPr/>
+          <p:nvPr/>
+        </p:nvSpPr>
+        <p:spPr>
+          <a:xfrm>
+            <a:off x="5376672" y="1600200"/>
+            <a:ext cx="0" cy="1417320"/>
+          </a:xfrm>
+          <a:prstGeom prst="line">
+            <a:avLst/>
+          </a:prstGeom>
+          <a:noFill/>
+          <a:ln w="19050">
+            <a:solidFill>
+              <a:srgbClr val="B87300"/>
+            </a:solidFill>
+            <a:prstDash val="dash"/>
+          </a:ln>
+        </p:spPr>
+      </p:sp>
+      <p:sp>
+        <p:nvSpPr>
+          <p:cNvPr id="6" name="Hoy"/>
+          <p:cNvSpPr/>
+          <p:nvPr/>
+        </p:nvSpPr>
+        <p:spPr>
+          <a:xfrm>
             <a:off x="4919472" y="1325880"/>
             <a:ext cx="914400" cy="274320"/>
           </a:xfrm>
+          <a:prstGeom prst="roundRect">
+            <a:avLst>
+              <a:gd name="adj" fmla="val 50000"/>
+            </a:avLst>
+          </a:prstGeom>
+          <a:solidFill>
+            <a:schemeClr val="accent2"/>
+          </a:solidFill>
+          <a:ln w="12700">
+            <a:solidFill>
+              <a:schemeClr val="accent2"/>
+            </a:solidFill>
+            <a:prstDash val="solid"/>
+          </a:ln>
+        </p:spPr>
+      </p:sp>
+      <p:sp>
+        <p:nvSpPr>
+          <p:cNvPr id="7" name="Text 5"/>
+          <p:cNvSpPr txBox="1"/>
+          <p:nvPr/>
+        </p:nvSpPr>
+        <p:spPr>
+          <a:xfrm>
+            <a:off x="4919472" y="1325880"/>
+            <a:ext cx="914400" cy="274320"/>
+          </a:xfrm>
           <a:prstGeom prst="rect">
             <a:avLst/>
           </a:prstGeom>
@@ -4334,7 +7920,129 @@
       </p:sp>
       <p:sp>
         <p:nvSpPr>
-          <p:cNvPr id="32" name="Text 30"/>
+          <p:cNvPr id="32" name="Leyenda cumplido"/>
+          <p:cNvSpPr/>
+          <p:nvPr/>
+        </p:nvSpPr>
+        <p:spPr>
+          <a:xfrm>
+            <a:off x="8641080" y="1399032"/>
+            <a:ext cx="146304" cy="146304"/>
+          </a:xfrm>
+          <a:prstGeom prst="ellipse">
+            <a:avLst/>
+          </a:prstGeom>
+          <a:solidFill>
+            <a:schemeClr val="tx2"/>
+          </a:solidFill>
+          <a:ln w="25400">
+            <a:solidFill>
+              <a:srgbClr val="0B2E59"/>
+            </a:solidFill>
+            <a:prstDash val="solid"/>
+          </a:ln>
+        </p:spPr>
+      </p:sp>
+      <p:sp>
+        <p:nvSpPr>
+          <p:cNvPr id="33" name="Text 31"/>
+          <p:cNvSpPr txBox="1"/>
+          <p:nvPr/>
+        </p:nvSpPr>
+        <p:spPr>
+          <a:xfrm>
+            <a:off x="8851392" y="1335024"/>
+            <a:ext cx="1371600" cy="274320"/>
+          </a:xfrm>
+          <a:prstGeom prst="rect">
+            <a:avLst/>
+          </a:prstGeom>
+          <a:noFill/>
+          <a:ln/>
+        </p:spPr>
+        <p:txBody>
+          <a:bodyPr wrap="square" lIns="0" tIns="0" rIns="0" bIns="0" rtlCol="0" anchor="ctr"/>
+          <a:lstStyle/>
+          <a:p>
+            <a:pPr indent="0" marL="0">
+              <a:buNone/>
+            </a:pPr>
+            <a:r>
+              <a:rPr lang="en-US" sz="1000" dirty="0">
+                <a:solidFill>
+                  <a:schemeClr val="accent4"/>
+                </a:solidFill>
+              </a:rPr>
+              <a:t>Recibido / iniciado</a:t>
+            </a:r>
+            <a:endParaRPr lang="en-US" sz="1000" dirty="0"/>
+          </a:p>
+        </p:txBody>
+      </p:sp>
+      <p:sp>
+        <p:nvSpPr>
+          <p:cNvPr id="34" name="Leyenda pendiente"/>
+          <p:cNvSpPr/>
+          <p:nvPr/>
+        </p:nvSpPr>
+        <p:spPr>
+          <a:xfrm>
+            <a:off x="10287000" y="1399032"/>
+            <a:ext cx="146304" cy="146304"/>
+          </a:xfrm>
+          <a:prstGeom prst="ellipse">
+            <a:avLst/>
+          </a:prstGeom>
+          <a:solidFill>
+            <a:schemeClr val="bg1"/>
+          </a:solidFill>
+          <a:ln w="25400">
+            <a:solidFill>
+              <a:srgbClr val="B87300"/>
+            </a:solidFill>
+            <a:prstDash val="solid"/>
+          </a:ln>
+        </p:spPr>
+      </p:sp>
+      <p:sp>
+        <p:nvSpPr>
+          <p:cNvPr id="35" name="Text 33"/>
+          <p:cNvSpPr txBox="1"/>
+          <p:nvPr/>
+        </p:nvSpPr>
+        <p:spPr>
+          <a:xfrm>
+            <a:off x="10497312" y="1335024"/>
+            <a:ext cx="1188720" cy="274320"/>
+          </a:xfrm>
+          <a:prstGeom prst="rect">
+            <a:avLst/>
+          </a:prstGeom>
+          <a:noFill/>
+          <a:ln/>
+        </p:spPr>
+        <p:txBody>
+          <a:bodyPr wrap="square" lIns="0" tIns="0" rIns="0" bIns="0" rtlCol="0" anchor="ctr"/>
+          <a:lstStyle/>
+          <a:p>
+            <a:pPr indent="0" marL="0">
+              <a:buNone/>
+            </a:pPr>
+            <a:r>
+              <a:rPr lang="en-US" sz="1000" dirty="0">
+                <a:solidFill>
+                  <a:schemeClr val="accent4"/>
+                </a:solidFill>
+              </a:rPr>
+              <a:t>Por vencer</a:t>
+            </a:r>
+            <a:endParaRPr lang="en-US" sz="1000" dirty="0"/>
+          </a:p>
+        </p:txBody>
+      </p:sp>
+      <p:sp>
+        <p:nvSpPr>
+          <p:cNvPr id="36" name="Text 34"/>
           <p:cNvSpPr txBox="1"/>
           <p:nvPr/>
         </p:nvSpPr>
@@ -4370,7 +8078,7 @@
       </p:sp>
       <p:sp>
         <p:nvSpPr>
-          <p:cNvPr id="33" name="Vencimiento 16/10/2026"/>
+          <p:cNvPr id="37" name="Vencimiento 16/10/2026"/>
           <p:cNvSpPr/>
           <p:nvPr/>
         </p:nvSpPr>
@@ -4397,14 +8105,63 @@
       </p:sp>
       <p:sp>
         <p:nvSpPr>
-          <p:cNvPr id="34" name="Text 32"/>
+          <p:cNvPr id="38" name="Círculo 16/10/2026"/>
+          <p:cNvSpPr/>
+          <p:nvPr/>
+        </p:nvSpPr>
+        <p:spPr>
+          <a:xfrm>
+            <a:off x="2384298" y="4818888"/>
+            <a:ext cx="457200" cy="457200"/>
+          </a:xfrm>
+          <a:prstGeom prst="ellipse">
+            <a:avLst/>
+          </a:prstGeom>
+          <a:solidFill>
+            <a:schemeClr val="accent6"/>
+          </a:solidFill>
+          <a:ln w="12700">
+            <a:solidFill>
+              <a:schemeClr val="accent6"/>
+            </a:solidFill>
+            <a:prstDash val="solid"/>
+          </a:ln>
+        </p:spPr>
+      </p:sp>
+      <p:pic>
+        <p:nvPicPr>
+          <p:cNvPr id="39" name="Icono 16/10/2026" descr="preencoded.png">    </p:cNvPr>
+          <p:cNvPicPr>
+            <a:picLocks noChangeAspect="1"/>
+          </p:cNvPicPr>
+          <p:nvPr/>
+        </p:nvPicPr>
+        <p:blipFill>
+          <a:blip r:embed="rId1"/>
+          <a:stretch>
+            <a:fillRect/>
+          </a:stretch>
+        </p:blipFill>
+        <p:spPr>
+          <a:xfrm>
+            <a:off x="2507742" y="4942332"/>
+            <a:ext cx="210312" cy="210312"/>
+          </a:xfrm>
+          <a:prstGeom prst="rect">
+            <a:avLst/>
+          </a:prstGeom>
+        </p:spPr>
+      </p:pic>
+      <p:sp>
+        <p:nvSpPr>
+          <p:cNvPr id="40" name="Text 37"/>
           <p:cNvSpPr txBox="1"/>
           <p:nvPr/>
         </p:nvSpPr>
         <p:spPr>
           <a:xfrm>
             <a:off x="658368" y="4727448"/>
-            <a:ext cx="2210562" cy="640080"/>
+            <a:ext cx="1607058" cy="640080"/>
           </a:xfrm>
           <a:prstGeom prst="rect">
             <a:avLst/>
@@ -4422,7 +8179,7 @@
             <a:r>
               <a:rPr lang="en-US" sz="4000" b="1" dirty="0">
                 <a:solidFill>
-                  <a:srgbClr val="F2B233"/>
+                  <a:schemeClr val="accent6"/>
                 </a:solidFill>
               </a:rPr>
               <a:t>6</a:t>
@@ -4444,7 +8201,7 @@
       </p:sp>
       <p:sp>
         <p:nvSpPr>
-          <p:cNvPr id="35" name="Text 33"/>
+          <p:cNvPr id="41" name="Text 38"/>
           <p:cNvSpPr txBox="1"/>
           <p:nvPr/>
         </p:nvSpPr>
@@ -4508,7 +8265,7 @@
       </p:sp>
       <p:sp>
         <p:nvSpPr>
-          <p:cNvPr id="36" name="Vencimiento 23/10/2026"/>
+          <p:cNvPr id="42" name="Vencimiento 23/10/2026"/>
           <p:cNvSpPr/>
           <p:nvPr/>
         </p:nvSpPr>
@@ -4535,14 +8292,63 @@
       </p:sp>
       <p:sp>
         <p:nvSpPr>
-          <p:cNvPr id="37" name="Text 35"/>
+          <p:cNvPr id="43" name="Círculo 23/10/2026"/>
+          <p:cNvSpPr/>
+          <p:nvPr/>
+        </p:nvSpPr>
+        <p:spPr>
+          <a:xfrm>
+            <a:off x="5271516" y="4818888"/>
+            <a:ext cx="457200" cy="457200"/>
+          </a:xfrm>
+          <a:prstGeom prst="ellipse">
+            <a:avLst/>
+          </a:prstGeom>
+          <a:solidFill>
+            <a:schemeClr val="tx2"/>
+          </a:solidFill>
+          <a:ln w="12700">
+            <a:solidFill>
+              <a:schemeClr val="tx2"/>
+            </a:solidFill>
+            <a:prstDash val="solid"/>
+          </a:ln>
+        </p:spPr>
+      </p:sp>
+      <p:pic>
+        <p:nvPicPr>
+          <p:cNvPr id="44" name="Icono 23/10/2026" descr="preencoded.png">    </p:cNvPr>
+          <p:cNvPicPr>
+            <a:picLocks noChangeAspect="1"/>
+          </p:cNvPicPr>
+          <p:nvPr/>
+        </p:nvPicPr>
+        <p:blipFill>
+          <a:blip r:embed="rId2"/>
+          <a:stretch>
+            <a:fillRect/>
+          </a:stretch>
+        </p:blipFill>
+        <p:spPr>
+          <a:xfrm>
+            <a:off x="5394960" y="4942332"/>
+            <a:ext cx="210312" cy="210312"/>
+          </a:xfrm>
+          <a:prstGeom prst="rect">
+            <a:avLst/>
+          </a:prstGeom>
+        </p:spPr>
+      </p:pic>
+      <p:sp>
+        <p:nvSpPr>
+          <p:cNvPr id="45" name="Text 41"/>
           <p:cNvSpPr txBox="1"/>
           <p:nvPr/>
         </p:nvSpPr>
         <p:spPr>
           <a:xfrm>
             <a:off x="3545586" y="4727448"/>
-            <a:ext cx="2210562" cy="640080"/>
+            <a:ext cx="1607058" cy="640080"/>
           </a:xfrm>
           <a:prstGeom prst="rect">
             <a:avLst/>
@@ -4582,7 +8388,7 @@
       </p:sp>
       <p:sp>
         <p:nvSpPr>
-          <p:cNvPr id="38" name="Text 36"/>
+          <p:cNvPr id="46" name="Text 42"/>
           <p:cNvSpPr txBox="1"/>
           <p:nvPr/>
         </p:nvSpPr>
@@ -4646,7 +8452,7 @@
       </p:sp>
       <p:sp>
         <p:nvSpPr>
-          <p:cNvPr id="39" name="Vencimiento 30/10/2026"/>
+          <p:cNvPr id="47" name="Vencimiento 30/10/2026"/>
           <p:cNvSpPr/>
           <p:nvPr/>
         </p:nvSpPr>
@@ -4673,14 +8479,63 @@
       </p:sp>
       <p:sp>
         <p:nvSpPr>
-          <p:cNvPr id="40" name="Text 38"/>
+          <p:cNvPr id="48" name="Círculo 30/10/2026"/>
+          <p:cNvSpPr/>
+          <p:nvPr/>
+        </p:nvSpPr>
+        <p:spPr>
+          <a:xfrm>
+            <a:off x="8158734" y="4818888"/>
+            <a:ext cx="457200" cy="457200"/>
+          </a:xfrm>
+          <a:prstGeom prst="ellipse">
+            <a:avLst/>
+          </a:prstGeom>
+          <a:solidFill>
+            <a:schemeClr val="tx2"/>
+          </a:solidFill>
+          <a:ln w="12700">
+            <a:solidFill>
+              <a:schemeClr val="tx2"/>
+            </a:solidFill>
+            <a:prstDash val="solid"/>
+          </a:ln>
+        </p:spPr>
+      </p:sp>
+      <p:pic>
+        <p:nvPicPr>
+          <p:cNvPr id="49" name="Icono 30/10/2026" descr="preencoded.png">    </p:cNvPr>
+          <p:cNvPicPr>
+            <a:picLocks noChangeAspect="1"/>
+          </p:cNvPicPr>
+          <p:nvPr/>
+        </p:nvPicPr>
+        <p:blipFill>
+          <a:blip r:embed="rId3"/>
+          <a:stretch>
+            <a:fillRect/>
+          </a:stretch>
+        </p:blipFill>
+        <p:spPr>
+          <a:xfrm>
+            <a:off x="8282178" y="4942332"/>
+            <a:ext cx="210312" cy="210312"/>
+          </a:xfrm>
+          <a:prstGeom prst="rect">
+            <a:avLst/>
+          </a:prstGeom>
+        </p:spPr>
+      </p:pic>
+      <p:sp>
+        <p:nvSpPr>
+          <p:cNvPr id="50" name="Text 45"/>
           <p:cNvSpPr txBox="1"/>
           <p:nvPr/>
         </p:nvSpPr>
         <p:spPr>
           <a:xfrm>
             <a:off x="6432804" y="4727448"/>
-            <a:ext cx="2210562" cy="640080"/>
+            <a:ext cx="1607058" cy="640080"/>
           </a:xfrm>
           <a:prstGeom prst="rect">
             <a:avLst/>
@@ -4720,7 +8575,7 @@
       </p:sp>
       <p:sp>
         <p:nvSpPr>
-          <p:cNvPr id="41" name="Text 39"/>
+          <p:cNvPr id="51" name="Text 46"/>
           <p:cNvSpPr txBox="1"/>
           <p:nvPr/>
         </p:nvSpPr>
@@ -4784,7 +8639,7 @@
       </p:sp>
       <p:sp>
         <p:nvSpPr>
-          <p:cNvPr id="42" name="Vencimiento 03/11/2026"/>
+          <p:cNvPr id="52" name="Vencimiento 03/11/2026"/>
           <p:cNvSpPr/>
           <p:nvPr/>
         </p:nvSpPr>
@@ -4811,14 +8666,63 @@
       </p:sp>
       <p:sp>
         <p:nvSpPr>
-          <p:cNvPr id="43" name="Text 41"/>
+          <p:cNvPr id="53" name="Círculo 03/11/2026"/>
+          <p:cNvSpPr/>
+          <p:nvPr/>
+        </p:nvSpPr>
+        <p:spPr>
+          <a:xfrm>
+            <a:off x="11045952" y="4818888"/>
+            <a:ext cx="457200" cy="457200"/>
+          </a:xfrm>
+          <a:prstGeom prst="ellipse">
+            <a:avLst/>
+          </a:prstGeom>
+          <a:solidFill>
+            <a:schemeClr val="tx2"/>
+          </a:solidFill>
+          <a:ln w="12700">
+            <a:solidFill>
+              <a:schemeClr val="tx2"/>
+            </a:solidFill>
+            <a:prstDash val="solid"/>
+          </a:ln>
+        </p:spPr>
+      </p:sp>
+      <p:pic>
+        <p:nvPicPr>
+          <p:cNvPr id="54" name="Icono 03/11/2026" descr="preencoded.png">    </p:cNvPr>
+          <p:cNvPicPr>
+            <a:picLocks noChangeAspect="1"/>
+          </p:cNvPicPr>
+          <p:nvPr/>
+        </p:nvPicPr>
+        <p:blipFill>
+          <a:blip r:embed="rId4"/>
+          <a:stretch>
+            <a:fillRect/>
+          </a:stretch>
+        </p:blipFill>
+        <p:spPr>
+          <a:xfrm>
+            <a:off x="11169396" y="4942332"/>
+            <a:ext cx="210312" cy="210312"/>
+          </a:xfrm>
+          <a:prstGeom prst="rect">
+            <a:avLst/>
+          </a:prstGeom>
+        </p:spPr>
+      </p:pic>
+      <p:sp>
+        <p:nvSpPr>
+          <p:cNvPr id="55" name="Text 49"/>
           <p:cNvSpPr txBox="1"/>
           <p:nvPr/>
         </p:nvSpPr>
         <p:spPr>
           <a:xfrm>
             <a:off x="9320022" y="4727448"/>
-            <a:ext cx="2210562" cy="640080"/>
+            <a:ext cx="1607058" cy="640080"/>
           </a:xfrm>
           <a:prstGeom prst="rect">
             <a:avLst/>
@@ -4858,7 +8762,7 @@
       </p:sp>
       <p:sp>
         <p:nvSpPr>
-          <p:cNvPr id="44" name="Text 42"/>
+          <p:cNvPr id="56" name="Text 50"/>
           <p:cNvSpPr txBox="1"/>
           <p:nvPr/>
         </p:nvSpPr>
@@ -4915,6 +8819,1328 @@
                 </a:solidFill>
               </a:rPr>
               <a:t>Circular 22737</a:t>
+            </a:r>
+            <a:endParaRPr lang="en-US" sz="1200" dirty="0"/>
+          </a:p>
+        </p:txBody>
+      </p:sp>
+    </p:spTree>
+  </p:cSld>
+  <p:clrMapOvr>
+    <a:masterClrMapping/>
+  </p:clrMapOvr>
+</p:sld>
+</file>
+
+<file path=ppt/slides/slide5.xml><?xml version="1.0" encoding="utf-8"?>
+<p:sld xmlns:a="http://schemas.openxmlformats.org/drawingml/2006/main" xmlns:r="http://schemas.openxmlformats.org/officeDocument/2006/relationships" xmlns:p="http://schemas.openxmlformats.org/presentationml/2006/main">
+  <p:cSld name="Slide 5">
+    <p:spTree>
+      <p:nvGrpSpPr>
+        <p:cNvPr id="1" name=""/>
+        <p:cNvGrpSpPr/>
+        <p:nvPr/>
+      </p:nvGrpSpPr>
+      <p:grpSpPr>
+        <a:xfrm>
+          <a:off x="0" y="0"/>
+          <a:ext cx="0" cy="0"/>
+          <a:chOff x="0" y="0"/>
+          <a:chExt cx="0" cy="0"/>
+        </a:xfrm>
+      </p:grpSpPr>
+      <p:sp>
+        <p:nvSpPr>
+          <p:cNvPr id="2" name="Text 0"/>
+          <p:cNvSpPr/>
+          <p:nvPr>
+            <p:ph idx="100" type="title" hasCustomPrompt="1"/>
+          </p:nvPr>
+        </p:nvSpPr>
+        <p:spPr>
+          <a:xfrm>
+            <a:off x="457200" y="274320"/>
+            <a:ext cx="8686800" cy="548640"/>
+          </a:xfrm>
+          <a:prstGeom prst="rect">
+            <a:avLst/>
+          </a:prstGeom>
+          <a:noFill/>
+          <a:ln/>
+        </p:spPr>
+        <p:txBody>
+          <a:bodyPr wrap="square" lIns="0" tIns="0" rIns="0" bIns="0" rtlCol="0" anchor="ctr"/>
+          <a:lstStyle/>
+          <a:p>
+            <a:pPr algn="l" indent="0" marL="0">
+              <a:buNone/>
+            </a:pPr>
+            <a:r>
+              <a:rPr lang="en-US" sz="3000" b="1" dirty="0">
+                <a:solidFill>
+                  <a:schemeClr val="bg1"/>
+                </a:solidFill>
+              </a:rPr>
+              <a:t>Prioridades de las próximas semanas</a:t>
+            </a:r>
+            <a:endParaRPr lang="en-US" sz="3000" dirty="0"/>
+          </a:p>
+        </p:txBody>
+      </p:sp>
+      <p:sp>
+        <p:nvSpPr>
+          <p:cNvPr id="3" name="Text 0"/>
+          <p:cNvSpPr/>
+          <p:nvPr>
+            <p:ph idx="101" type="body" hasCustomPrompt="1"/>
+          </p:nvPr>
+        </p:nvSpPr>
+        <p:spPr>
+          <a:xfrm>
+            <a:off x="457200" y="804672"/>
+            <a:ext cx="8686800" cy="292608"/>
+          </a:xfrm>
+          <a:prstGeom prst="rect">
+            <a:avLst/>
+          </a:prstGeom>
+          <a:noFill/>
+          <a:ln/>
+        </p:spPr>
+        <p:txBody>
+          <a:bodyPr wrap="square" lIns="0" tIns="0" rIns="0" bIns="0" rtlCol="0" anchor="ctr"/>
+          <a:lstStyle/>
+          <a:p>
+            <a:pPr algn="l" indent="0" marL="0">
+              <a:buNone/>
+            </a:pPr>
+            <a:r>
+              <a:rPr lang="en-US" sz="1300" dirty="0">
+                <a:solidFill>
+                  <a:schemeClr val="accent5"/>
+                </a:solidFill>
+              </a:rPr>
+              <a:t>Compromisos con fecha y frentes en ejecución</a:t>
+            </a:r>
+            <a:endParaRPr lang="en-US" sz="1300" dirty="0"/>
+          </a:p>
+        </p:txBody>
+      </p:sp>
+      <p:sp>
+        <p:nvSpPr>
+          <p:cNvPr id="4" name="Text 2"/>
+          <p:cNvSpPr txBox="1"/>
+          <p:nvPr/>
+        </p:nvSpPr>
+        <p:spPr>
+          <a:xfrm>
+            <a:off x="457200" y="1417320"/>
+            <a:ext cx="6766560" cy="274320"/>
+          </a:xfrm>
+          <a:prstGeom prst="rect">
+            <a:avLst/>
+          </a:prstGeom>
+          <a:noFill/>
+          <a:ln/>
+        </p:spPr>
+        <p:txBody>
+          <a:bodyPr wrap="square" lIns="0" tIns="0" rIns="0" bIns="0" rtlCol="0" anchor="ctr"/>
+          <a:lstStyle/>
+          <a:p>
+            <a:pPr indent="0" marL="0">
+              <a:buNone/>
+            </a:pPr>
+            <a:r>
+              <a:rPr lang="en-US" sz="1100" b="1" spc="150" kern="0" dirty="0">
+                <a:solidFill>
+                  <a:schemeClr val="accent6"/>
+                </a:solidFill>
+              </a:rPr>
+              <a:t>COMPROMISOS SSF</a:t>
+            </a:r>
+            <a:endParaRPr lang="en-US" sz="1100" dirty="0"/>
+          </a:p>
+        </p:txBody>
+      </p:sp>
+      <p:sp>
+        <p:nvSpPr>
+          <p:cNvPr id="5" name="Prioridad 16/10"/>
+          <p:cNvSpPr/>
+          <p:nvPr/>
+        </p:nvSpPr>
+        <p:spPr>
+          <a:xfrm>
+            <a:off x="457200" y="1783080"/>
+            <a:ext cx="6766560" cy="960120"/>
+          </a:xfrm>
+          <a:prstGeom prst="roundRect">
+            <a:avLst>
+              <a:gd name="adj" fmla="val 11429"/>
+            </a:avLst>
+          </a:prstGeom>
+          <a:solidFill>
+            <a:srgbClr val="15396B"/>
+          </a:solidFill>
+          <a:ln w="12700">
+            <a:solidFill>
+              <a:srgbClr val="15396B"/>
+            </a:solidFill>
+            <a:prstDash val="solid"/>
+          </a:ln>
+        </p:spPr>
+      </p:sp>
+      <p:sp>
+        <p:nvSpPr>
+          <p:cNvPr id="6" name="Círculo 16/10"/>
+          <p:cNvSpPr/>
+          <p:nvPr/>
+        </p:nvSpPr>
+        <p:spPr>
+          <a:xfrm>
+            <a:off x="658368" y="2002536"/>
+            <a:ext cx="530352" cy="530352"/>
+          </a:xfrm>
+          <a:prstGeom prst="ellipse">
+            <a:avLst/>
+          </a:prstGeom>
+          <a:solidFill>
+            <a:schemeClr val="accent6"/>
+          </a:solidFill>
+          <a:ln w="12700">
+            <a:solidFill>
+              <a:schemeClr val="accent6"/>
+            </a:solidFill>
+            <a:prstDash val="solid"/>
+          </a:ln>
+        </p:spPr>
+      </p:sp>
+      <p:pic>
+        <p:nvPicPr>
+          <p:cNvPr id="7" name="Icono 16/10" descr="preencoded.png">    </p:cNvPr>
+          <p:cNvPicPr>
+            <a:picLocks noChangeAspect="1"/>
+          </p:cNvPicPr>
+          <p:nvPr/>
+        </p:nvPicPr>
+        <p:blipFill>
+          <a:blip r:embed="rId1"/>
+          <a:stretch>
+            <a:fillRect/>
+          </a:stretch>
+        </p:blipFill>
+        <p:spPr>
+          <a:xfrm>
+            <a:off x="801563" y="2145731"/>
+            <a:ext cx="243962" cy="243962"/>
+          </a:xfrm>
+          <a:prstGeom prst="rect">
+            <a:avLst/>
+          </a:prstGeom>
+        </p:spPr>
+      </p:pic>
+      <p:sp>
+        <p:nvSpPr>
+          <p:cNvPr id="8" name="Text 5"/>
+          <p:cNvSpPr txBox="1"/>
+          <p:nvPr/>
+        </p:nvSpPr>
+        <p:spPr>
+          <a:xfrm>
+            <a:off x="1371600" y="1783080"/>
+            <a:ext cx="1005840" cy="960120"/>
+          </a:xfrm>
+          <a:prstGeom prst="rect">
+            <a:avLst/>
+          </a:prstGeom>
+          <a:noFill/>
+          <a:ln/>
+        </p:spPr>
+        <p:txBody>
+          <a:bodyPr wrap="square" lIns="0" tIns="0" rIns="0" bIns="0" rtlCol="0" anchor="ctr"/>
+          <a:lstStyle/>
+          <a:p>
+            <a:pPr indent="0" marL="0">
+              <a:buNone/>
+            </a:pPr>
+            <a:r>
+              <a:rPr lang="en-US" sz="2400" b="1" dirty="0">
+                <a:solidFill>
+                  <a:schemeClr val="accent6"/>
+                </a:solidFill>
+              </a:rPr>
+              <a:t>16/10</a:t>
+            </a:r>
+            <a:endParaRPr lang="en-US" sz="2400" dirty="0"/>
+          </a:p>
+        </p:txBody>
+      </p:sp>
+      <p:sp>
+        <p:nvSpPr>
+          <p:cNvPr id="9" name="Text 6"/>
+          <p:cNvSpPr txBox="1"/>
+          <p:nvPr/>
+        </p:nvSpPr>
+        <p:spPr>
+          <a:xfrm>
+            <a:off x="2423160" y="1783080"/>
+            <a:ext cx="4663440" cy="960120"/>
+          </a:xfrm>
+          <a:prstGeom prst="rect">
+            <a:avLst/>
+          </a:prstGeom>
+          <a:noFill/>
+          <a:ln/>
+        </p:spPr>
+        <p:txBody>
+          <a:bodyPr wrap="square" lIns="0" tIns="0" rIns="0" bIns="0" rtlCol="0" anchor="ctr"/>
+          <a:lstStyle/>
+          <a:p>
+            <a:pPr indent="0" marL="0">
+              <a:buNone/>
+            </a:pPr>
+            <a:r>
+              <a:rPr lang="en-US" sz="1400" b="1" dirty="0">
+                <a:solidFill>
+                  <a:schemeClr val="bg1"/>
+                </a:solidFill>
+              </a:rPr>
+              <a:t>Responder resultados preliminares PLD/FT</a:t>
+            </a:r>
+            <a:endParaRPr lang="en-US" sz="1400" dirty="0"/>
+          </a:p>
+          <a:p>
+            <a:pPr indent="0" marL="0">
+              <a:buNone/>
+            </a:pPr>
+            <a:r>
+              <a:rPr lang="en-US" sz="1100" dirty="0">
+                <a:solidFill>
+                  <a:schemeClr val="accent5"/>
+                </a:solidFill>
+              </a:rPr>
+              <a:t>Circular 23486</a:t>
+            </a:r>
+            <a:endParaRPr lang="en-US" sz="1400" dirty="0"/>
+          </a:p>
+        </p:txBody>
+      </p:sp>
+      <p:sp>
+        <p:nvSpPr>
+          <p:cNvPr id="10" name="Prioridad 23/10"/>
+          <p:cNvSpPr/>
+          <p:nvPr/>
+        </p:nvSpPr>
+        <p:spPr>
+          <a:xfrm>
+            <a:off x="457200" y="2880360"/>
+            <a:ext cx="6766560" cy="960120"/>
+          </a:xfrm>
+          <a:prstGeom prst="roundRect">
+            <a:avLst>
+              <a:gd name="adj" fmla="val 11429"/>
+            </a:avLst>
+          </a:prstGeom>
+          <a:solidFill>
+            <a:srgbClr val="15396B"/>
+          </a:solidFill>
+          <a:ln w="12700">
+            <a:solidFill>
+              <a:srgbClr val="15396B"/>
+            </a:solidFill>
+            <a:prstDash val="solid"/>
+          </a:ln>
+        </p:spPr>
+      </p:sp>
+      <p:sp>
+        <p:nvSpPr>
+          <p:cNvPr id="11" name="Círculo 23/10"/>
+          <p:cNvSpPr/>
+          <p:nvPr/>
+        </p:nvSpPr>
+        <p:spPr>
+          <a:xfrm>
+            <a:off x="658368" y="3099816"/>
+            <a:ext cx="530352" cy="530352"/>
+          </a:xfrm>
+          <a:prstGeom prst="ellipse">
+            <a:avLst/>
+          </a:prstGeom>
+          <a:solidFill>
+            <a:schemeClr val="accent3"/>
+          </a:solidFill>
+          <a:ln w="12700">
+            <a:solidFill>
+              <a:schemeClr val="accent3"/>
+            </a:solidFill>
+            <a:prstDash val="solid"/>
+          </a:ln>
+        </p:spPr>
+      </p:sp>
+      <p:pic>
+        <p:nvPicPr>
+          <p:cNvPr id="12" name="Icono 23/10" descr="preencoded.png">    </p:cNvPr>
+          <p:cNvPicPr>
+            <a:picLocks noChangeAspect="1"/>
+          </p:cNvPicPr>
+          <p:nvPr/>
+        </p:nvPicPr>
+        <p:blipFill>
+          <a:blip r:embed="rId2"/>
+          <a:stretch>
+            <a:fillRect/>
+          </a:stretch>
+        </p:blipFill>
+        <p:spPr>
+          <a:xfrm>
+            <a:off x="801563" y="3243011"/>
+            <a:ext cx="243962" cy="243962"/>
+          </a:xfrm>
+          <a:prstGeom prst="rect">
+            <a:avLst/>
+          </a:prstGeom>
+        </p:spPr>
+      </p:pic>
+      <p:sp>
+        <p:nvSpPr>
+          <p:cNvPr id="13" name="Text 9"/>
+          <p:cNvSpPr txBox="1"/>
+          <p:nvPr/>
+        </p:nvSpPr>
+        <p:spPr>
+          <a:xfrm>
+            <a:off x="1371600" y="2880360"/>
+            <a:ext cx="1005840" cy="960120"/>
+          </a:xfrm>
+          <a:prstGeom prst="rect">
+            <a:avLst/>
+          </a:prstGeom>
+          <a:noFill/>
+          <a:ln/>
+        </p:spPr>
+        <p:txBody>
+          <a:bodyPr wrap="square" lIns="0" tIns="0" rIns="0" bIns="0" rtlCol="0" anchor="ctr"/>
+          <a:lstStyle/>
+          <a:p>
+            <a:pPr indent="0" marL="0">
+              <a:buNone/>
+            </a:pPr>
+            <a:r>
+              <a:rPr lang="en-US" sz="2400" b="1" dirty="0">
+                <a:solidFill>
+                  <a:schemeClr val="accent6"/>
+                </a:solidFill>
+              </a:rPr>
+              <a:t>23/10</a:t>
+            </a:r>
+            <a:endParaRPr lang="en-US" sz="2400" dirty="0"/>
+          </a:p>
+        </p:txBody>
+      </p:sp>
+      <p:sp>
+        <p:nvSpPr>
+          <p:cNvPr id="14" name="Text 10"/>
+          <p:cNvSpPr txBox="1"/>
+          <p:nvPr/>
+        </p:nvSpPr>
+        <p:spPr>
+          <a:xfrm>
+            <a:off x="2423160" y="2880360"/>
+            <a:ext cx="4663440" cy="960120"/>
+          </a:xfrm>
+          <a:prstGeom prst="rect">
+            <a:avLst/>
+          </a:prstGeom>
+          <a:noFill/>
+          <a:ln/>
+        </p:spPr>
+        <p:txBody>
+          <a:bodyPr wrap="square" lIns="0" tIns="0" rIns="0" bIns="0" rtlCol="0" anchor="ctr"/>
+          <a:lstStyle/>
+          <a:p>
+            <a:pPr indent="0" marL="0">
+              <a:buNone/>
+            </a:pPr>
+            <a:r>
+              <a:rPr lang="en-US" sz="1400" b="1" dirty="0">
+                <a:solidFill>
+                  <a:schemeClr val="bg1"/>
+                </a:solidFill>
+              </a:rPr>
+              <a:t>Enviar nuevas observaciones de Gobierno Corporativo</a:t>
+            </a:r>
+            <a:endParaRPr lang="en-US" sz="1400" dirty="0"/>
+          </a:p>
+          <a:p>
+            <a:pPr indent="0" marL="0">
+              <a:buNone/>
+            </a:pPr>
+            <a:r>
+              <a:rPr lang="en-US" sz="1100" dirty="0">
+                <a:solidFill>
+                  <a:schemeClr val="accent5"/>
+                </a:solidFill>
+              </a:rPr>
+              <a:t>Circular 22741</a:t>
+            </a:r>
+            <a:endParaRPr lang="en-US" sz="1400" dirty="0"/>
+          </a:p>
+        </p:txBody>
+      </p:sp>
+      <p:sp>
+        <p:nvSpPr>
+          <p:cNvPr id="15" name="Prioridad 30/10"/>
+          <p:cNvSpPr/>
+          <p:nvPr/>
+        </p:nvSpPr>
+        <p:spPr>
+          <a:xfrm>
+            <a:off x="457200" y="3977640"/>
+            <a:ext cx="6766560" cy="960120"/>
+          </a:xfrm>
+          <a:prstGeom prst="roundRect">
+            <a:avLst>
+              <a:gd name="adj" fmla="val 11429"/>
+            </a:avLst>
+          </a:prstGeom>
+          <a:solidFill>
+            <a:srgbClr val="15396B"/>
+          </a:solidFill>
+          <a:ln w="12700">
+            <a:solidFill>
+              <a:srgbClr val="15396B"/>
+            </a:solidFill>
+            <a:prstDash val="solid"/>
+          </a:ln>
+        </p:spPr>
+      </p:sp>
+      <p:sp>
+        <p:nvSpPr>
+          <p:cNvPr id="16" name="Círculo 30/10"/>
+          <p:cNvSpPr/>
+          <p:nvPr/>
+        </p:nvSpPr>
+        <p:spPr>
+          <a:xfrm>
+            <a:off x="658368" y="4197096"/>
+            <a:ext cx="530352" cy="530352"/>
+          </a:xfrm>
+          <a:prstGeom prst="ellipse">
+            <a:avLst/>
+          </a:prstGeom>
+          <a:solidFill>
+            <a:schemeClr val="accent3"/>
+          </a:solidFill>
+          <a:ln w="12700">
+            <a:solidFill>
+              <a:schemeClr val="accent3"/>
+            </a:solidFill>
+            <a:prstDash val="solid"/>
+          </a:ln>
+        </p:spPr>
+      </p:sp>
+      <p:pic>
+        <p:nvPicPr>
+          <p:cNvPr id="17" name="Icono 30/10" descr="preencoded.png">    </p:cNvPr>
+          <p:cNvPicPr>
+            <a:picLocks noChangeAspect="1"/>
+          </p:cNvPicPr>
+          <p:nvPr/>
+        </p:nvPicPr>
+        <p:blipFill>
+          <a:blip r:embed="rId3"/>
+          <a:stretch>
+            <a:fillRect/>
+          </a:stretch>
+        </p:blipFill>
+        <p:spPr>
+          <a:xfrm>
+            <a:off x="801563" y="4340291"/>
+            <a:ext cx="243962" cy="243962"/>
+          </a:xfrm>
+          <a:prstGeom prst="rect">
+            <a:avLst/>
+          </a:prstGeom>
+        </p:spPr>
+      </p:pic>
+      <p:sp>
+        <p:nvSpPr>
+          <p:cNvPr id="18" name="Text 13"/>
+          <p:cNvSpPr txBox="1"/>
+          <p:nvPr/>
+        </p:nvSpPr>
+        <p:spPr>
+          <a:xfrm>
+            <a:off x="1371600" y="3977640"/>
+            <a:ext cx="1005840" cy="960120"/>
+          </a:xfrm>
+          <a:prstGeom prst="rect">
+            <a:avLst/>
+          </a:prstGeom>
+          <a:noFill/>
+          <a:ln/>
+        </p:spPr>
+        <p:txBody>
+          <a:bodyPr wrap="square" lIns="0" tIns="0" rIns="0" bIns="0" rtlCol="0" anchor="ctr"/>
+          <a:lstStyle/>
+          <a:p>
+            <a:pPr indent="0" marL="0">
+              <a:buNone/>
+            </a:pPr>
+            <a:r>
+              <a:rPr lang="en-US" sz="2400" b="1" dirty="0">
+                <a:solidFill>
+                  <a:schemeClr val="accent6"/>
+                </a:solidFill>
+              </a:rPr>
+              <a:t>30/10</a:t>
+            </a:r>
+            <a:endParaRPr lang="en-US" sz="2400" dirty="0"/>
+          </a:p>
+        </p:txBody>
+      </p:sp>
+      <p:sp>
+        <p:nvSpPr>
+          <p:cNvPr id="19" name="Text 14"/>
+          <p:cNvSpPr txBox="1"/>
+          <p:nvPr/>
+        </p:nvSpPr>
+        <p:spPr>
+          <a:xfrm>
+            <a:off x="2423160" y="3977640"/>
+            <a:ext cx="4663440" cy="960120"/>
+          </a:xfrm>
+          <a:prstGeom prst="rect">
+            <a:avLst/>
+          </a:prstGeom>
+          <a:noFill/>
+          <a:ln/>
+        </p:spPr>
+        <p:txBody>
+          <a:bodyPr wrap="square" lIns="0" tIns="0" rIns="0" bIns="0" rtlCol="0" anchor="ctr"/>
+          <a:lstStyle/>
+          <a:p>
+            <a:pPr indent="0" marL="0">
+              <a:buNone/>
+            </a:pPr>
+            <a:r>
+              <a:rPr lang="en-US" sz="1400" b="1" dirty="0">
+                <a:solidFill>
+                  <a:schemeClr val="bg1"/>
+                </a:solidFill>
+              </a:rPr>
+              <a:t>Enviar seguimiento de observaciones de Gobierno Corporativo</a:t>
+            </a:r>
+            <a:endParaRPr lang="en-US" sz="1400" dirty="0"/>
+          </a:p>
+          <a:p>
+            <a:pPr indent="0" marL="0">
+              <a:buNone/>
+            </a:pPr>
+            <a:r>
+              <a:rPr lang="en-US" sz="1100" dirty="0">
+                <a:solidFill>
+                  <a:schemeClr val="accent5"/>
+                </a:solidFill>
+              </a:rPr>
+              <a:t>Circular 22741 · incluye pruebas de descargo</a:t>
+            </a:r>
+            <a:endParaRPr lang="en-US" sz="1400" dirty="0"/>
+          </a:p>
+        </p:txBody>
+      </p:sp>
+      <p:sp>
+        <p:nvSpPr>
+          <p:cNvPr id="20" name="Prioridad 03/11"/>
+          <p:cNvSpPr/>
+          <p:nvPr/>
+        </p:nvSpPr>
+        <p:spPr>
+          <a:xfrm>
+            <a:off x="457200" y="5074920"/>
+            <a:ext cx="6766560" cy="960120"/>
+          </a:xfrm>
+          <a:prstGeom prst="roundRect">
+            <a:avLst>
+              <a:gd name="adj" fmla="val 11429"/>
+            </a:avLst>
+          </a:prstGeom>
+          <a:solidFill>
+            <a:srgbClr val="15396B"/>
+          </a:solidFill>
+          <a:ln w="12700">
+            <a:solidFill>
+              <a:srgbClr val="15396B"/>
+            </a:solidFill>
+            <a:prstDash val="solid"/>
+          </a:ln>
+        </p:spPr>
+      </p:sp>
+      <p:sp>
+        <p:nvSpPr>
+          <p:cNvPr id="21" name="Círculo 03/11"/>
+          <p:cNvSpPr/>
+          <p:nvPr/>
+        </p:nvSpPr>
+        <p:spPr>
+          <a:xfrm>
+            <a:off x="658368" y="5294376"/>
+            <a:ext cx="530352" cy="530352"/>
+          </a:xfrm>
+          <a:prstGeom prst="ellipse">
+            <a:avLst/>
+          </a:prstGeom>
+          <a:solidFill>
+            <a:schemeClr val="accent3"/>
+          </a:solidFill>
+          <a:ln w="12700">
+            <a:solidFill>
+              <a:schemeClr val="accent3"/>
+            </a:solidFill>
+            <a:prstDash val="solid"/>
+          </a:ln>
+        </p:spPr>
+      </p:sp>
+      <p:pic>
+        <p:nvPicPr>
+          <p:cNvPr id="22" name="Icono 03/11" descr="preencoded.png">    </p:cNvPr>
+          <p:cNvPicPr>
+            <a:picLocks noChangeAspect="1"/>
+          </p:cNvPicPr>
+          <p:nvPr/>
+        </p:nvPicPr>
+        <p:blipFill>
+          <a:blip r:embed="rId4"/>
+          <a:stretch>
+            <a:fillRect/>
+          </a:stretch>
+        </p:blipFill>
+        <p:spPr>
+          <a:xfrm>
+            <a:off x="801563" y="5437571"/>
+            <a:ext cx="243962" cy="243962"/>
+          </a:xfrm>
+          <a:prstGeom prst="rect">
+            <a:avLst/>
+          </a:prstGeom>
+        </p:spPr>
+      </p:pic>
+      <p:sp>
+        <p:nvSpPr>
+          <p:cNvPr id="23" name="Text 17"/>
+          <p:cNvSpPr txBox="1"/>
+          <p:nvPr/>
+        </p:nvSpPr>
+        <p:spPr>
+          <a:xfrm>
+            <a:off x="1371600" y="5074920"/>
+            <a:ext cx="1005840" cy="960120"/>
+          </a:xfrm>
+          <a:prstGeom prst="rect">
+            <a:avLst/>
+          </a:prstGeom>
+          <a:noFill/>
+          <a:ln/>
+        </p:spPr>
+        <p:txBody>
+          <a:bodyPr wrap="square" lIns="0" tIns="0" rIns="0" bIns="0" rtlCol="0" anchor="ctr"/>
+          <a:lstStyle/>
+          <a:p>
+            <a:pPr indent="0" marL="0">
+              <a:buNone/>
+            </a:pPr>
+            <a:r>
+              <a:rPr lang="en-US" sz="2400" b="1" dirty="0">
+                <a:solidFill>
+                  <a:schemeClr val="accent6"/>
+                </a:solidFill>
+              </a:rPr>
+              <a:t>03/11</a:t>
+            </a:r>
+            <a:endParaRPr lang="en-US" sz="2400" dirty="0"/>
+          </a:p>
+        </p:txBody>
+      </p:sp>
+      <p:sp>
+        <p:nvSpPr>
+          <p:cNvPr id="24" name="Text 18"/>
+          <p:cNvSpPr txBox="1"/>
+          <p:nvPr/>
+        </p:nvSpPr>
+        <p:spPr>
+          <a:xfrm>
+            <a:off x="2423160" y="5074920"/>
+            <a:ext cx="4663440" cy="960120"/>
+          </a:xfrm>
+          <a:prstGeom prst="rect">
+            <a:avLst/>
+          </a:prstGeom>
+          <a:noFill/>
+          <a:ln/>
+        </p:spPr>
+        <p:txBody>
+          <a:bodyPr wrap="square" lIns="0" tIns="0" rIns="0" bIns="0" rtlCol="0" anchor="ctr"/>
+          <a:lstStyle/>
+          <a:p>
+            <a:pPr indent="0" marL="0">
+              <a:buNone/>
+            </a:pPr>
+            <a:r>
+              <a:rPr lang="en-US" sz="1400" b="1" dirty="0">
+                <a:solidFill>
+                  <a:schemeClr val="bg1"/>
+                </a:solidFill>
+              </a:rPr>
+              <a:t>Enviar el Plan de Recuperación</a:t>
+            </a:r>
+            <a:endParaRPr lang="en-US" sz="1400" dirty="0"/>
+          </a:p>
+          <a:p>
+            <a:pPr indent="0" marL="0">
+              <a:buNone/>
+            </a:pPr>
+            <a:r>
+              <a:rPr lang="en-US" sz="1100" dirty="0">
+                <a:solidFill>
+                  <a:schemeClr val="accent5"/>
+                </a:solidFill>
+              </a:rPr>
+              <a:t>Circular 22737</a:t>
+            </a:r>
+            <a:endParaRPr lang="en-US" sz="1400" dirty="0"/>
+          </a:p>
+        </p:txBody>
+      </p:sp>
+      <p:sp>
+        <p:nvSpPr>
+          <p:cNvPr id="25" name="Text 19"/>
+          <p:cNvSpPr txBox="1"/>
+          <p:nvPr/>
+        </p:nvSpPr>
+        <p:spPr>
+          <a:xfrm>
+            <a:off x="7680960" y="1417320"/>
+            <a:ext cx="4023360" cy="274320"/>
+          </a:xfrm>
+          <a:prstGeom prst="rect">
+            <a:avLst/>
+          </a:prstGeom>
+          <a:noFill/>
+          <a:ln/>
+        </p:spPr>
+        <p:txBody>
+          <a:bodyPr wrap="square" lIns="0" tIns="0" rIns="0" bIns="0" rtlCol="0" anchor="ctr"/>
+          <a:lstStyle/>
+          <a:p>
+            <a:pPr indent="0" marL="0">
+              <a:buNone/>
+            </a:pPr>
+            <a:r>
+              <a:rPr lang="en-US" sz="1100" b="1" spc="150" kern="0" dirty="0">
+                <a:solidFill>
+                  <a:schemeClr val="accent6"/>
+                </a:solidFill>
+              </a:rPr>
+              <a:t>FRENTES EN EJECUCIÓN</a:t>
+            </a:r>
+            <a:endParaRPr lang="en-US" sz="1100" dirty="0"/>
+          </a:p>
+        </p:txBody>
+      </p:sp>
+      <p:sp>
+        <p:nvSpPr>
+          <p:cNvPr id="26" name="Frentes en ejecución"/>
+          <p:cNvSpPr/>
+          <p:nvPr/>
+        </p:nvSpPr>
+        <p:spPr>
+          <a:xfrm>
+            <a:off x="7680960" y="1783080"/>
+            <a:ext cx="4050792" cy="4251960"/>
+          </a:xfrm>
+          <a:prstGeom prst="roundRect">
+            <a:avLst>
+              <a:gd name="adj" fmla="val 2709"/>
+            </a:avLst>
+          </a:prstGeom>
+          <a:solidFill>
+            <a:srgbClr val="15396B"/>
+          </a:solidFill>
+          <a:ln w="12700">
+            <a:solidFill>
+              <a:srgbClr val="15396B"/>
+            </a:solidFill>
+            <a:prstDash val="solid"/>
+          </a:ln>
+        </p:spPr>
+      </p:sp>
+      <p:sp>
+        <p:nvSpPr>
+          <p:cNvPr id="27" name="Círculo Avalúos"/>
+          <p:cNvSpPr/>
+          <p:nvPr/>
+        </p:nvSpPr>
+        <p:spPr>
+          <a:xfrm>
+            <a:off x="7909560" y="2057400"/>
+            <a:ext cx="475488" cy="475488"/>
+          </a:xfrm>
+          <a:prstGeom prst="ellipse">
+            <a:avLst/>
+          </a:prstGeom>
+          <a:solidFill>
+            <a:schemeClr val="accent3"/>
+          </a:solidFill>
+          <a:ln w="12700">
+            <a:solidFill>
+              <a:schemeClr val="accent3"/>
+            </a:solidFill>
+            <a:prstDash val="solid"/>
+          </a:ln>
+        </p:spPr>
+      </p:sp>
+      <p:pic>
+        <p:nvPicPr>
+          <p:cNvPr id="28" name="Icono Avalúos" descr="preencoded.png">    </p:cNvPr>
+          <p:cNvPicPr>
+            <a:picLocks noChangeAspect="1"/>
+          </p:cNvPicPr>
+          <p:nvPr/>
+        </p:nvPicPr>
+        <p:blipFill>
+          <a:blip r:embed="rId5"/>
+          <a:stretch>
+            <a:fillRect/>
+          </a:stretch>
+        </p:blipFill>
+        <p:spPr>
+          <a:xfrm>
+            <a:off x="8037942" y="2185782"/>
+            <a:ext cx="218724" cy="218724"/>
+          </a:xfrm>
+          <a:prstGeom prst="rect">
+            <a:avLst/>
+          </a:prstGeom>
+        </p:spPr>
+      </p:pic>
+      <p:sp>
+        <p:nvSpPr>
+          <p:cNvPr id="29" name="Text 22"/>
+          <p:cNvSpPr txBox="1"/>
+          <p:nvPr/>
+        </p:nvSpPr>
+        <p:spPr>
+          <a:xfrm>
+            <a:off x="8549640" y="2011680"/>
+            <a:ext cx="2377440" cy="566928"/>
+          </a:xfrm>
+          <a:prstGeom prst="rect">
+            <a:avLst/>
+          </a:prstGeom>
+          <a:noFill/>
+          <a:ln/>
+        </p:spPr>
+        <p:txBody>
+          <a:bodyPr wrap="square" lIns="0" tIns="0" rIns="0" bIns="0" rtlCol="0" anchor="ctr"/>
+          <a:lstStyle/>
+          <a:p>
+            <a:pPr indent="0" marL="0">
+              <a:buNone/>
+            </a:pPr>
+            <a:r>
+              <a:rPr lang="en-US" sz="1400" b="1" dirty="0">
+                <a:solidFill>
+                  <a:schemeClr val="bg1"/>
+                </a:solidFill>
+              </a:rPr>
+              <a:t>Avalúos</a:t>
+            </a:r>
+            <a:endParaRPr lang="en-US" sz="1400" dirty="0"/>
+          </a:p>
+          <a:p>
+            <a:pPr indent="0" marL="0">
+              <a:buNone/>
+            </a:pPr>
+            <a:r>
+              <a:rPr lang="en-US" sz="1100" dirty="0">
+                <a:solidFill>
+                  <a:schemeClr val="accent5"/>
+                </a:solidFill>
+              </a:rPr>
+              <a:t>Política, procedimientos y perfil de revisor</a:t>
+            </a:r>
+            <a:endParaRPr lang="en-US" sz="1400" dirty="0"/>
+          </a:p>
+        </p:txBody>
+      </p:sp>
+      <p:sp>
+        <p:nvSpPr>
+          <p:cNvPr id="30" name="Text 23"/>
+          <p:cNvSpPr txBox="1"/>
+          <p:nvPr/>
+        </p:nvSpPr>
+        <p:spPr>
+          <a:xfrm>
+            <a:off x="10744200" y="2011680"/>
+            <a:ext cx="822960" cy="566928"/>
+          </a:xfrm>
+          <a:prstGeom prst="rect">
+            <a:avLst/>
+          </a:prstGeom>
+          <a:noFill/>
+          <a:ln/>
+        </p:spPr>
+        <p:txBody>
+          <a:bodyPr wrap="square" lIns="0" tIns="0" rIns="0" bIns="0" rtlCol="0" anchor="ctr"/>
+          <a:lstStyle/>
+          <a:p>
+            <a:pPr algn="r" indent="0" marL="0">
+              <a:buNone/>
+            </a:pPr>
+            <a:r>
+              <a:rPr lang="en-US" sz="2200" b="1" dirty="0">
+                <a:solidFill>
+                  <a:schemeClr val="accent6"/>
+                </a:solidFill>
+              </a:rPr>
+              <a:t>60%</a:t>
+            </a:r>
+            <a:endParaRPr lang="en-US" sz="2200" dirty="0"/>
+          </a:p>
+        </p:txBody>
+      </p:sp>
+      <p:sp>
+        <p:nvSpPr>
+          <p:cNvPr id="31" name="Barra fondo Avalúos"/>
+          <p:cNvSpPr/>
+          <p:nvPr/>
+        </p:nvSpPr>
+        <p:spPr>
+          <a:xfrm>
+            <a:off x="7909560" y="2770632"/>
+            <a:ext cx="3639312" cy="128016"/>
+          </a:xfrm>
+          <a:prstGeom prst="roundRect">
+            <a:avLst>
+              <a:gd name="adj" fmla="val 50000"/>
+            </a:avLst>
+          </a:prstGeom>
+          <a:solidFill>
+            <a:srgbClr val="1A4378"/>
+          </a:solidFill>
+          <a:ln w="12700">
+            <a:solidFill>
+              <a:srgbClr val="1A4378"/>
+            </a:solidFill>
+            <a:prstDash val="solid"/>
+          </a:ln>
+        </p:spPr>
+      </p:sp>
+      <p:sp>
+        <p:nvSpPr>
+          <p:cNvPr id="32" name="Barra avance Avalúos"/>
+          <p:cNvSpPr/>
+          <p:nvPr/>
+        </p:nvSpPr>
+        <p:spPr>
+          <a:xfrm>
+            <a:off x="7909560" y="2770632"/>
+            <a:ext cx="2183587" cy="128016"/>
+          </a:xfrm>
+          <a:prstGeom prst="roundRect">
+            <a:avLst>
+              <a:gd name="adj" fmla="val 50000"/>
+            </a:avLst>
+          </a:prstGeom>
+          <a:solidFill>
+            <a:schemeClr val="accent6"/>
+          </a:solidFill>
+          <a:ln w="12700">
+            <a:solidFill>
+              <a:schemeClr val="accent6"/>
+            </a:solidFill>
+            <a:prstDash val="solid"/>
+          </a:ln>
+        </p:spPr>
+      </p:sp>
+      <p:sp>
+        <p:nvSpPr>
+          <p:cNvPr id="33" name="Círculo Examen GIR 2026"/>
+          <p:cNvSpPr/>
+          <p:nvPr/>
+        </p:nvSpPr>
+        <p:spPr>
+          <a:xfrm>
+            <a:off x="7909560" y="3383280"/>
+            <a:ext cx="475488" cy="475488"/>
+          </a:xfrm>
+          <a:prstGeom prst="ellipse">
+            <a:avLst/>
+          </a:prstGeom>
+          <a:solidFill>
+            <a:schemeClr val="accent3"/>
+          </a:solidFill>
+          <a:ln w="12700">
+            <a:solidFill>
+              <a:schemeClr val="accent3"/>
+            </a:solidFill>
+            <a:prstDash val="solid"/>
+          </a:ln>
+        </p:spPr>
+      </p:sp>
+      <p:pic>
+        <p:nvPicPr>
+          <p:cNvPr id="34" name="Icono Examen GIR 2026" descr="preencoded.png">    </p:cNvPr>
+          <p:cNvPicPr>
+            <a:picLocks noChangeAspect="1"/>
+          </p:cNvPicPr>
+          <p:nvPr/>
+        </p:nvPicPr>
+        <p:blipFill>
+          <a:blip r:embed="rId6"/>
+          <a:stretch>
+            <a:fillRect/>
+          </a:stretch>
+        </p:blipFill>
+        <p:spPr>
+          <a:xfrm>
+            <a:off x="8037942" y="3511662"/>
+            <a:ext cx="218724" cy="218724"/>
+          </a:xfrm>
+          <a:prstGeom prst="rect">
+            <a:avLst/>
+          </a:prstGeom>
+        </p:spPr>
+      </p:pic>
+      <p:sp>
+        <p:nvSpPr>
+          <p:cNvPr id="35" name="Text 27"/>
+          <p:cNvSpPr txBox="1"/>
+          <p:nvPr/>
+        </p:nvSpPr>
+        <p:spPr>
+          <a:xfrm>
+            <a:off x="8549640" y="3337560"/>
+            <a:ext cx="2377440" cy="566928"/>
+          </a:xfrm>
+          <a:prstGeom prst="rect">
+            <a:avLst/>
+          </a:prstGeom>
+          <a:noFill/>
+          <a:ln/>
+        </p:spPr>
+        <p:txBody>
+          <a:bodyPr wrap="square" lIns="0" tIns="0" rIns="0" bIns="0" rtlCol="0" anchor="ctr"/>
+          <a:lstStyle/>
+          <a:p>
+            <a:pPr indent="0" marL="0">
+              <a:buNone/>
+            </a:pPr>
+            <a:r>
+              <a:rPr lang="en-US" sz="1400" b="1" dirty="0">
+                <a:solidFill>
+                  <a:schemeClr val="bg1"/>
+                </a:solidFill>
+              </a:rPr>
+              <a:t>Examen GIR 2026</a:t>
+            </a:r>
+            <a:endParaRPr lang="en-US" sz="1400" dirty="0"/>
+          </a:p>
+          <a:p>
+            <a:pPr indent="0" marL="0">
+              <a:buNone/>
+            </a:pPr>
+            <a:r>
+              <a:rPr lang="en-US" sz="1100" dirty="0">
+                <a:solidFill>
+                  <a:schemeClr val="accent5"/>
+                </a:solidFill>
+              </a:rPr>
+              <a:t>Capacitación y evaluación de riesgos</a:t>
+            </a:r>
+            <a:endParaRPr lang="en-US" sz="1400" dirty="0"/>
+          </a:p>
+        </p:txBody>
+      </p:sp>
+      <p:sp>
+        <p:nvSpPr>
+          <p:cNvPr id="36" name="Text 28"/>
+          <p:cNvSpPr txBox="1"/>
+          <p:nvPr/>
+        </p:nvSpPr>
+        <p:spPr>
+          <a:xfrm>
+            <a:off x="10744200" y="3337560"/>
+            <a:ext cx="822960" cy="566928"/>
+          </a:xfrm>
+          <a:prstGeom prst="rect">
+            <a:avLst/>
+          </a:prstGeom>
+          <a:noFill/>
+          <a:ln/>
+        </p:spPr>
+        <p:txBody>
+          <a:bodyPr wrap="square" lIns="0" tIns="0" rIns="0" bIns="0" rtlCol="0" anchor="ctr"/>
+          <a:lstStyle/>
+          <a:p>
+            <a:pPr algn="r" indent="0" marL="0">
+              <a:buNone/>
+            </a:pPr>
+            <a:r>
+              <a:rPr lang="en-US" sz="2200" b="1" dirty="0">
+                <a:solidFill>
+                  <a:schemeClr val="accent6"/>
+                </a:solidFill>
+              </a:rPr>
+              <a:t>50%</a:t>
+            </a:r>
+            <a:endParaRPr lang="en-US" sz="2200" dirty="0"/>
+          </a:p>
+        </p:txBody>
+      </p:sp>
+      <p:sp>
+        <p:nvSpPr>
+          <p:cNvPr id="37" name="Barra fondo Examen GIR 2026"/>
+          <p:cNvSpPr/>
+          <p:nvPr/>
+        </p:nvSpPr>
+        <p:spPr>
+          <a:xfrm>
+            <a:off x="7909560" y="4096512"/>
+            <a:ext cx="3639312" cy="128016"/>
+          </a:xfrm>
+          <a:prstGeom prst="roundRect">
+            <a:avLst>
+              <a:gd name="adj" fmla="val 50000"/>
+            </a:avLst>
+          </a:prstGeom>
+          <a:solidFill>
+            <a:srgbClr val="1A4378"/>
+          </a:solidFill>
+          <a:ln w="12700">
+            <a:solidFill>
+              <a:srgbClr val="1A4378"/>
+            </a:solidFill>
+            <a:prstDash val="solid"/>
+          </a:ln>
+        </p:spPr>
+      </p:sp>
+      <p:sp>
+        <p:nvSpPr>
+          <p:cNvPr id="38" name="Barra avance Examen GIR 2026"/>
+          <p:cNvSpPr/>
+          <p:nvPr/>
+        </p:nvSpPr>
+        <p:spPr>
+          <a:xfrm>
+            <a:off x="7909560" y="4096512"/>
+            <a:ext cx="1819656" cy="128016"/>
+          </a:xfrm>
+          <a:prstGeom prst="roundRect">
+            <a:avLst>
+              <a:gd name="adj" fmla="val 50000"/>
+            </a:avLst>
+          </a:prstGeom>
+          <a:solidFill>
+            <a:schemeClr val="accent6"/>
+          </a:solidFill>
+          <a:ln w="12700">
+            <a:solidFill>
+              <a:schemeClr val="accent6"/>
+            </a:solidFill>
+            <a:prstDash val="solid"/>
+          </a:ln>
+        </p:spPr>
+      </p:sp>
+      <p:sp>
+        <p:nvSpPr>
+          <p:cNvPr id="39" name="Círculo nota"/>
+          <p:cNvSpPr/>
+          <p:nvPr/>
+        </p:nvSpPr>
+        <p:spPr>
+          <a:xfrm>
+            <a:off x="7909560" y="4846320"/>
+            <a:ext cx="475488" cy="475488"/>
+          </a:xfrm>
+          <a:prstGeom prst="ellipse">
+            <a:avLst/>
+          </a:prstGeom>
+          <a:solidFill>
+            <a:schemeClr val="accent6"/>
+          </a:solidFill>
+          <a:ln w="12700">
+            <a:solidFill>
+              <a:schemeClr val="accent6"/>
+            </a:solidFill>
+            <a:prstDash val="solid"/>
+          </a:ln>
+        </p:spPr>
+      </p:sp>
+      <p:pic>
+        <p:nvPicPr>
+          <p:cNvPr id="40" name="Icono nota" descr="preencoded.png">    </p:cNvPr>
+          <p:cNvPicPr>
+            <a:picLocks noChangeAspect="1"/>
+          </p:cNvPicPr>
+          <p:nvPr/>
+        </p:nvPicPr>
+        <p:blipFill>
+          <a:blip r:embed="rId7"/>
+          <a:stretch>
+            <a:fillRect/>
+          </a:stretch>
+        </p:blipFill>
+        <p:spPr>
+          <a:xfrm>
+            <a:off x="8037942" y="4974702"/>
+            <a:ext cx="218724" cy="218724"/>
+          </a:xfrm>
+          <a:prstGeom prst="rect">
+            <a:avLst/>
+          </a:prstGeom>
+        </p:spPr>
+      </p:pic>
+      <p:sp>
+        <p:nvSpPr>
+          <p:cNvPr id="41" name="Text 32"/>
+          <p:cNvSpPr txBox="1"/>
+          <p:nvPr/>
+        </p:nvSpPr>
+        <p:spPr>
+          <a:xfrm>
+            <a:off x="8549640" y="4709160"/>
+            <a:ext cx="3017520" cy="749808"/>
+          </a:xfrm>
+          <a:prstGeom prst="rect">
+            <a:avLst/>
+          </a:prstGeom>
+          <a:noFill/>
+          <a:ln/>
+        </p:spPr>
+        <p:txBody>
+          <a:bodyPr wrap="square" lIns="0" tIns="0" rIns="0" bIns="0" rtlCol="0" anchor="ctr"/>
+          <a:lstStyle/>
+          <a:p>
+            <a:pPr indent="0" marL="0">
+              <a:buNone/>
+            </a:pPr>
+            <a:r>
+              <a:rPr lang="en-US" sz="1200" dirty="0">
+                <a:solidFill>
+                  <a:schemeClr val="accent5"/>
+                </a:solidFill>
+              </a:rPr>
+              <a:t>En S2: </a:t>
+            </a:r>
+            <a:pPr indent="0" marL="0">
+              <a:buNone/>
+            </a:pPr>
+            <a:r>
+              <a:rPr lang="en-US" sz="1200" b="1" dirty="0">
+                <a:solidFill>
+                  <a:schemeClr val="bg1"/>
+                </a:solidFill>
+              </a:rPr>
+              <a:t>BIA, continuidad, auditorías y Política de TC</a:t>
             </a:r>
             <a:endParaRPr lang="en-US" sz="1200" dirty="0"/>
           </a:p>
@@ -4960,7 +10186,7 @@
         <a:srgbClr val="D7DEE9"/>
       </a:accent5>
       <a:accent6>
-        <a:srgbClr val="2E8B57"/>
+        <a:srgbClr val="F2B233"/>
       </a:accent6>
       <a:hlink>
         <a:srgbClr val="1F5FA8"/>
